--- a/docs/final docs/AI_Master_Project_최종발표_멘티명_사번.pptx
+++ b/docs/final docs/AI_Master_Project_최종발표_멘티명_사번.pptx
@@ -1493,7 +1493,7 @@
         </p:nvSpPr>
         <p:spPr>
           <a:xfrm>
-            <a:off x="0" y="5029200"/>
+            <a:off x="91440" y="5029200"/>
             <a:ext cx="9144000" cy="114300"/>
           </a:xfrm>
           <a:prstGeom prst="rect">
@@ -1678,19 +1678,81 @@
           <a:p>
             <a:r>
               <a:rPr lang="ko-Kore-KR" altLang="ko-Kore-KR" sz="900"/>
-              <a:t>배포 후 및 정기 점검마다 운영자가 대량의 로그를 직접 확인하는 반복 업무를 자동화하여 점검 시간을 단축하고자 했습니다</a:t>
+              <a:t>배포 후 및 정기 점검마다 운영자가 대량의 로그를 직접 확인하는 반복 업무를</a:t>
+            </a:r>
+            <a:r>
+              <a:rPr lang="ko-Kore-KR" altLang="en-US" sz="900"/>
+              <a:t> 수행하는데</a:t>
+            </a:r>
+            <a:r>
+              <a:rPr lang="ko-KR" altLang="en-US" sz="900"/>
+              <a:t> 이는 길게는 </a:t>
+            </a:r>
+            <a:r>
+              <a:rPr lang="en-US" altLang="ko-KR" sz="900"/>
+              <a:t>30</a:t>
+            </a:r>
+            <a:r>
+              <a:rPr lang="ko-KR" altLang="en-US" sz="900"/>
+              <a:t>분 이상 소요되고 있으며</a:t>
+            </a:r>
+            <a:r>
+              <a:rPr lang="en-US" altLang="ko-KR" sz="900"/>
+              <a:t>,</a:t>
+            </a:r>
+            <a:r>
+              <a:rPr lang="ko-KR" altLang="en-US" sz="900"/>
+              <a:t> 운영자가 체득하고 있는 정보가 지식화 되지 않고 있습니다</a:t>
             </a:r>
             <a:r>
               <a:rPr lang="en-US" altLang="ko-KR" sz="900"/>
               <a:t>.</a:t>
             </a:r>
-            <a:r>
-              <a:rPr lang="ko-KR" altLang="en-US" sz="900"/>
-              <a:t> </a:t>
-            </a:r>
-            <a:r>
-              <a:rPr lang="ko-Kore-KR" altLang="ko-Kore-KR" sz="900"/>
-              <a:t>운영자는 선별된 이상 후보만 검토할 수 있습니다.</a:t>
+          </a:p>
+          <a:p>
+            <a:r>
+              <a:rPr lang="ko-KR" altLang="en-US" sz="900">
+                <a:solidFill>
+                  <a:srgbClr val="666666"/>
+                </a:solidFill>
+                <a:latin typeface="Arial" pitchFamily="34" charset="0"/>
+                <a:ea typeface="Arial" pitchFamily="34" charset="-122"/>
+                <a:cs typeface="Arial" pitchFamily="34" charset="-120"/>
+              </a:rPr>
+              <a:t>반복되는 작업을 줄이고</a:t>
+            </a:r>
+            <a:r>
+              <a:rPr lang="en-US" altLang="ko-KR" sz="900">
+                <a:solidFill>
+                  <a:srgbClr val="666666"/>
+                </a:solidFill>
+                <a:latin typeface="Arial" pitchFamily="34" charset="0"/>
+                <a:ea typeface="Arial" pitchFamily="34" charset="-122"/>
+                <a:cs typeface="Arial" pitchFamily="34" charset="-120"/>
+              </a:rPr>
+              <a:t>,</a:t>
+            </a:r>
+            <a:r>
+              <a:rPr lang="ko-KR" altLang="en-US" sz="900">
+                <a:solidFill>
+                  <a:srgbClr val="666666"/>
+                </a:solidFill>
+                <a:latin typeface="Arial" pitchFamily="34" charset="0"/>
+                <a:ea typeface="Arial" pitchFamily="34" charset="-122"/>
+                <a:cs typeface="Arial" pitchFamily="34" charset="-120"/>
+              </a:rPr>
+              <a:t> 이 결과를 지식화 하고자 합니다</a:t>
+            </a:r>
+            <a:r>
+              <a:rPr lang="en-US" altLang="ko-KR" sz="900">
+                <a:solidFill>
+                  <a:srgbClr val="666666"/>
+                </a:solidFill>
+                <a:latin typeface="Arial" pitchFamily="34" charset="0"/>
+                <a:ea typeface="Arial" pitchFamily="34" charset="-122"/>
+                <a:cs typeface="Arial" pitchFamily="34" charset="-120"/>
+              </a:rPr>
+              <a:t>.</a:t>
             </a:r>
             <a:br>
               <a:rPr lang="en-US" sz="400" dirty="0">
@@ -1724,14 +1786,35 @@
           <a:p>
             <a:r>
               <a:rPr lang="ko-Kore-KR" altLang="ko-Kore-KR" sz="900"/>
-              <a:t>로그 점검 자동화로 배포 후 점검 시간을 약 15분에서 5분 이하, 월간 상세 점검을 약 40분에서 10분 이하로 줄이는 것이 목표입니다.</a:t>
-            </a:r>
-            <a:br>
-              <a:rPr lang="ko-Kore-KR" altLang="ko-Kore-KR" sz="900"/>
-            </a:br>
+              <a:t>로그 점검 자동화로 배포 후 점검 시간</a:t>
+            </a:r>
+            <a:r>
+              <a:rPr lang="ko-Kore-KR" altLang="en-US" sz="900"/>
+              <a:t> 줄여</a:t>
+            </a:r>
+            <a:r>
+              <a:rPr lang="en-US" altLang="ko-Kore-KR" sz="900"/>
+              <a:t>,</a:t>
+            </a:r>
+            <a:r>
+              <a:rPr lang="ko-KR" altLang="en-US" sz="900"/>
+              <a:t> </a:t>
+            </a:r>
             <a:r>
               <a:rPr lang="ko-Kore-KR" altLang="ko-Kore-KR" sz="900"/>
               <a:t>반복 점검에 투입되는 휴먼 리소스를 절감하고, 확보된 인력을 장애 대응과 서비스 품질 개선 등 고부가가치 업무에 집중시킬 수 있습니다.</a:t>
+            </a:r>
+            <a:r>
+              <a:rPr lang="en-US" altLang="ko-Kore-KR" sz="900"/>
+              <a:t> </a:t>
+            </a:r>
+            <a:r>
+              <a:rPr lang="ko-KR" altLang="en-US" sz="900"/>
+              <a:t>또한 인력이 변경되어도 기존 지식을 바로 승계 할 수 있습니다</a:t>
+            </a:r>
+            <a:r>
+              <a:rPr lang="en-US" altLang="ko-KR" sz="900"/>
+              <a:t>.</a:t>
             </a:r>
             <a:endParaRPr lang="en-US" sz="900" dirty="0">
               <a:solidFill>
@@ -2067,7 +2150,7 @@
               <a:buNone/>
             </a:pPr>
             <a:r>
-              <a:rPr lang="en-US" b="1" dirty="0">
+              <a:rPr lang="en-US" b="1">
                 <a:solidFill>
                   <a:srgbClr val="1A365D"/>
                 </a:solidFill>
@@ -2075,7 +2158,29 @@
                 <a:ea typeface="Arial" pitchFamily="34" charset="-122"/>
                 <a:cs typeface="Arial" pitchFamily="34" charset="-120"/>
               </a:rPr>
-              <a:t>[수치 1]</a:t>
+              <a:t>[</a:t>
+            </a:r>
+            <a:r>
+              <a:rPr lang="ko-KR" altLang="en-US" b="1">
+                <a:solidFill>
+                  <a:srgbClr val="1A365D"/>
+                </a:solidFill>
+                <a:latin typeface="Arial" pitchFamily="34" charset="0"/>
+                <a:ea typeface="Arial" pitchFamily="34" charset="-122"/>
+                <a:cs typeface="Arial" pitchFamily="34" charset="-120"/>
+              </a:rPr>
+              <a:t>지식축적</a:t>
+            </a:r>
+            <a:r>
+              <a:rPr lang="en-US" b="1">
+                <a:solidFill>
+                  <a:srgbClr val="1A365D"/>
+                </a:solidFill>
+                <a:latin typeface="Arial" pitchFamily="34" charset="0"/>
+                <a:ea typeface="Arial" pitchFamily="34" charset="-122"/>
+                <a:cs typeface="Arial" pitchFamily="34" charset="-120"/>
+              </a:rPr>
+              <a:t>]</a:t>
             </a:r>
             <a:endParaRPr lang="en-US" dirty="0"/>
           </a:p>
@@ -2084,7 +2189,7 @@
               <a:buNone/>
             </a:pPr>
             <a:r>
-              <a:rPr lang="ko-KR" altLang="en-US" sz="800" dirty="0">
+              <a:rPr lang="ko-KR" altLang="en-US" sz="800">
                 <a:solidFill>
                   <a:srgbClr val="666666"/>
                 </a:solidFill>
@@ -2092,40 +2197,7 @@
                 <a:ea typeface="Arial" pitchFamily="34" charset="-122"/>
                 <a:cs typeface="Arial" pitchFamily="34" charset="-120"/>
               </a:rPr>
-              <a:t>성과 지표 설명</a:t>
-            </a:r>
-            <a:r>
-              <a:rPr lang="en-US" altLang="ko-KR" sz="800" dirty="0">
-                <a:solidFill>
-                  <a:srgbClr val="666666"/>
-                </a:solidFill>
-                <a:latin typeface="Arial" pitchFamily="34" charset="0"/>
-                <a:ea typeface="Arial" pitchFamily="34" charset="-122"/>
-                <a:cs typeface="Arial" pitchFamily="34" charset="-120"/>
-              </a:rPr>
-              <a:t>(</a:t>
-            </a:r>
-            <a:r>
-              <a:rPr lang="ko-KR" altLang="en-US" sz="800" dirty="0">
-                <a:solidFill>
-                  <a:srgbClr val="666666"/>
-                </a:solidFill>
-                <a:latin typeface="Arial" pitchFamily="34" charset="0"/>
-                <a:ea typeface="Arial" pitchFamily="34" charset="-122"/>
-                <a:cs typeface="Arial" pitchFamily="34" charset="-120"/>
-              </a:rPr>
-              <a:t>정성적 지표</a:t>
-            </a:r>
-            <a:r>
-              <a:rPr lang="en-US" altLang="ko-KR" sz="800" dirty="0">
-                <a:solidFill>
-                  <a:srgbClr val="666666"/>
-                </a:solidFill>
-                <a:latin typeface="Arial" pitchFamily="34" charset="0"/>
-                <a:ea typeface="Arial" pitchFamily="34" charset="-122"/>
-                <a:cs typeface="Arial" pitchFamily="34" charset="-120"/>
-              </a:rPr>
-              <a:t>)</a:t>
+              <a:t>운영자 개인에게만 쌓이는 지식을 재사용 가능한 운영 지식으로 전환</a:t>
             </a:r>
             <a:endParaRPr lang="en-US" sz="2200" dirty="0"/>
           </a:p>
@@ -2181,7 +2253,7 @@
               <a:buNone/>
             </a:pPr>
             <a:r>
-              <a:rPr lang="en-US" b="1" dirty="0">
+              <a:rPr lang="en-US" b="1">
                 <a:solidFill>
                   <a:srgbClr val="1A365D"/>
                 </a:solidFill>
@@ -2189,7 +2261,29 @@
                 <a:ea typeface="Arial" pitchFamily="34" charset="-122"/>
                 <a:cs typeface="Arial" pitchFamily="34" charset="-120"/>
               </a:rPr>
-              <a:t>[수치 2]</a:t>
+              <a:t>[</a:t>
+            </a:r>
+            <a:r>
+              <a:rPr lang="ko-KR" altLang="en-US" b="1">
+                <a:solidFill>
+                  <a:srgbClr val="1A365D"/>
+                </a:solidFill>
+                <a:latin typeface="Arial" pitchFamily="34" charset="0"/>
+                <a:ea typeface="Arial" pitchFamily="34" charset="-122"/>
+                <a:cs typeface="Arial" pitchFamily="34" charset="-120"/>
+              </a:rPr>
+              <a:t>점검시간</a:t>
+            </a:r>
+            <a:r>
+              <a:rPr lang="en-US" b="1">
+                <a:solidFill>
+                  <a:srgbClr val="1A365D"/>
+                </a:solidFill>
+                <a:latin typeface="Arial" pitchFamily="34" charset="0"/>
+                <a:ea typeface="Arial" pitchFamily="34" charset="-122"/>
+                <a:cs typeface="Arial" pitchFamily="34" charset="-120"/>
+              </a:rPr>
+              <a:t>]</a:t>
             </a:r>
             <a:endParaRPr lang="en-US" dirty="0"/>
           </a:p>
@@ -2198,7 +2292,7 @@
               <a:buNone/>
             </a:pPr>
             <a:r>
-              <a:rPr lang="ko-KR" altLang="en-US" sz="800" dirty="0">
+              <a:rPr lang="ko-KR" altLang="en-US" sz="800">
                 <a:solidFill>
                   <a:srgbClr val="666666"/>
                 </a:solidFill>
@@ -2206,37 +2300,117 @@
                 <a:ea typeface="Arial" pitchFamily="34" charset="-122"/>
                 <a:cs typeface="Arial" pitchFamily="34" charset="-120"/>
               </a:rPr>
-              <a:t>성과 지표 설명</a:t>
-            </a:r>
-            <a:r>
-              <a:rPr lang="en-US" altLang="ko-KR" sz="800" dirty="0">
+              <a:t>로그 전수 조사에 걸리는 시간 감소</a:t>
+            </a:r>
+            <a:endParaRPr lang="en-US" altLang="ko-KR" sz="800">
+              <a:solidFill>
+                <a:srgbClr val="666666"/>
+              </a:solidFill>
+              <a:latin typeface="Arial" pitchFamily="34" charset="0"/>
+              <a:ea typeface="Arial" pitchFamily="34" charset="-122"/>
+              <a:cs typeface="Arial" pitchFamily="34" charset="-120"/>
+            </a:endParaRPr>
+          </a:p>
+          <a:p>
+            <a:pPr marL="0" indent="0" algn="ctr">
+              <a:buNone/>
+            </a:pPr>
+            <a:r>
+              <a:rPr lang="ko-KR" altLang="en-US" sz="800">
                 <a:solidFill>
                   <a:srgbClr val="666666"/>
                 </a:solidFill>
                 <a:latin typeface="Arial" pitchFamily="34" charset="0"/>
-                <a:ea typeface="Arial" pitchFamily="34" charset="-122"/>
+                <a:cs typeface="Arial" pitchFamily="34" charset="-120"/>
+              </a:rPr>
+              <a:t>약 </a:t>
+            </a:r>
+            <a:r>
+              <a:rPr lang="en-US" altLang="ko-KR" sz="800">
+                <a:solidFill>
+                  <a:srgbClr val="666666"/>
+                </a:solidFill>
+                <a:latin typeface="Arial" pitchFamily="34" charset="0"/>
+                <a:cs typeface="Arial" pitchFamily="34" charset="-120"/>
+              </a:rPr>
+              <a:t>30</a:t>
+            </a:r>
+            <a:r>
+              <a:rPr lang="ko-KR" altLang="en-US" sz="800">
+                <a:solidFill>
+                  <a:srgbClr val="666666"/>
+                </a:solidFill>
+                <a:latin typeface="Arial" pitchFamily="34" charset="0"/>
+                <a:cs typeface="Arial" pitchFamily="34" charset="-120"/>
+              </a:rPr>
+              <a:t>분 </a:t>
+            </a:r>
+            <a:r>
+              <a:rPr lang="en-US" altLang="ko-KR" sz="800">
+                <a:solidFill>
+                  <a:srgbClr val="666666"/>
+                </a:solidFill>
+                <a:latin typeface="Arial" pitchFamily="34" charset="0"/>
+                <a:cs typeface="Arial" pitchFamily="34" charset="-120"/>
+              </a:rPr>
+              <a:t>&gt;</a:t>
+            </a:r>
+            <a:r>
+              <a:rPr lang="ko-KR" altLang="en-US" sz="800">
+                <a:solidFill>
+                  <a:srgbClr val="666666"/>
+                </a:solidFill>
+                <a:latin typeface="Arial" pitchFamily="34" charset="0"/>
+                <a:cs typeface="Arial" pitchFamily="34" charset="-120"/>
+              </a:rPr>
+              <a:t> </a:t>
+            </a:r>
+            <a:r>
+              <a:rPr lang="en-US" altLang="ko-KR" sz="800">
+                <a:solidFill>
+                  <a:srgbClr val="666666"/>
+                </a:solidFill>
+                <a:latin typeface="Arial" pitchFamily="34" charset="0"/>
+                <a:cs typeface="Arial" pitchFamily="34" charset="-120"/>
+              </a:rPr>
+              <a:t>5</a:t>
+            </a:r>
+            <a:r>
+              <a:rPr lang="ko-KR" altLang="en-US" sz="800">
+                <a:solidFill>
+                  <a:srgbClr val="666666"/>
+                </a:solidFill>
+                <a:latin typeface="Arial" pitchFamily="34" charset="0"/>
+                <a:cs typeface="Arial" pitchFamily="34" charset="-120"/>
+              </a:rPr>
+              <a:t>분</a:t>
+            </a:r>
+            <a:r>
+              <a:rPr lang="en-US" altLang="ko-KR" sz="800">
+                <a:solidFill>
+                  <a:srgbClr val="666666"/>
+                </a:solidFill>
+                <a:latin typeface="Arial" pitchFamily="34" charset="0"/>
                 <a:cs typeface="Arial" pitchFamily="34" charset="-120"/>
               </a:rPr>
               <a:t>(</a:t>
             </a:r>
             <a:r>
-              <a:rPr lang="ko-KR" altLang="en-US" sz="800" dirty="0">
+              <a:rPr lang="ko-KR" altLang="en-US" sz="800">
                 <a:solidFill>
                   <a:srgbClr val="666666"/>
                 </a:solidFill>
                 <a:latin typeface="Arial" pitchFamily="34" charset="0"/>
-                <a:ea typeface="Arial" pitchFamily="34" charset="-122"/>
-                <a:cs typeface="Arial" pitchFamily="34" charset="-120"/>
-              </a:rPr>
-              <a:t>정량적 지표</a:t>
-            </a:r>
-            <a:r>
-              <a:rPr lang="en-US" altLang="ko-KR" sz="800" dirty="0">
+                <a:cs typeface="Arial" pitchFamily="34" charset="-120"/>
+              </a:rPr>
+              <a:t>추정</a:t>
+            </a:r>
+            <a:r>
+              <a:rPr lang="en-US" altLang="ko-KR" sz="800">
                 <a:solidFill>
                   <a:srgbClr val="666666"/>
                 </a:solidFill>
                 <a:latin typeface="Arial" pitchFamily="34" charset="0"/>
-                <a:ea typeface="Arial" pitchFamily="34" charset="-122"/>
                 <a:cs typeface="Arial" pitchFamily="34" charset="-120"/>
               </a:rPr>
               <a:t>)</a:t>
@@ -2295,7 +2469,7 @@
               <a:buNone/>
             </a:pPr>
             <a:r>
-              <a:rPr lang="en-US" b="1" dirty="0">
+              <a:rPr lang="en-US" b="1">
                 <a:solidFill>
                   <a:srgbClr val="1A365D"/>
                 </a:solidFill>
@@ -2303,7 +2477,29 @@
                 <a:ea typeface="Arial" pitchFamily="34" charset="-122"/>
                 <a:cs typeface="Arial" pitchFamily="34" charset="-120"/>
               </a:rPr>
-              <a:t>[수치 3]</a:t>
+              <a:t>[Pattern </a:t>
+            </a:r>
+            <a:r>
+              <a:rPr lang="ko-KR" altLang="en-US" b="1">
+                <a:solidFill>
+                  <a:srgbClr val="1A365D"/>
+                </a:solidFill>
+                <a:latin typeface="Arial" pitchFamily="34" charset="0"/>
+                <a:ea typeface="Arial" pitchFamily="34" charset="-122"/>
+                <a:cs typeface="Arial" pitchFamily="34" charset="-120"/>
+              </a:rPr>
+              <a:t>인식률</a:t>
+            </a:r>
+            <a:r>
+              <a:rPr lang="en-US" b="1">
+                <a:solidFill>
+                  <a:srgbClr val="1A365D"/>
+                </a:solidFill>
+                <a:latin typeface="Arial" pitchFamily="34" charset="0"/>
+                <a:ea typeface="Arial" pitchFamily="34" charset="-122"/>
+                <a:cs typeface="Arial" pitchFamily="34" charset="-120"/>
+              </a:rPr>
+              <a:t>]</a:t>
             </a:r>
             <a:endParaRPr lang="en-US" dirty="0"/>
           </a:p>
@@ -2312,7 +2508,7 @@
               <a:buNone/>
             </a:pPr>
             <a:r>
-              <a:rPr lang="en-US" sz="800" dirty="0">
+              <a:rPr lang="ko-KR" altLang="en-US" sz="800">
                 <a:solidFill>
                   <a:srgbClr val="666666"/>
                 </a:solidFill>
@@ -2320,7 +2516,72 @@
                 <a:ea typeface="Arial" pitchFamily="34" charset="-122"/>
                 <a:cs typeface="Arial" pitchFamily="34" charset="-120"/>
               </a:rPr>
-              <a:t>성과 지표 설명 (예: 업무 자동화율, 정보 검색 시간 단축 등)</a:t>
+              <a:t>신규패턴 인식률 </a:t>
+            </a:r>
+            <a:r>
+              <a:rPr lang="en-US" altLang="ko-KR" sz="800">
+                <a:solidFill>
+                  <a:srgbClr val="666666"/>
+                </a:solidFill>
+                <a:latin typeface="Arial" pitchFamily="34" charset="0"/>
+                <a:ea typeface="Arial" pitchFamily="34" charset="-122"/>
+                <a:cs typeface="Arial" pitchFamily="34" charset="-120"/>
+              </a:rPr>
+              <a:t>90%</a:t>
+            </a:r>
+            <a:r>
+              <a:rPr lang="ko-KR" altLang="en-US" sz="800">
+                <a:solidFill>
+                  <a:srgbClr val="666666"/>
+                </a:solidFill>
+                <a:latin typeface="Arial" pitchFamily="34" charset="0"/>
+                <a:ea typeface="Arial" pitchFamily="34" charset="-122"/>
+                <a:cs typeface="Arial" pitchFamily="34" charset="-120"/>
+              </a:rPr>
+              <a:t> 이상</a:t>
+            </a:r>
+            <a:br>
+              <a:rPr lang="en-US" altLang="ko-KR" sz="800">
+                <a:solidFill>
+                  <a:srgbClr val="666666"/>
+                </a:solidFill>
+                <a:latin typeface="Arial" pitchFamily="34" charset="0"/>
+                <a:ea typeface="Arial" pitchFamily="34" charset="-122"/>
+                <a:cs typeface="Arial" pitchFamily="34" charset="-120"/>
+              </a:rPr>
+            </a:br>
+            <a:r>
+              <a:rPr lang="ko-KR" altLang="en-US" sz="800">
+                <a:solidFill>
+                  <a:srgbClr val="666666"/>
+                </a:solidFill>
+                <a:latin typeface="Arial" pitchFamily="34" charset="0"/>
+                <a:ea typeface="Arial" pitchFamily="34" charset="-122"/>
+                <a:cs typeface="Arial" pitchFamily="34" charset="-120"/>
+              </a:rPr>
+              <a:t>기존패턴 인식률 </a:t>
+            </a:r>
+            <a:r>
+              <a:rPr lang="en-US" altLang="ko-KR" sz="800">
+                <a:solidFill>
+                  <a:srgbClr val="666666"/>
+                </a:solidFill>
+                <a:latin typeface="Arial" pitchFamily="34" charset="0"/>
+                <a:ea typeface="Arial" pitchFamily="34" charset="-122"/>
+                <a:cs typeface="Arial" pitchFamily="34" charset="-120"/>
+              </a:rPr>
+              <a:t>80%</a:t>
+            </a:r>
+            <a:r>
+              <a:rPr lang="ko-KR" altLang="en-US" sz="800">
+                <a:solidFill>
+                  <a:srgbClr val="666666"/>
+                </a:solidFill>
+                <a:latin typeface="Arial" pitchFamily="34" charset="0"/>
+                <a:ea typeface="Arial" pitchFamily="34" charset="-122"/>
+                <a:cs typeface="Arial" pitchFamily="34" charset="-120"/>
+              </a:rPr>
+              <a:t> 이상</a:t>
             </a:r>
             <a:endParaRPr lang="en-US" sz="2200" dirty="0"/>
           </a:p>
@@ -2430,7 +2691,47 @@
                 <a:latin typeface="Arial" pitchFamily="34" charset="0"/>
                 <a:cs typeface="Arial" pitchFamily="34" charset="-120"/>
               </a:rPr>
-              <a:t>로그 점검 자동화로 반복 업무 시간을 단축하고, 검증된 분석·조치 결과를 재사용 가능한 운영 지식으로 전환했습니다.</a:t>
+              <a:t>로그 점검 자동화로 반복 업무 시간을 </a:t>
+            </a:r>
+            <a:r>
+              <a:rPr lang="ko-Kore-KR" altLang="en-US" sz="950" i="1">
+                <a:solidFill>
+                  <a:srgbClr val="FFFFFF"/>
+                </a:solidFill>
+                <a:latin typeface="Arial" pitchFamily="34" charset="0"/>
+                <a:cs typeface="Arial" pitchFamily="34" charset="-120"/>
+              </a:rPr>
+              <a:t> </a:t>
+            </a:r>
+            <a:r>
+              <a:rPr lang="en-US" altLang="ko-Kore-KR" sz="950" i="1">
+                <a:solidFill>
+                  <a:srgbClr val="FFFFFF"/>
+                </a:solidFill>
+                <a:latin typeface="Arial" pitchFamily="34" charset="0"/>
+                <a:cs typeface="Arial" pitchFamily="34" charset="-120"/>
+              </a:rPr>
+              <a:t>7</a:t>
+            </a:r>
+            <a:r>
+              <a:rPr lang="en-US" altLang="ko-KR" sz="950" i="1">
+                <a:solidFill>
+                  <a:srgbClr val="FFFFFF"/>
+                </a:solidFill>
+                <a:latin typeface="Arial" pitchFamily="34" charset="0"/>
+                <a:cs typeface="Arial" pitchFamily="34" charset="-120"/>
+              </a:rPr>
+              <a:t>0%</a:t>
+            </a:r>
+            <a:r>
+              <a:rPr lang="ko-Kore-KR" altLang="ko-Kore-KR" sz="950" i="1">
+                <a:solidFill>
+                  <a:srgbClr val="FFFFFF"/>
+                </a:solidFill>
+                <a:latin typeface="Arial" pitchFamily="34" charset="0"/>
+                <a:cs typeface="Arial" pitchFamily="34" charset="-120"/>
+              </a:rPr>
+              <a:t>단축하고, 검증된 분석·조치 결과를 재사용 가능한 운영 지식으로 전환했습니다.</a:t>
             </a:r>
             <a:r>
               <a:rPr lang="en-US" altLang="ko-Kore-KR" sz="950" i="1">
@@ -3374,36 +3675,6 @@
           </a:p>
         </p:txBody>
       </p:sp>
-      <p:pic>
-        <p:nvPicPr>
-          <p:cNvPr id="30" name="그림 29">
-            <a:extLst>
-              <a:ext uri="{FF2B5EF4-FFF2-40B4-BE49-F238E27FC236}">
-                <a16:creationId xmlns:a16="http://schemas.microsoft.com/office/drawing/2014/main" id="{10107A98-C7A8-EE04-BDF4-4B72C7DE07DF}"/>
-              </a:ext>
-            </a:extLst>
-          </p:cNvPr>
-          <p:cNvPicPr>
-            <a:picLocks noChangeAspect="1"/>
-          </p:cNvPicPr>
-          <p:nvPr/>
-        </p:nvPicPr>
-        <p:blipFill>
-          <a:blip r:embed="rId3"/>
-          <a:stretch>
-            <a:fillRect/>
-          </a:stretch>
-        </p:blipFill>
-        <p:spPr>
-          <a:xfrm>
-            <a:off x="329184" y="831778"/>
-            <a:ext cx="4964163" cy="3905141"/>
-          </a:xfrm>
-          <a:prstGeom prst="rect">
-            <a:avLst/>
-          </a:prstGeom>
-        </p:spPr>
-      </p:pic>
     </p:spTree>
   </p:cSld>
   <p:clrMapOvr>
@@ -4022,6 +4293,11 @@
               </a:rPr>
               <a:t> </a:t>
             </a:r>
+          </a:p>
+          <a:p>
+            <a:pPr marL="0" indent="0">
+              <a:buNone/>
+            </a:pPr>
             <a:endParaRPr lang="en-US" sz="900" b="1" dirty="0">
               <a:solidFill>
                 <a:srgbClr val="333333"/>
@@ -4110,7 +4386,10 @@
             </a:r>
           </a:p>
           <a:p>
-            <a:endParaRPr lang="en-US" altLang="ko-Kore-KR" sz="850">
+            <a:pPr marL="0" indent="0">
+              <a:buNone/>
+            </a:pPr>
+            <a:endParaRPr lang="en-US" sz="850">
               <a:solidFill>
                 <a:srgbClr val="666666"/>
               </a:solidFill>
@@ -4519,7 +4798,7 @@
                   <a:ea typeface="Arial" pitchFamily="34" charset="-122"/>
                   <a:cs typeface="Arial" pitchFamily="34" charset="-120"/>
                 </a:rPr>
-                <a:t>-</a:t>
+                <a:t>–</a:t>
               </a:r>
               <a:r>
                 <a:rPr lang="ko-KR" altLang="en-US" sz="850" b="1">
@@ -4533,6 +4812,16 @@
                 <a:t> </a:t>
               </a:r>
               <a:r>
+                <a:rPr lang="ko-KR" altLang="en-US" sz="800">
+                  <a:solidFill>
+                    <a:srgbClr val="666666"/>
+                  </a:solidFill>
+                  <a:latin typeface="Arial" pitchFamily="34" charset="0"/>
+                  <a:cs typeface="Arial" pitchFamily="34" charset="-120"/>
+                </a:rPr>
+                <a:t>중복 후보 </a:t>
+              </a:r>
+              <a:r>
                 <a:rPr lang="ko-Kore-KR" altLang="ko-Kore-KR" sz="800">
                   <a:solidFill>
                     <a:srgbClr val="666666"/>
@@ -4542,19 +4831,82 @@
                 </a:rPr>
                 <a:t>Fingerprint 수렴</a:t>
               </a:r>
-              <a:endParaRPr lang="en-US" sz="850" dirty="0"/>
-            </a:p>
-            <a:p>
               <a:r>
-                <a:rPr lang="ko-Kore-KR" altLang="ko-Kore-KR" sz="750">
+                <a:rPr lang="ko-KR" altLang="en-US" sz="800">
                   <a:solidFill>
                     <a:srgbClr val="666666"/>
                   </a:solidFill>
                   <a:latin typeface="Arial" pitchFamily="34" charset="0"/>
                   <a:cs typeface="Arial" pitchFamily="34" charset="-120"/>
                 </a:rPr>
-                <a:t>3개를 canonical 1개로 통합해 66.7% 축소, occurrence 100% 보존*</a:t>
+                <a:t> 정확도</a:t>
               </a:r>
+              <a:endParaRPr lang="en-US" altLang="ko-KR" sz="800" dirty="0">
+                <a:solidFill>
+                  <a:srgbClr val="666666"/>
+                </a:solidFill>
+                <a:latin typeface="Arial" pitchFamily="34" charset="0"/>
+                <a:cs typeface="Arial" pitchFamily="34" charset="-120"/>
+              </a:endParaRPr>
+            </a:p>
+            <a:p>
+              <a:r>
+                <a:rPr lang="ko-KR" altLang="en-US" sz="800">
+                  <a:solidFill>
+                    <a:srgbClr val="666666"/>
+                  </a:solidFill>
+                  <a:latin typeface="Arial" pitchFamily="34" charset="0"/>
+                  <a:cs typeface="Arial" pitchFamily="34" charset="-120"/>
+                </a:rPr>
+                <a:t> </a:t>
+              </a:r>
+              <a:r>
+                <a:rPr lang="en-US" altLang="ko-KR" sz="800">
+                  <a:solidFill>
+                    <a:srgbClr val="666666"/>
+                  </a:solidFill>
+                  <a:latin typeface="Arial" pitchFamily="34" charset="0"/>
+                  <a:cs typeface="Arial" pitchFamily="34" charset="-120"/>
+                </a:rPr>
+                <a:t>-</a:t>
+              </a:r>
+              <a:r>
+                <a:rPr lang="ko-KR" altLang="en-US" sz="800">
+                  <a:solidFill>
+                    <a:srgbClr val="666666"/>
+                  </a:solidFill>
+                  <a:latin typeface="Arial" pitchFamily="34" charset="0"/>
+                  <a:cs typeface="Arial" pitchFamily="34" charset="-120"/>
+                </a:rPr>
+                <a:t> 중복으로 처리되는 패턴 </a:t>
+              </a:r>
+              <a:r>
+                <a:rPr lang="en-US" altLang="ko-KR" sz="800">
+                  <a:solidFill>
+                    <a:srgbClr val="666666"/>
+                  </a:solidFill>
+                  <a:latin typeface="Arial" pitchFamily="34" charset="0"/>
+                  <a:cs typeface="Arial" pitchFamily="34" charset="-120"/>
+                </a:rPr>
+                <a:t>n/n </a:t>
+              </a:r>
+              <a:r>
+                <a:rPr lang="ko-KR" altLang="en-US" sz="800">
+                  <a:solidFill>
+                    <a:srgbClr val="666666"/>
+                  </a:solidFill>
+                  <a:latin typeface="Arial" pitchFamily="34" charset="0"/>
+                  <a:cs typeface="Arial" pitchFamily="34" charset="-120"/>
+                </a:rPr>
+                <a:t>처리</a:t>
+              </a:r>
+              <a:endParaRPr lang="ko-Kore-KR" altLang="ko-Kore-KR" sz="800">
+                <a:solidFill>
+                  <a:srgbClr val="666666"/>
+                </a:solidFill>
+                <a:latin typeface="Arial" pitchFamily="34" charset="0"/>
+                <a:cs typeface="Arial" pitchFamily="34" charset="-120"/>
+              </a:endParaRPr>
             </a:p>
           </p:txBody>
         </p:sp>
@@ -4608,7 +4960,7 @@
                 <a:buNone/>
               </a:pPr>
               <a:r>
-                <a:rPr lang="en-US" altLang="ko-KR" b="1">
+                <a:rPr lang="en-US" altLang="ko-KR" sz="1800" b="1">
                   <a:solidFill>
                     <a:srgbClr val="1A365D"/>
                   </a:solidFill>
@@ -4616,7 +4968,7 @@
                   <a:ea typeface="Arial" pitchFamily="34" charset="-122"/>
                   <a:cs typeface="Arial" pitchFamily="34" charset="-120"/>
                 </a:rPr>
-                <a:t>-</a:t>
+                <a:t>100</a:t>
               </a:r>
               <a:r>
                 <a:rPr lang="en-US" sz="1800" b="1">
@@ -4742,9 +5094,25 @@
                 </a:rPr>
                 <a:t>규칙 재사용 </a:t>
               </a:r>
-              <a:endParaRPr lang="en-US" sz="850" dirty="0"/>
+              <a:endParaRPr lang="ko-Kore-KR" altLang="en-US" sz="800">
+                <a:solidFill>
+                  <a:srgbClr val="666666"/>
+                </a:solidFill>
+                <a:latin typeface="Arial" pitchFamily="34" charset="0"/>
+                <a:cs typeface="Arial" pitchFamily="34" charset="-120"/>
+              </a:endParaRPr>
             </a:p>
             <a:p>
+              <a:r>
+                <a:rPr lang="en-US" altLang="ko-Kore-KR" sz="750">
+                  <a:solidFill>
+                    <a:srgbClr val="666666"/>
+                  </a:solidFill>
+                  <a:latin typeface="Arial" pitchFamily="34" charset="0"/>
+                  <a:cs typeface="Arial" pitchFamily="34" charset="-120"/>
+                </a:rPr>
+                <a:t>Known Pattern </a:t>
+              </a:r>
               <a:r>
                 <a:rPr lang="ko-Kore-KR" altLang="ko-Kore-KR" sz="750">
                   <a:solidFill>
@@ -4753,7 +5121,97 @@
                   <a:latin typeface="Arial" pitchFamily="34" charset="0"/>
                   <a:cs typeface="Arial" pitchFamily="34" charset="-120"/>
                 </a:rPr>
-                <a:t>|신규 변형 3건을 3/3(100%) Known Pattern으로 흡수 |</a:t>
+                <a:t>변형 </a:t>
+              </a:r>
+              <a:r>
+                <a:rPr lang="en-US" altLang="ko-Kore-KR" sz="750">
+                  <a:solidFill>
+                    <a:srgbClr val="666666"/>
+                  </a:solidFill>
+                  <a:latin typeface="Arial" pitchFamily="34" charset="0"/>
+                  <a:cs typeface="Arial" pitchFamily="34" charset="-120"/>
+                </a:rPr>
+                <a:t>5</a:t>
+              </a:r>
+              <a:r>
+                <a:rPr lang="en-US" altLang="ko-KR" sz="750">
+                  <a:solidFill>
+                    <a:srgbClr val="666666"/>
+                  </a:solidFill>
+                  <a:latin typeface="Arial" pitchFamily="34" charset="0"/>
+                  <a:cs typeface="Arial" pitchFamily="34" charset="-120"/>
+                </a:rPr>
+                <a:t>0</a:t>
+              </a:r>
+              <a:r>
+                <a:rPr lang="ko-Kore-KR" altLang="ko-Kore-KR" sz="750">
+                  <a:solidFill>
+                    <a:srgbClr val="666666"/>
+                  </a:solidFill>
+                  <a:latin typeface="Arial" pitchFamily="34" charset="0"/>
+                  <a:cs typeface="Arial" pitchFamily="34" charset="-120"/>
+                </a:rPr>
+                <a:t>건을 </a:t>
+              </a:r>
+              <a:r>
+                <a:rPr lang="en-US" altLang="ko-Kore-KR" sz="750">
+                  <a:solidFill>
+                    <a:srgbClr val="666666"/>
+                  </a:solidFill>
+                  <a:latin typeface="Arial" pitchFamily="34" charset="0"/>
+                  <a:cs typeface="Arial" pitchFamily="34" charset="-120"/>
+                </a:rPr>
+                <a:t>5</a:t>
+              </a:r>
+              <a:r>
+                <a:rPr lang="en-US" altLang="ko-KR" sz="750">
+                  <a:solidFill>
+                    <a:srgbClr val="666666"/>
+                  </a:solidFill>
+                  <a:latin typeface="Arial" pitchFamily="34" charset="0"/>
+                  <a:cs typeface="Arial" pitchFamily="34" charset="-120"/>
+                </a:rPr>
+                <a:t>0</a:t>
+              </a:r>
+              <a:r>
+                <a:rPr lang="ko-Kore-KR" altLang="ko-Kore-KR" sz="750">
+                  <a:solidFill>
+                    <a:srgbClr val="666666"/>
+                  </a:solidFill>
+                  <a:latin typeface="Arial" pitchFamily="34" charset="0"/>
+                  <a:cs typeface="Arial" pitchFamily="34" charset="-120"/>
+                </a:rPr>
+                <a:t>/</a:t>
+              </a:r>
+              <a:r>
+                <a:rPr lang="en-US" altLang="ko-Kore-KR" sz="750">
+                  <a:solidFill>
+                    <a:srgbClr val="666666"/>
+                  </a:solidFill>
+                  <a:latin typeface="Arial" pitchFamily="34" charset="0"/>
+                  <a:cs typeface="Arial" pitchFamily="34" charset="-120"/>
+                </a:rPr>
+                <a:t>5</a:t>
+              </a:r>
+              <a:r>
+                <a:rPr lang="en-US" altLang="ko-KR" sz="750">
+                  <a:solidFill>
+                    <a:srgbClr val="666666"/>
+                  </a:solidFill>
+                  <a:latin typeface="Arial" pitchFamily="34" charset="0"/>
+                  <a:cs typeface="Arial" pitchFamily="34" charset="-120"/>
+                </a:rPr>
+                <a:t>0</a:t>
+              </a:r>
+              <a:r>
+                <a:rPr lang="ko-Kore-KR" altLang="ko-Kore-KR" sz="750">
+                  <a:solidFill>
+                    <a:srgbClr val="666666"/>
+                  </a:solidFill>
+                  <a:latin typeface="Arial" pitchFamily="34" charset="0"/>
+                  <a:cs typeface="Arial" pitchFamily="34" charset="-120"/>
+                </a:rPr>
+                <a:t>(100%) Known Pattern으로 흡수</a:t>
               </a:r>
             </a:p>
           </p:txBody>
@@ -4953,7 +5411,37 @@
                   <a:latin typeface="Arial" pitchFamily="34" charset="0"/>
                   <a:cs typeface="Arial" pitchFamily="34" charset="-120"/>
                 </a:rPr>
-                <a:t>재실행 시 신규 처리 1건 → 0건, 중복 재처리 100% 제거</a:t>
+                <a:t>재실행 시 신규 처리 </a:t>
+              </a:r>
+              <a:r>
+                <a:rPr lang="en-US" altLang="ko-Kore-KR" sz="750">
+                  <a:solidFill>
+                    <a:srgbClr val="666666"/>
+                  </a:solidFill>
+                  <a:latin typeface="Arial" pitchFamily="34" charset="0"/>
+                  <a:cs typeface="Arial" pitchFamily="34" charset="-120"/>
+                </a:rPr>
+                <a:t>5</a:t>
+              </a:r>
+              <a:r>
+                <a:rPr lang="en-US" altLang="ko-KR" sz="750">
+                  <a:solidFill>
+                    <a:srgbClr val="666666"/>
+                  </a:solidFill>
+                  <a:latin typeface="Arial" pitchFamily="34" charset="0"/>
+                  <a:cs typeface="Arial" pitchFamily="34" charset="-120"/>
+                </a:rPr>
+                <a:t>0</a:t>
+              </a:r>
+              <a:r>
+                <a:rPr lang="ko-Kore-KR" altLang="ko-Kore-KR" sz="750">
+                  <a:solidFill>
+                    <a:srgbClr val="666666"/>
+                  </a:solidFill>
+                  <a:latin typeface="Arial" pitchFamily="34" charset="0"/>
+                  <a:cs typeface="Arial" pitchFamily="34" charset="-120"/>
+                </a:rPr>
+                <a:t>건 → 0건, 중복 재처리 100% 제거</a:t>
               </a:r>
             </a:p>
           </p:txBody>

--- a/docs/final docs/AI_Master_Project_최종발표_멘티명_사번.pptx
+++ b/docs/final docs/AI_Master_Project_최종발표_멘티명_사번.pptx
@@ -3675,6 +3675,36 @@
           </a:p>
         </p:txBody>
       </p:sp>
+      <p:pic>
+        <p:nvPicPr>
+          <p:cNvPr id="10" name="그림 9">
+            <a:extLst>
+              <a:ext uri="{FF2B5EF4-FFF2-40B4-BE49-F238E27FC236}">
+                <a16:creationId xmlns:a16="http://schemas.microsoft.com/office/drawing/2014/main" id="{60215F2E-A2C6-6E30-A370-70F5C40B48E4}"/>
+              </a:ext>
+            </a:extLst>
+          </p:cNvPr>
+          <p:cNvPicPr>
+            <a:picLocks noChangeAspect="1"/>
+          </p:cNvPicPr>
+          <p:nvPr/>
+        </p:nvPicPr>
+        <p:blipFill>
+          <a:blip r:embed="rId3"/>
+          <a:stretch>
+            <a:fillRect/>
+          </a:stretch>
+        </p:blipFill>
+        <p:spPr>
+          <a:xfrm>
+            <a:off x="652533" y="667512"/>
+            <a:ext cx="3919467" cy="4128505"/>
+          </a:xfrm>
+          <a:prstGeom prst="rect">
+            <a:avLst/>
+          </a:prstGeom>
+        </p:spPr>
+      </p:pic>
     </p:spTree>
   </p:cSld>
   <p:clrMapOvr>

--- a/docs/final docs/AI_Master_Project_최종발표_멘티명_사번.pptx
+++ b/docs/final docs/AI_Master_Project_최종발표_멘티명_사번.pptx
@@ -1711,47 +1711,19 @@
           </a:p>
           <a:p>
             <a:r>
-              <a:rPr lang="ko-KR" altLang="en-US" sz="900">
-                <a:solidFill>
-                  <a:srgbClr val="666666"/>
-                </a:solidFill>
-                <a:latin typeface="Arial" pitchFamily="34" charset="0"/>
-                <a:ea typeface="Arial" pitchFamily="34" charset="-122"/>
-                <a:cs typeface="Arial" pitchFamily="34" charset="-120"/>
-              </a:rPr>
+              <a:rPr lang="ko-KR" altLang="en-US" sz="900"/>
               <a:t>반복되는 작업을 줄이고</a:t>
             </a:r>
             <a:r>
-              <a:rPr lang="en-US" altLang="ko-KR" sz="900">
-                <a:solidFill>
-                  <a:srgbClr val="666666"/>
-                </a:solidFill>
-                <a:latin typeface="Arial" pitchFamily="34" charset="0"/>
-                <a:ea typeface="Arial" pitchFamily="34" charset="-122"/>
-                <a:cs typeface="Arial" pitchFamily="34" charset="-120"/>
-              </a:rPr>
+              <a:rPr lang="en-US" altLang="ko-KR" sz="900"/>
               <a:t>,</a:t>
             </a:r>
             <a:r>
-              <a:rPr lang="ko-KR" altLang="en-US" sz="900">
-                <a:solidFill>
-                  <a:srgbClr val="666666"/>
-                </a:solidFill>
-                <a:latin typeface="Arial" pitchFamily="34" charset="0"/>
-                <a:ea typeface="Arial" pitchFamily="34" charset="-122"/>
-                <a:cs typeface="Arial" pitchFamily="34" charset="-120"/>
-              </a:rPr>
+              <a:rPr lang="ko-KR" altLang="en-US" sz="900"/>
               <a:t> 이 결과를 지식화 하고자 합니다</a:t>
             </a:r>
             <a:r>
-              <a:rPr lang="en-US" altLang="ko-KR" sz="900">
-                <a:solidFill>
-                  <a:srgbClr val="666666"/>
-                </a:solidFill>
-                <a:latin typeface="Arial" pitchFamily="34" charset="0"/>
-                <a:ea typeface="Arial" pitchFamily="34" charset="-122"/>
-                <a:cs typeface="Arial" pitchFamily="34" charset="-120"/>
-              </a:rPr>
+              <a:rPr lang="en-US" altLang="ko-KR" sz="900"/>
               <a:t>.</a:t>
             </a:r>
             <a:br>

--- a/docs/final docs/AI_Master_Project_최종발표_멘티명_사번.pptx
+++ b/docs/final docs/AI_Master_Project_최종발표_멘티명_사번.pptx
@@ -1,19 +1,19 @@
 
 <file path=ppt/presentation.xml><?xml version="1.0" encoding="utf-8"?>
-<p:presentation xmlns:a="http://schemas.openxmlformats.org/drawingml/2006/main" xmlns:r="http://schemas.openxmlformats.org/officeDocument/2006/relationships" xmlns:p="http://schemas.openxmlformats.org/presentationml/2006/main" saveSubsetFonts="1" autoCompressPictures="0">
+<p:presentation xmlns:a="http://schemas.openxmlformats.org/drawingml/2006/main" xmlns:r="http://schemas.openxmlformats.org/officeDocument/2006/relationships" xmlns:p="http://schemas.openxmlformats.org/presentationml/2006/main" xmlns:p14="http://schemas.microsoft.com/office/powerpoint/2010/main" saveSubsetFonts="1" autoCompressPictures="0">
   <p:sldMasterIdLst>
-    <p:sldMasterId id="2147483648" r:id="rId1"/>
+    <p:sldMasterId id="2147483663" r:id="rId3"/>
   </p:sldMasterIdLst>
   <p:notesMasterIdLst>
-    <p:notesMasterId r:id="rId6"/>
+    <p:notesMasterId r:id="rId5"/>
   </p:notesMasterIdLst>
   <p:sldIdLst>
-    <p:sldId id="256" r:id="rId2"/>
-    <p:sldId id="257" r:id="rId3"/>
-    <p:sldId id="258" r:id="rId4"/>
-    <p:sldId id="259" r:id="rId5"/>
+    <p:sldId id="256" r:id="rId7"/>
+    <p:sldId id="257" r:id="rId8"/>
+    <p:sldId id="258" r:id="rId9"/>
+    <p:sldId id="259" r:id="rId11"/>
   </p:sldIdLst>
-  <p:sldSz cx="9144000" cy="5143500" type="screen16x9"/>
+  <p:sldSz cx="9144000" cy="5143500"/>
   <p:notesSz cx="5143500" cy="9144000"/>
   <p:defaultTextStyle>
     <a:lvl1pPr marL="0" algn="l" defTabSz="914400" rtl="0" eaLnBrk="1" latinLnBrk="0" hangingPunct="1">
@@ -107,11 +107,7 @@
       </a:defRPr>
     </a:lvl9pPr>
   </p:defaultTextStyle>
-  <p:extLst>
-    <p:ext uri="{EFAFB233-063F-42B5-8137-9DF3F51BA10A}">
-      <p15:sldGuideLst xmlns:p15="http://schemas.microsoft.com/office/powerpoint/2012/main"/>
-    </p:ext>
-  </p:extLst>
+  <p:extLst/>
 </p:presentation>
 </file>
 
@@ -924,14 +920,13 @@
 </file>
 
 <file path=ppt/slides/slide1.xml><?xml version="1.0" encoding="utf-8"?>
-<p:sld xmlns:a="http://schemas.openxmlformats.org/drawingml/2006/main" xmlns:r="http://schemas.openxmlformats.org/officeDocument/2006/relationships" xmlns:p="http://schemas.openxmlformats.org/presentationml/2006/main">
+<p:sld xmlns:a="http://schemas.openxmlformats.org/drawingml/2006/main" xmlns:r="http://schemas.openxmlformats.org/officeDocument/2006/relationships" xmlns:p="http://schemas.openxmlformats.org/presentationml/2006/main" xmlns:p14="http://schemas.microsoft.com/office/powerpoint/2010/main">
   <p:cSld name="Slide 1">
     <p:bg>
       <p:bgPr>
         <a:solidFill>
           <a:srgbClr val="FFFFFF"/>
         </a:solidFill>
-        <a:effectLst/>
       </p:bgPr>
     </p:bg>
     <p:spTree>
@@ -1059,8 +1054,8 @@
         </p:nvSpPr>
         <p:spPr>
           <a:xfrm>
-            <a:off x="3931920" y="2633472"/>
-            <a:ext cx="1280160" cy="54864"/>
+            <a:off x="3931920" y="2633345"/>
+            <a:ext cx="1280160" cy="54610"/>
           </a:xfrm>
           <a:prstGeom prst="rect">
             <a:avLst/>
@@ -1084,8 +1079,8 @@
         </p:nvSpPr>
         <p:spPr>
           <a:xfrm>
-            <a:off x="2651760" y="2852928"/>
-            <a:ext cx="3840480" cy="347472"/>
+            <a:off x="2651760" y="2853055"/>
+            <a:ext cx="3841115" cy="347980"/>
           </a:xfrm>
           <a:prstGeom prst="rect">
             <a:avLst/>
@@ -1094,48 +1089,175 @@
           <a:ln/>
         </p:spPr>
         <p:txBody>
-          <a:bodyPr wrap="square" lIns="0" tIns="0" rIns="0" bIns="0" rtlCol="0" anchor="ctr"/>
+          <a:bodyPr wrap="square" lIns="0" tIns="0" rIns="0" bIns="0" numCol="1" vert="horz" anchor="ctr">
+            <a:noAutofit/>
+          </a:bodyPr>
           <a:lstStyle/>
           <a:p>
             <a:pPr marL="0" indent="0">
+              <a:buFontTx/>
               <a:buNone/>
             </a:pPr>
             <a:r>
-              <a:rPr lang="en-US" sz="1300" b="1" dirty="0">
+              <a:rPr lang="en-US" sz="1300" b="1">
                 <a:solidFill>
                   <a:srgbClr val="1A1A1A"/>
                 </a:solidFill>
-                <a:latin typeface="Arial" pitchFamily="34" charset="0"/>
-                <a:ea typeface="Arial" pitchFamily="34" charset="-122"/>
-                <a:cs typeface="Arial" pitchFamily="34" charset="-120"/>
+                <a:latin typeface="Arial" charset="0"/>
+                <a:ea typeface="Arial" charset="0"/>
+                <a:cs typeface="Arial" charset="0"/>
               </a:rPr>
               <a:t>과제명  </a:t>
             </a:r>
             <a:r>
-              <a:rPr lang="en-US" sz="1300" dirty="0">
+              <a:rPr lang="ko-KR" sz="1300" b="1">
+                <a:solidFill>
+                  <a:srgbClr val="1A1A1A"/>
+                </a:solidFill>
+                <a:latin typeface="Arial" charset="0"/>
+                <a:ea typeface="Arial" charset="0"/>
+                <a:cs typeface="Arial" charset="0"/>
+              </a:rPr>
+              <a:t>M</a:t>
+            </a:r>
+            <a:r>
+              <a:rPr lang="ko-KR" sz="1300" b="1">
+                <a:solidFill>
+                  <a:srgbClr val="1A1A1A"/>
+                </a:solidFill>
+                <a:latin typeface="Arial" charset="0"/>
+                <a:ea typeface="Arial" charset="0"/>
+                <a:cs typeface="Arial" charset="0"/>
+              </a:rPr>
+              <a:t>ini AI</a:t>
+            </a:r>
+            <a:r>
+              <a:rPr lang="ko-KR" sz="1300" b="1">
+                <a:solidFill>
+                  <a:srgbClr val="1A1A1A"/>
+                </a:solidFill>
+                <a:latin typeface="Arial" charset="0"/>
+                <a:ea typeface="Arial" charset="0"/>
+                <a:cs typeface="Arial" charset="0"/>
+              </a:rPr>
+              <a:t>-</a:t>
+            </a:r>
+            <a:r>
+              <a:rPr lang="ko-KR" sz="1300" b="1">
+                <a:solidFill>
+                  <a:srgbClr val="1A1A1A"/>
+                </a:solidFill>
+                <a:latin typeface="Arial" charset="0"/>
+                <a:ea typeface="Arial" charset="0"/>
+                <a:cs typeface="Arial" charset="0"/>
+              </a:rPr>
+              <a:t>Ops</a:t>
+            </a:r>
+            <a:endParaRPr lang="ko-KR" altLang="en-US" sz="1300">
+              <a:solidFill>
+                <a:srgbClr val="666666"/>
+              </a:solidFill>
+              <a:latin typeface="Arial" charset="0"/>
+              <a:ea typeface="Arial" charset="0"/>
+              <a:cs typeface="Arial" charset="0"/>
+            </a:endParaRPr>
+          </a:p>
+        </p:txBody>
+      </p:sp>
+      <p:sp>
+        <p:nvSpPr>
+          <p:cNvPr id="7" name="Text 5"/>
+          <p:cNvSpPr>
+            <a:spLocks/>
+          </p:cNvSpPr>
+          <p:nvPr/>
+        </p:nvSpPr>
+        <p:spPr>
+          <a:xfrm rot="0">
+            <a:off x="2651760" y="3246120"/>
+            <a:ext cx="3841115" cy="347980"/>
+          </a:xfrm>
+          <a:prstGeom prst="rect"/>
+          <a:noFill/>
+          <a:ln cap="flat" cmpd="sng">
+            <a:prstDash/>
+          </a:ln>
+        </p:spPr>
+        <p:txBody>
+          <a:bodyPr wrap="square" lIns="0" tIns="0" rIns="0" bIns="0" numCol="1" vert="horz" anchor="ctr">
+            <a:noAutofit/>
+          </a:bodyPr>
+          <a:lstStyle/>
+          <a:p>
+            <a:pPr marL="0" indent="0">
+              <a:buFontTx/>
+              <a:buNone/>
+            </a:pPr>
+            <a:r>
+              <a:rPr lang="en-US" sz="1300" b="1">
+                <a:solidFill>
+                  <a:srgbClr val="1A1A1A"/>
+                </a:solidFill>
+                <a:latin typeface="Arial" charset="0"/>
+                <a:ea typeface="Arial" charset="0"/>
+                <a:cs typeface="Arial" charset="0"/>
+              </a:rPr>
+              <a:t>멘   티  </a:t>
+            </a:r>
+            <a:r>
+              <a:rPr lang="ko-KR" sz="1300">
                 <a:solidFill>
                   <a:srgbClr val="666666"/>
                 </a:solidFill>
-                <a:latin typeface="Arial" pitchFamily="34" charset="0"/>
-                <a:ea typeface="Arial" pitchFamily="34" charset="-122"/>
-                <a:cs typeface="Arial" pitchFamily="34" charset="-120"/>
-              </a:rPr>
-              <a:t>[여기에 과제명을 입력하세요]</a:t>
-            </a:r>
-            <a:endParaRPr lang="en-US" sz="1300" dirty="0"/>
+                <a:latin typeface="Arial" charset="0"/>
+                <a:ea typeface="Arial" charset="0"/>
+                <a:cs typeface="Arial" charset="0"/>
+              </a:rPr>
+              <a:t>-</a:t>
+            </a:r>
+            <a:r>
+              <a:rPr lang="en-US" sz="1300">
+                <a:solidFill>
+                  <a:srgbClr val="666666"/>
+                </a:solidFill>
+                <a:latin typeface="Arial" charset="0"/>
+                <a:ea typeface="Arial" charset="0"/>
+                <a:cs typeface="Arial" charset="0"/>
+              </a:rPr>
+              <a:t>, </a:t>
+            </a:r>
+            <a:r>
+              <a:rPr lang="ko-KR" sz="1300">
+                <a:solidFill>
+                  <a:srgbClr val="666666"/>
+                </a:solidFill>
+                <a:latin typeface="Arial" charset="0"/>
+                <a:ea typeface="Arial" charset="0"/>
+                <a:cs typeface="Arial" charset="0"/>
+              </a:rPr>
+              <a:t>-</a:t>
+            </a:r>
+            <a:endParaRPr lang="ko-KR" altLang="en-US" sz="1300">
+              <a:solidFill>
+                <a:srgbClr val="666666"/>
+              </a:solidFill>
+              <a:latin typeface="Arial" charset="0"/>
+              <a:ea typeface="Arial" charset="0"/>
+              <a:cs typeface="Arial" charset="0"/>
+            </a:endParaRPr>
           </a:p>
         </p:txBody>
       </p:sp>
       <p:sp>
         <p:nvSpPr>
-          <p:cNvPr id="7" name="Text 5"/>
-          <p:cNvSpPr/>
-          <p:nvPr/>
-        </p:nvSpPr>
-        <p:spPr>
-          <a:xfrm>
-            <a:off x="2651760" y="3236976"/>
-            <a:ext cx="3840480" cy="347472"/>
+          <p:cNvPr id="8" name="Text 6"/>
+          <p:cNvSpPr/>
+          <p:nvPr/>
+        </p:nvSpPr>
+        <p:spPr>
+          <a:xfrm>
+            <a:off x="2651760" y="3620770"/>
+            <a:ext cx="3841115" cy="347980"/>
           </a:xfrm>
           <a:prstGeom prst="rect">
             <a:avLst/>
@@ -1144,85 +1266,45 @@
           <a:ln/>
         </p:spPr>
         <p:txBody>
-          <a:bodyPr wrap="square" lIns="0" tIns="0" rIns="0" bIns="0" rtlCol="0" anchor="ctr"/>
+          <a:bodyPr wrap="square" lIns="0" tIns="0" rIns="0" bIns="0" numCol="1" vert="horz" anchor="ctr">
+            <a:noAutofit/>
+          </a:bodyPr>
           <a:lstStyle/>
           <a:p>
             <a:pPr marL="0" indent="0">
+              <a:buFontTx/>
               <a:buNone/>
             </a:pPr>
             <a:r>
-              <a:rPr lang="en-US" sz="1300" b="1" dirty="0">
+              <a:rPr lang="en-US" sz="1300" b="1">
                 <a:solidFill>
                   <a:srgbClr val="1A1A1A"/>
                 </a:solidFill>
-                <a:latin typeface="Arial" pitchFamily="34" charset="0"/>
-                <a:ea typeface="Arial" pitchFamily="34" charset="-122"/>
-                <a:cs typeface="Arial" pitchFamily="34" charset="-120"/>
-              </a:rPr>
-              <a:t>멘   티  </a:t>
-            </a:r>
-            <a:r>
-              <a:rPr lang="en-US" sz="1300" dirty="0">
+                <a:latin typeface="Arial" charset="0"/>
+                <a:ea typeface="Arial" charset="0"/>
+                <a:cs typeface="Arial" charset="0"/>
+              </a:rPr>
+              <a:t>멘   토  </a:t>
+            </a:r>
+            <a:r>
+              <a:rPr lang="ko-KR" sz="1300">
                 <a:solidFill>
                   <a:srgbClr val="666666"/>
                 </a:solidFill>
-                <a:latin typeface="Arial" pitchFamily="34" charset="0"/>
-                <a:ea typeface="Arial" pitchFamily="34" charset="-122"/>
-                <a:cs typeface="Arial" pitchFamily="34" charset="-120"/>
-              </a:rPr>
-              <a:t>[성명], [사번]</a:t>
-            </a:r>
-            <a:endParaRPr lang="en-US" sz="1300" dirty="0"/>
-          </a:p>
-        </p:txBody>
-      </p:sp>
-      <p:sp>
-        <p:nvSpPr>
-          <p:cNvPr id="8" name="Text 6"/>
-          <p:cNvSpPr/>
-          <p:nvPr/>
-        </p:nvSpPr>
-        <p:spPr>
-          <a:xfrm>
-            <a:off x="2651760" y="3621024"/>
-            <a:ext cx="3840480" cy="347472"/>
-          </a:xfrm>
-          <a:prstGeom prst="rect">
-            <a:avLst/>
-          </a:prstGeom>
-          <a:noFill/>
-          <a:ln/>
-        </p:spPr>
-        <p:txBody>
-          <a:bodyPr wrap="square" lIns="0" tIns="0" rIns="0" bIns="0" rtlCol="0" anchor="ctr"/>
-          <a:lstStyle/>
-          <a:p>
-            <a:pPr marL="0" indent="0">
-              <a:buNone/>
-            </a:pPr>
-            <a:r>
-              <a:rPr lang="en-US" sz="1300" b="1" dirty="0">
-                <a:solidFill>
-                  <a:srgbClr val="1A1A1A"/>
-                </a:solidFill>
-                <a:latin typeface="Arial" pitchFamily="34" charset="0"/>
-                <a:ea typeface="Arial" pitchFamily="34" charset="-122"/>
-                <a:cs typeface="Arial" pitchFamily="34" charset="-120"/>
-              </a:rPr>
-              <a:t>멘   토  </a:t>
-            </a:r>
-            <a:r>
-              <a:rPr lang="en-US" sz="1300" dirty="0">
-                <a:solidFill>
-                  <a:srgbClr val="666666"/>
-                </a:solidFill>
-                <a:latin typeface="Arial" pitchFamily="34" charset="0"/>
-                <a:ea typeface="Arial" pitchFamily="34" charset="-122"/>
-                <a:cs typeface="Arial" pitchFamily="34" charset="-120"/>
-              </a:rPr>
-              <a:t>[성명1], [성명2]</a:t>
-            </a:r>
-            <a:endParaRPr lang="en-US" sz="1300" dirty="0"/>
+                <a:latin typeface="Arial" charset="0"/>
+                <a:ea typeface="Arial" charset="0"/>
+                <a:cs typeface="Arial" charset="0"/>
+              </a:rPr>
+              <a:t>-</a:t>
+            </a:r>
+            <a:endParaRPr lang="ko-KR" altLang="en-US" sz="1300">
+              <a:solidFill>
+                <a:srgbClr val="666666"/>
+              </a:solidFill>
+              <a:latin typeface="Arial" charset="0"/>
+              <a:ea typeface="Arial" charset="0"/>
+              <a:cs typeface="Arial" charset="0"/>
+            </a:endParaRPr>
           </a:p>
         </p:txBody>
       </p:sp>
@@ -1295,18 +1377,32 @@
   <p:clrMapOvr>
     <a:masterClrMapping/>
   </p:clrMapOvr>
+  <mc:AlternateContent xmlns:mc="http://schemas.openxmlformats.org/markup-compatibility/2006">
+    <mc:Choice xmlns:p14="http://schemas.microsoft.com/office/powerpoint/2010/main" Requires="p14">
+      <p:transition spd="slow" p14:dur="2000"/>
+    </mc:Choice>
+    <mc:Fallback>
+      <p:transition spd="slow"/>
+    </mc:Fallback>
+  </mc:AlternateContent>
+  <p:timing>
+    <p:tnLst>
+      <p:par>
+        <p:cTn id="1" dur="indefinite" restart="never" nodeType="tmRoot"/>
+      </p:par>
+    </p:tnLst>
+  </p:timing>
 </p:sld>
 </file>
 
 <file path=ppt/slides/slide2.xml><?xml version="1.0" encoding="utf-8"?>
-<p:sld xmlns:a="http://schemas.openxmlformats.org/drawingml/2006/main" xmlns:r="http://schemas.openxmlformats.org/officeDocument/2006/relationships" xmlns:p="http://schemas.openxmlformats.org/presentationml/2006/main">
+<p:sld xmlns:a="http://schemas.openxmlformats.org/drawingml/2006/main" xmlns:r="http://schemas.openxmlformats.org/officeDocument/2006/relationships" xmlns:p="http://schemas.openxmlformats.org/presentationml/2006/main" xmlns:p14="http://schemas.microsoft.com/office/powerpoint/2010/main">
   <p:cSld name="Slide 2">
     <p:bg>
       <p:bgPr>
         <a:solidFill>
           <a:srgbClr val="FFFFFF"/>
         </a:solidFill>
-        <a:effectLst/>
       </p:bgPr>
     </p:bg>
     <p:spTree>
@@ -1331,8 +1427,8 @@
         </p:nvSpPr>
         <p:spPr>
           <a:xfrm>
-            <a:off x="256032" y="137160"/>
-            <a:ext cx="54864" cy="402336"/>
+            <a:off x="255905" y="137160"/>
+            <a:ext cx="54610" cy="402590"/>
           </a:xfrm>
           <a:prstGeom prst="rect">
             <a:avLst/>
@@ -1356,8 +1452,8 @@
         </p:nvSpPr>
         <p:spPr>
           <a:xfrm>
-            <a:off x="374904" y="137160"/>
-            <a:ext cx="6766560" cy="402336"/>
+            <a:off x="374650" y="137160"/>
+            <a:ext cx="6766560" cy="402590"/>
           </a:xfrm>
           <a:prstGeom prst="rect">
             <a:avLst/>
@@ -1395,7 +1491,7 @@
         </p:nvSpPr>
         <p:spPr>
           <a:xfrm>
-            <a:off x="7562088" y="192024"/>
+            <a:off x="7562215" y="191770"/>
             <a:ext cx="1325880" cy="274320"/>
           </a:xfrm>
           <a:prstGeom prst="rect">
@@ -1420,7 +1516,7 @@
         </p:nvSpPr>
         <p:spPr>
           <a:xfrm>
-            <a:off x="7562088" y="192024"/>
+            <a:off x="7562215" y="191770"/>
             <a:ext cx="1325880" cy="274320"/>
           </a:xfrm>
           <a:prstGeom prst="rect">
@@ -1470,8 +1566,8 @@
         </p:nvSpPr>
         <p:spPr>
           <a:xfrm>
-            <a:off x="256032" y="576072"/>
-            <a:ext cx="8631936" cy="0"/>
+            <a:off x="255905" y="575945"/>
+            <a:ext cx="8632190" cy="0"/>
           </a:xfrm>
           <a:prstGeom prst="line">
             <a:avLst/>
@@ -1557,8 +1653,8 @@
         </p:nvSpPr>
         <p:spPr>
           <a:xfrm>
-            <a:off x="256032" y="667512"/>
-            <a:ext cx="4617720" cy="1810512"/>
+            <a:off x="255905" y="667385"/>
+            <a:ext cx="4617720" cy="1810385"/>
           </a:xfrm>
           <a:prstGeom prst="rect">
             <a:avLst/>
@@ -1582,8 +1678,8 @@
         </p:nvSpPr>
         <p:spPr>
           <a:xfrm>
-            <a:off x="256032" y="667512"/>
-            <a:ext cx="54864" cy="1810512"/>
+            <a:off x="255905" y="667385"/>
+            <a:ext cx="54610" cy="1810385"/>
           </a:xfrm>
           <a:prstGeom prst="rect">
             <a:avLst/>
@@ -1607,8 +1703,8 @@
         </p:nvSpPr>
         <p:spPr>
           <a:xfrm>
-            <a:off x="374904" y="758952"/>
-            <a:ext cx="4416552" cy="246888"/>
+            <a:off x="374650" y="758825"/>
+            <a:ext cx="4416425" cy="247015"/>
           </a:xfrm>
           <a:prstGeom prst="rect">
             <a:avLst/>
@@ -1646,8 +1742,8 @@
         </p:nvSpPr>
         <p:spPr>
           <a:xfrm>
-            <a:off x="374904" y="1051560"/>
-            <a:ext cx="4416552" cy="1353312"/>
+            <a:off x="374650" y="1051560"/>
+            <a:ext cx="4416425" cy="1353185"/>
           </a:xfrm>
           <a:prstGeom prst="rect">
             <a:avLst/>
@@ -1806,8 +1902,8 @@
         </p:nvSpPr>
         <p:spPr>
           <a:xfrm>
-            <a:off x="256032" y="2569464"/>
-            <a:ext cx="4617720" cy="2368296"/>
+            <a:off x="255905" y="2569210"/>
+            <a:ext cx="4617720" cy="2368550"/>
           </a:xfrm>
           <a:prstGeom prst="rect">
             <a:avLst/>
@@ -1831,8 +1927,8 @@
         </p:nvSpPr>
         <p:spPr>
           <a:xfrm>
-            <a:off x="256032" y="2569464"/>
-            <a:ext cx="54864" cy="2368296"/>
+            <a:off x="255905" y="2569210"/>
+            <a:ext cx="54610" cy="2368550"/>
           </a:xfrm>
           <a:prstGeom prst="rect">
             <a:avLst/>
@@ -1856,8 +1952,8 @@
         </p:nvSpPr>
         <p:spPr>
           <a:xfrm>
-            <a:off x="374904" y="2660904"/>
-            <a:ext cx="4416552" cy="246888"/>
+            <a:off x="374650" y="2660650"/>
+            <a:ext cx="4416425" cy="247015"/>
           </a:xfrm>
           <a:prstGeom prst="rect">
             <a:avLst/>
@@ -1895,8 +1991,8 @@
         </p:nvSpPr>
         <p:spPr>
           <a:xfrm>
-            <a:off x="374904" y="2953512"/>
-            <a:ext cx="4416552" cy="1911096"/>
+            <a:off x="374650" y="2953385"/>
+            <a:ext cx="4416425" cy="1911350"/>
           </a:xfrm>
           <a:prstGeom prst="rect">
             <a:avLst/>
@@ -2041,8 +2137,8 @@
         </p:nvSpPr>
         <p:spPr>
           <a:xfrm>
-            <a:off x="5056632" y="667512"/>
-            <a:ext cx="3831336" cy="256032"/>
+            <a:off x="5056505" y="667385"/>
+            <a:ext cx="3831590" cy="255905"/>
           </a:xfrm>
           <a:prstGeom prst="rect">
             <a:avLst/>
@@ -2080,8 +2176,8 @@
         </p:nvSpPr>
         <p:spPr>
           <a:xfrm>
-            <a:off x="5056632" y="978408"/>
-            <a:ext cx="1860804" cy="804672"/>
+            <a:off x="5056505" y="978535"/>
+            <a:ext cx="1860550" cy="804545"/>
           </a:xfrm>
           <a:prstGeom prst="rect">
             <a:avLst/>
@@ -2105,8 +2201,8 @@
         </p:nvSpPr>
         <p:spPr>
           <a:xfrm>
-            <a:off x="5102352" y="1024128"/>
-            <a:ext cx="1769364" cy="713232"/>
+            <a:off x="5102225" y="1024255"/>
+            <a:ext cx="1769745" cy="713740"/>
           </a:xfrm>
           <a:prstGeom prst="rect">
             <a:avLst/>
@@ -2115,49 +2211,38 @@
           <a:ln/>
         </p:spPr>
         <p:txBody>
-          <a:bodyPr wrap="square" lIns="0" tIns="0" rIns="0" bIns="0" rtlCol="0" anchor="ctr"/>
+          <a:bodyPr wrap="square" lIns="0" tIns="0" rIns="0" bIns="0" numCol="1" vert="horz" anchor="ctr">
+            <a:noAutofit/>
+          </a:bodyPr>
           <a:lstStyle/>
           <a:p>
             <a:pPr marL="0" indent="0" algn="ctr">
+              <a:buFontTx/>
               <a:buNone/>
             </a:pPr>
             <a:r>
-              <a:rPr lang="en-US" b="1">
+              <a:rPr lang="ko-KR" altLang="en-US" b="1">
                 <a:solidFill>
                   <a:srgbClr val="1A365D"/>
                 </a:solidFill>
-                <a:latin typeface="Arial" pitchFamily="34" charset="0"/>
-                <a:ea typeface="Arial" pitchFamily="34" charset="-122"/>
-                <a:cs typeface="Arial" pitchFamily="34" charset="-120"/>
-              </a:rPr>
-              <a:t>[</a:t>
-            </a:r>
-            <a:r>
-              <a:rPr lang="ko-KR" altLang="en-US" b="1">
-                <a:solidFill>
-                  <a:srgbClr val="1A365D"/>
-                </a:solidFill>
-                <a:latin typeface="Arial" pitchFamily="34" charset="0"/>
-                <a:ea typeface="Arial" pitchFamily="34" charset="-122"/>
-                <a:cs typeface="Arial" pitchFamily="34" charset="-120"/>
+                <a:latin typeface="Arial" charset="0"/>
+                <a:ea typeface="Arial" charset="0"/>
+                <a:cs typeface="Arial" charset="0"/>
               </a:rPr>
               <a:t>지식축적</a:t>
             </a:r>
-            <a:r>
-              <a:rPr lang="en-US" b="1">
-                <a:solidFill>
-                  <a:srgbClr val="1A365D"/>
-                </a:solidFill>
-                <a:latin typeface="Arial" pitchFamily="34" charset="0"/>
-                <a:ea typeface="Arial" pitchFamily="34" charset="-122"/>
-                <a:cs typeface="Arial" pitchFamily="34" charset="-120"/>
-              </a:rPr>
-              <a:t>]</a:t>
-            </a:r>
-            <a:endParaRPr lang="en-US" dirty="0"/>
+            <a:endParaRPr lang="ko-KR" altLang="en-US" b="1">
+              <a:solidFill>
+                <a:srgbClr val="1A365D"/>
+              </a:solidFill>
+              <a:latin typeface="Arial" charset="0"/>
+              <a:ea typeface="Arial" charset="0"/>
+              <a:cs typeface="Arial" charset="0"/>
+            </a:endParaRPr>
           </a:p>
           <a:p>
             <a:pPr marL="0" indent="0" algn="ctr">
+              <a:buFontTx/>
               <a:buNone/>
             </a:pPr>
             <a:r>
@@ -2165,13 +2250,196 @@
                 <a:solidFill>
                   <a:srgbClr val="666666"/>
                 </a:solidFill>
-                <a:latin typeface="Arial" pitchFamily="34" charset="0"/>
-                <a:ea typeface="Arial" pitchFamily="34" charset="-122"/>
-                <a:cs typeface="Arial" pitchFamily="34" charset="-120"/>
-              </a:rPr>
-              <a:t>운영자 개인에게만 쌓이는 지식을 재사용 가능한 운영 지식으로 전환</a:t>
-            </a:r>
-            <a:endParaRPr lang="en-US" sz="2200" dirty="0"/>
+                <a:latin typeface="Arial" charset="0"/>
+                <a:ea typeface="Arial" charset="0"/>
+                <a:cs typeface="Arial" charset="0"/>
+              </a:rPr>
+              <a:t>운영자</a:t>
+            </a:r>
+            <a:r>
+              <a:rPr lang="ko-KR" altLang="en-US" sz="800">
+                <a:solidFill>
+                  <a:srgbClr val="666666"/>
+                </a:solidFill>
+                <a:latin typeface="Arial" charset="0"/>
+                <a:ea typeface="Arial" charset="0"/>
+                <a:cs typeface="Arial" charset="0"/>
+              </a:rPr>
+              <a:t> </a:t>
+            </a:r>
+            <a:r>
+              <a:rPr lang="ko-KR" altLang="en-US" sz="800">
+                <a:solidFill>
+                  <a:srgbClr val="666666"/>
+                </a:solidFill>
+                <a:latin typeface="Arial" charset="0"/>
+                <a:ea typeface="Arial" charset="0"/>
+                <a:cs typeface="Arial" charset="0"/>
+              </a:rPr>
+              <a:t>개인에게만</a:t>
+            </a:r>
+            <a:r>
+              <a:rPr lang="ko-KR" altLang="en-US" sz="800">
+                <a:solidFill>
+                  <a:srgbClr val="666666"/>
+                </a:solidFill>
+                <a:latin typeface="Arial" charset="0"/>
+                <a:ea typeface="Arial" charset="0"/>
+                <a:cs typeface="Arial" charset="0"/>
+              </a:rPr>
+              <a:t> </a:t>
+            </a:r>
+            <a:r>
+              <a:rPr lang="ko-KR" altLang="en-US" sz="800">
+                <a:solidFill>
+                  <a:srgbClr val="666666"/>
+                </a:solidFill>
+                <a:latin typeface="Arial" charset="0"/>
+                <a:ea typeface="Arial" charset="0"/>
+                <a:cs typeface="Arial" charset="0"/>
+              </a:rPr>
+              <a:t>쌓이는</a:t>
+            </a:r>
+            <a:r>
+              <a:rPr lang="ko-KR" altLang="en-US" sz="800">
+                <a:solidFill>
+                  <a:srgbClr val="666666"/>
+                </a:solidFill>
+                <a:latin typeface="Arial" charset="0"/>
+                <a:ea typeface="Arial" charset="0"/>
+                <a:cs typeface="Arial" charset="0"/>
+              </a:rPr>
+              <a:t> </a:t>
+            </a:r>
+            <a:r>
+              <a:rPr lang="ko-KR" altLang="en-US" sz="800">
+                <a:solidFill>
+                  <a:srgbClr val="666666"/>
+                </a:solidFill>
+                <a:latin typeface="Arial" charset="0"/>
+                <a:ea typeface="Arial" charset="0"/>
+                <a:cs typeface="Arial" charset="0"/>
+              </a:rPr>
+              <a:t>지식을</a:t>
+            </a:r>
+            <a:r>
+              <a:rPr lang="ko-KR" altLang="en-US" sz="800">
+                <a:solidFill>
+                  <a:srgbClr val="666666"/>
+                </a:solidFill>
+                <a:latin typeface="Arial" charset="0"/>
+                <a:ea typeface="Arial" charset="0"/>
+                <a:cs typeface="Arial" charset="0"/>
+              </a:rPr>
+              <a:t> </a:t>
+            </a:r>
+            <a:r>
+              <a:rPr lang="ko-KR" altLang="en-US" sz="800">
+                <a:solidFill>
+                  <a:srgbClr val="666666"/>
+                </a:solidFill>
+                <a:latin typeface="Arial" charset="0"/>
+                <a:ea typeface="Arial" charset="0"/>
+                <a:cs typeface="Arial" charset="0"/>
+              </a:rPr>
+              <a:t>재사용</a:t>
+            </a:r>
+            <a:r>
+              <a:rPr lang="ko-KR" altLang="en-US" sz="800">
+                <a:solidFill>
+                  <a:srgbClr val="666666"/>
+                </a:solidFill>
+                <a:latin typeface="Arial" charset="0"/>
+                <a:ea typeface="Arial" charset="0"/>
+                <a:cs typeface="Arial" charset="0"/>
+              </a:rPr>
+              <a:t> </a:t>
+            </a:r>
+            <a:r>
+              <a:rPr lang="ko-KR" altLang="en-US" sz="800">
+                <a:solidFill>
+                  <a:srgbClr val="666666"/>
+                </a:solidFill>
+                <a:latin typeface="Arial" charset="0"/>
+                <a:ea typeface="Arial" charset="0"/>
+                <a:cs typeface="Arial" charset="0"/>
+              </a:rPr>
+              <a:t>가능한</a:t>
+            </a:r>
+            <a:r>
+              <a:rPr lang="ko-KR" altLang="en-US" sz="800">
+                <a:solidFill>
+                  <a:srgbClr val="666666"/>
+                </a:solidFill>
+                <a:latin typeface="Arial" charset="0"/>
+                <a:ea typeface="Arial" charset="0"/>
+                <a:cs typeface="Arial" charset="0"/>
+              </a:rPr>
+              <a:t> </a:t>
+            </a:r>
+            <a:r>
+              <a:rPr lang="ko-KR" altLang="en-US" sz="800">
+                <a:solidFill>
+                  <a:srgbClr val="666666"/>
+                </a:solidFill>
+                <a:latin typeface="Arial" charset="0"/>
+                <a:ea typeface="Arial" charset="0"/>
+                <a:cs typeface="Arial" charset="0"/>
+              </a:rPr>
+              <a:t>운영</a:t>
+            </a:r>
+            <a:r>
+              <a:rPr lang="ko-KR" altLang="en-US" sz="800">
+                <a:solidFill>
+                  <a:srgbClr val="666666"/>
+                </a:solidFill>
+                <a:latin typeface="Arial" charset="0"/>
+                <a:ea typeface="Arial" charset="0"/>
+                <a:cs typeface="Arial" charset="0"/>
+              </a:rPr>
+              <a:t> </a:t>
+            </a:r>
+            <a:r>
+              <a:rPr lang="ko-KR" altLang="en-US" sz="800">
+                <a:solidFill>
+                  <a:srgbClr val="666666"/>
+                </a:solidFill>
+                <a:latin typeface="Arial" charset="0"/>
+                <a:ea typeface="Arial" charset="0"/>
+                <a:cs typeface="Arial" charset="0"/>
+              </a:rPr>
+              <a:t>지식으로</a:t>
+            </a:r>
+            <a:r>
+              <a:rPr lang="ko-KR" altLang="en-US" sz="800">
+                <a:solidFill>
+                  <a:srgbClr val="666666"/>
+                </a:solidFill>
+                <a:latin typeface="Arial" charset="0"/>
+                <a:ea typeface="Arial" charset="0"/>
+                <a:cs typeface="Arial" charset="0"/>
+              </a:rPr>
+              <a:t> </a:t>
+            </a:r>
+            <a:r>
+              <a:rPr lang="ko-KR" altLang="en-US" sz="800">
+                <a:solidFill>
+                  <a:srgbClr val="666666"/>
+                </a:solidFill>
+                <a:latin typeface="Arial" charset="0"/>
+                <a:ea typeface="Arial" charset="0"/>
+                <a:cs typeface="Arial" charset="0"/>
+              </a:rPr>
+              <a:t>전환</a:t>
+            </a:r>
+            <a:endParaRPr lang="ko-KR" altLang="en-US" sz="800">
+              <a:solidFill>
+                <a:srgbClr val="666666"/>
+              </a:solidFill>
+              <a:latin typeface="Arial" charset="0"/>
+              <a:ea typeface="Arial" charset="0"/>
+              <a:cs typeface="Arial" charset="0"/>
+            </a:endParaRPr>
           </a:p>
         </p:txBody>
       </p:sp>
@@ -2183,8 +2451,8 @@
         </p:nvSpPr>
         <p:spPr>
           <a:xfrm>
-            <a:off x="7027164" y="978408"/>
-            <a:ext cx="1860804" cy="804672"/>
+            <a:off x="7026910" y="978535"/>
+            <a:ext cx="1860550" cy="804545"/>
           </a:xfrm>
           <a:prstGeom prst="rect">
             <a:avLst/>
@@ -2208,8 +2476,8 @@
         </p:nvSpPr>
         <p:spPr>
           <a:xfrm>
-            <a:off x="7072884" y="1024128"/>
-            <a:ext cx="1769364" cy="713232"/>
+            <a:off x="7072630" y="1024255"/>
+            <a:ext cx="1769745" cy="713740"/>
           </a:xfrm>
           <a:prstGeom prst="rect">
             <a:avLst/>
@@ -2218,49 +2486,38 @@
           <a:ln/>
         </p:spPr>
         <p:txBody>
-          <a:bodyPr wrap="square" lIns="0" tIns="0" rIns="0" bIns="0" rtlCol="0" anchor="ctr"/>
+          <a:bodyPr wrap="square" lIns="0" tIns="0" rIns="0" bIns="0" numCol="1" vert="horz" anchor="ctr">
+            <a:noAutofit/>
+          </a:bodyPr>
           <a:lstStyle/>
           <a:p>
             <a:pPr marL="0" indent="0" algn="ctr">
+              <a:buFontTx/>
               <a:buNone/>
             </a:pPr>
             <a:r>
-              <a:rPr lang="en-US" b="1">
+              <a:rPr lang="ko-KR" altLang="en-US" b="1">
                 <a:solidFill>
                   <a:srgbClr val="1A365D"/>
                 </a:solidFill>
-                <a:latin typeface="Arial" pitchFamily="34" charset="0"/>
-                <a:ea typeface="Arial" pitchFamily="34" charset="-122"/>
-                <a:cs typeface="Arial" pitchFamily="34" charset="-120"/>
-              </a:rPr>
-              <a:t>[</a:t>
-            </a:r>
-            <a:r>
-              <a:rPr lang="ko-KR" altLang="en-US" b="1">
-                <a:solidFill>
-                  <a:srgbClr val="1A365D"/>
-                </a:solidFill>
-                <a:latin typeface="Arial" pitchFamily="34" charset="0"/>
-                <a:ea typeface="Arial" pitchFamily="34" charset="-122"/>
-                <a:cs typeface="Arial" pitchFamily="34" charset="-120"/>
+                <a:latin typeface="Arial" charset="0"/>
+                <a:ea typeface="Arial" charset="0"/>
+                <a:cs typeface="Arial" charset="0"/>
               </a:rPr>
               <a:t>점검시간</a:t>
             </a:r>
-            <a:r>
-              <a:rPr lang="en-US" b="1">
-                <a:solidFill>
-                  <a:srgbClr val="1A365D"/>
-                </a:solidFill>
-                <a:latin typeface="Arial" pitchFamily="34" charset="0"/>
-                <a:ea typeface="Arial" pitchFamily="34" charset="-122"/>
-                <a:cs typeface="Arial" pitchFamily="34" charset="-120"/>
-              </a:rPr>
-              <a:t>]</a:t>
-            </a:r>
-            <a:endParaRPr lang="en-US" dirty="0"/>
+            <a:endParaRPr lang="ko-KR" altLang="en-US" b="1">
+              <a:solidFill>
+                <a:srgbClr val="1A365D"/>
+              </a:solidFill>
+              <a:latin typeface="Arial" charset="0"/>
+              <a:ea typeface="Arial" charset="0"/>
+              <a:cs typeface="Arial" charset="0"/>
+            </a:endParaRPr>
           </a:p>
           <a:p>
             <a:pPr marL="0" indent="0" algn="ctr">
+              <a:buFontTx/>
               <a:buNone/>
             </a:pPr>
             <a:r>
@@ -2268,23 +2525,24 @@
                 <a:solidFill>
                   <a:srgbClr val="666666"/>
                 </a:solidFill>
-                <a:latin typeface="Arial" pitchFamily="34" charset="0"/>
-                <a:ea typeface="Arial" pitchFamily="34" charset="-122"/>
-                <a:cs typeface="Arial" pitchFamily="34" charset="-120"/>
+                <a:latin typeface="Arial" charset="0"/>
+                <a:ea typeface="Arial" charset="0"/>
+                <a:cs typeface="Arial" charset="0"/>
               </a:rPr>
               <a:t>로그 전수 조사에 걸리는 시간 감소</a:t>
             </a:r>
-            <a:endParaRPr lang="en-US" altLang="ko-KR" sz="800">
+            <a:endParaRPr lang="ko-KR" altLang="en-US" sz="800">
               <a:solidFill>
                 <a:srgbClr val="666666"/>
               </a:solidFill>
-              <a:latin typeface="Arial" pitchFamily="34" charset="0"/>
-              <a:ea typeface="Arial" pitchFamily="34" charset="-122"/>
-              <a:cs typeface="Arial" pitchFamily="34" charset="-120"/>
+              <a:latin typeface="Arial" charset="0"/>
+              <a:ea typeface="Arial" charset="0"/>
+              <a:cs typeface="Arial" charset="0"/>
             </a:endParaRPr>
           </a:p>
           <a:p>
             <a:pPr marL="0" indent="0" algn="ctr">
+              <a:buFontTx/>
               <a:buNone/>
             </a:pPr>
             <a:r>
@@ -2292,8 +2550,8 @@
                 <a:solidFill>
                   <a:srgbClr val="666666"/>
                 </a:solidFill>
-                <a:latin typeface="Arial" pitchFamily="34" charset="0"/>
-                <a:cs typeface="Arial" pitchFamily="34" charset="-120"/>
+                <a:latin typeface="Arial" charset="0"/>
+                <a:cs typeface="Arial" charset="0"/>
               </a:rPr>
               <a:t>약 </a:t>
             </a:r>
@@ -2302,8 +2560,8 @@
                 <a:solidFill>
                   <a:srgbClr val="666666"/>
                 </a:solidFill>
-                <a:latin typeface="Arial" pitchFamily="34" charset="0"/>
-                <a:cs typeface="Arial" pitchFamily="34" charset="-120"/>
+                <a:latin typeface="Arial" charset="0"/>
+                <a:cs typeface="Arial" charset="0"/>
               </a:rPr>
               <a:t>30</a:t>
             </a:r>
@@ -2312,8 +2570,8 @@
                 <a:solidFill>
                   <a:srgbClr val="666666"/>
                 </a:solidFill>
-                <a:latin typeface="Arial" pitchFamily="34" charset="0"/>
-                <a:cs typeface="Arial" pitchFamily="34" charset="-120"/>
+                <a:latin typeface="Arial" charset="0"/>
+                <a:cs typeface="Arial" charset="0"/>
               </a:rPr>
               <a:t>분 </a:t>
             </a:r>
@@ -2322,8 +2580,8 @@
                 <a:solidFill>
                   <a:srgbClr val="666666"/>
                 </a:solidFill>
-                <a:latin typeface="Arial" pitchFamily="34" charset="0"/>
-                <a:cs typeface="Arial" pitchFamily="34" charset="-120"/>
+                <a:latin typeface="Arial" charset="0"/>
+                <a:cs typeface="Arial" charset="0"/>
               </a:rPr>
               <a:t>&gt;</a:t>
             </a:r>
@@ -2332,8 +2590,8 @@
                 <a:solidFill>
                   <a:srgbClr val="666666"/>
                 </a:solidFill>
-                <a:latin typeface="Arial" pitchFamily="34" charset="0"/>
-                <a:cs typeface="Arial" pitchFamily="34" charset="-120"/>
+                <a:latin typeface="Arial" charset="0"/>
+                <a:cs typeface="Arial" charset="0"/>
               </a:rPr>
               <a:t> </a:t>
             </a:r>
@@ -2342,8 +2600,8 @@
                 <a:solidFill>
                   <a:srgbClr val="666666"/>
                 </a:solidFill>
-                <a:latin typeface="Arial" pitchFamily="34" charset="0"/>
-                <a:cs typeface="Arial" pitchFamily="34" charset="-120"/>
+                <a:latin typeface="Arial" charset="0"/>
+                <a:cs typeface="Arial" charset="0"/>
               </a:rPr>
               <a:t>5</a:t>
             </a:r>
@@ -2352,8 +2610,8 @@
                 <a:solidFill>
                   <a:srgbClr val="666666"/>
                 </a:solidFill>
-                <a:latin typeface="Arial" pitchFamily="34" charset="0"/>
-                <a:cs typeface="Arial" pitchFamily="34" charset="-120"/>
+                <a:latin typeface="Arial" charset="0"/>
+                <a:cs typeface="Arial" charset="0"/>
               </a:rPr>
               <a:t>분</a:t>
             </a:r>
@@ -2362,8 +2620,8 @@
                 <a:solidFill>
                   <a:srgbClr val="666666"/>
                 </a:solidFill>
-                <a:latin typeface="Arial" pitchFamily="34" charset="0"/>
-                <a:cs typeface="Arial" pitchFamily="34" charset="-120"/>
+                <a:latin typeface="Arial" charset="0"/>
+                <a:cs typeface="Arial" charset="0"/>
               </a:rPr>
               <a:t>(</a:t>
             </a:r>
@@ -2372,8 +2630,8 @@
                 <a:solidFill>
                   <a:srgbClr val="666666"/>
                 </a:solidFill>
-                <a:latin typeface="Arial" pitchFamily="34" charset="0"/>
-                <a:cs typeface="Arial" pitchFamily="34" charset="-120"/>
+                <a:latin typeface="Arial" charset="0"/>
+                <a:cs typeface="Arial" charset="0"/>
               </a:rPr>
               <a:t>추정</a:t>
             </a:r>
@@ -2382,12 +2640,18 @@
                 <a:solidFill>
                   <a:srgbClr val="666666"/>
                 </a:solidFill>
-                <a:latin typeface="Arial" pitchFamily="34" charset="0"/>
-                <a:cs typeface="Arial" pitchFamily="34" charset="-120"/>
+                <a:latin typeface="Arial" charset="0"/>
+                <a:cs typeface="Arial" charset="0"/>
               </a:rPr>
               <a:t>)</a:t>
             </a:r>
-            <a:endParaRPr lang="en-US" sz="2200" dirty="0"/>
+            <a:endParaRPr lang="ko-KR" altLang="en-US" sz="800">
+              <a:solidFill>
+                <a:srgbClr val="666666"/>
+              </a:solidFill>
+              <a:latin typeface="Arial" charset="0"/>
+              <a:cs typeface="Arial" charset="0"/>
+            </a:endParaRPr>
           </a:p>
         </p:txBody>
       </p:sp>
@@ -2399,8 +2663,8 @@
         </p:nvSpPr>
         <p:spPr>
           <a:xfrm>
-            <a:off x="5056632" y="1874520"/>
-            <a:ext cx="3831336" cy="804672"/>
+            <a:off x="5056505" y="1874520"/>
+            <a:ext cx="3831590" cy="804545"/>
           </a:xfrm>
           <a:prstGeom prst="rect">
             <a:avLst/>
@@ -2424,8 +2688,8 @@
         </p:nvSpPr>
         <p:spPr>
           <a:xfrm>
-            <a:off x="5148072" y="1920240"/>
-            <a:ext cx="3648456" cy="713232"/>
+            <a:off x="5147945" y="1920240"/>
+            <a:ext cx="3649345" cy="713740"/>
           </a:xfrm>
           <a:prstGeom prst="rect">
             <a:avLst/>
@@ -2434,10 +2698,13 @@
           <a:ln/>
         </p:spPr>
         <p:txBody>
-          <a:bodyPr wrap="square" lIns="0" tIns="0" rIns="0" bIns="0" rtlCol="0" anchor="ctr"/>
+          <a:bodyPr wrap="square" lIns="0" tIns="0" rIns="0" bIns="0" numCol="1" vert="horz" anchor="ctr">
+            <a:noAutofit/>
+          </a:bodyPr>
           <a:lstStyle/>
           <a:p>
             <a:pPr marL="0" indent="0" algn="ctr">
+              <a:buFontTx/>
               <a:buNone/>
             </a:pPr>
             <a:r>
@@ -2445,38 +2712,35 @@
                 <a:solidFill>
                   <a:srgbClr val="1A365D"/>
                 </a:solidFill>
-                <a:latin typeface="Arial" pitchFamily="34" charset="0"/>
-                <a:ea typeface="Arial" pitchFamily="34" charset="-122"/>
-                <a:cs typeface="Arial" pitchFamily="34" charset="-120"/>
-              </a:rPr>
-              <a:t>[Pattern </a:t>
+                <a:latin typeface="Arial" charset="0"/>
+                <a:ea typeface="Arial" charset="0"/>
+                <a:cs typeface="Arial" charset="0"/>
+              </a:rPr>
+              <a:t>Pattern </a:t>
             </a:r>
             <a:r>
               <a:rPr lang="ko-KR" altLang="en-US" b="1">
                 <a:solidFill>
                   <a:srgbClr val="1A365D"/>
                 </a:solidFill>
-                <a:latin typeface="Arial" pitchFamily="34" charset="0"/>
-                <a:ea typeface="Arial" pitchFamily="34" charset="-122"/>
-                <a:cs typeface="Arial" pitchFamily="34" charset="-120"/>
-              </a:rPr>
-              <a:t>인식률</a:t>
-            </a:r>
-            <a:r>
-              <a:rPr lang="en-US" b="1">
-                <a:solidFill>
-                  <a:srgbClr val="1A365D"/>
-                </a:solidFill>
-                <a:latin typeface="Arial" pitchFamily="34" charset="0"/>
-                <a:ea typeface="Arial" pitchFamily="34" charset="-122"/>
-                <a:cs typeface="Arial" pitchFamily="34" charset="-120"/>
-              </a:rPr>
-              <a:t>]</a:t>
-            </a:r>
-            <a:endParaRPr lang="en-US" dirty="0"/>
+                <a:latin typeface="Arial" charset="0"/>
+                <a:ea typeface="Arial" charset="0"/>
+                <a:cs typeface="Arial" charset="0"/>
+              </a:rPr>
+              <a:t>인식</a:t>
+            </a:r>
+            <a:endParaRPr lang="ko-KR" altLang="en-US" b="1">
+              <a:solidFill>
+                <a:srgbClr val="1A365D"/>
+              </a:solidFill>
+              <a:latin typeface="Arial" charset="0"/>
+              <a:ea typeface="Arial" charset="0"/>
+              <a:cs typeface="Arial" charset="0"/>
+            </a:endParaRPr>
           </a:p>
           <a:p>
             <a:pPr marL="0" indent="0" algn="ctr">
+              <a:buFontTx/>
               <a:buNone/>
             </a:pPr>
             <a:r>
@@ -2484,9 +2748,9 @@
                 <a:solidFill>
                   <a:srgbClr val="666666"/>
                 </a:solidFill>
-                <a:latin typeface="Arial" pitchFamily="34" charset="0"/>
-                <a:ea typeface="Arial" pitchFamily="34" charset="-122"/>
-                <a:cs typeface="Arial" pitchFamily="34" charset="-120"/>
+                <a:latin typeface="Arial" charset="0"/>
+                <a:ea typeface="Arial" charset="0"/>
+                <a:cs typeface="Arial" charset="0"/>
               </a:rPr>
               <a:t>신규패턴 인식률 </a:t>
             </a:r>
@@ -2495,9 +2759,9 @@
                 <a:solidFill>
                   <a:srgbClr val="666666"/>
                 </a:solidFill>
-                <a:latin typeface="Arial" pitchFamily="34" charset="0"/>
-                <a:ea typeface="Arial" pitchFamily="34" charset="-122"/>
-                <a:cs typeface="Arial" pitchFamily="34" charset="-120"/>
+                <a:latin typeface="Arial" charset="0"/>
+                <a:ea typeface="Arial" charset="0"/>
+                <a:cs typeface="Arial" charset="0"/>
               </a:rPr>
               <a:t>90%</a:t>
             </a:r>
@@ -2506,56 +2770,60 @@
                 <a:solidFill>
                   <a:srgbClr val="666666"/>
                 </a:solidFill>
-                <a:latin typeface="Arial" pitchFamily="34" charset="0"/>
-                <a:ea typeface="Arial" pitchFamily="34" charset="-122"/>
-                <a:cs typeface="Arial" pitchFamily="34" charset="-120"/>
+                <a:latin typeface="Arial" charset="0"/>
+                <a:ea typeface="Arial" charset="0"/>
+                <a:cs typeface="Arial" charset="0"/>
               </a:rPr>
               <a:t> 이상</a:t>
             </a:r>
+            <a:r>
+              <a:rPr lang="en-US" sz="2200"/>
+              <a:t/>
+            </a:r>
             <a:br>
+              <a:rPr lang="en-US" sz="2200"/>
+            </a:br>
+            <a:r>
+              <a:rPr lang="ko-KR" altLang="en-US" sz="800">
+                <a:solidFill>
+                  <a:srgbClr val="666666"/>
+                </a:solidFill>
+                <a:latin typeface="Arial" charset="0"/>
+                <a:ea typeface="Arial" charset="0"/>
+                <a:cs typeface="Arial" charset="0"/>
+              </a:rPr>
+              <a:t>기존패턴 인식률 </a:t>
+            </a:r>
+            <a:r>
               <a:rPr lang="en-US" altLang="ko-KR" sz="800">
                 <a:solidFill>
                   <a:srgbClr val="666666"/>
                 </a:solidFill>
-                <a:latin typeface="Arial" pitchFamily="34" charset="0"/>
-                <a:ea typeface="Arial" pitchFamily="34" charset="-122"/>
-                <a:cs typeface="Arial" pitchFamily="34" charset="-120"/>
-              </a:rPr>
-            </a:br>
+                <a:latin typeface="Arial" charset="0"/>
+                <a:ea typeface="Arial" charset="0"/>
+                <a:cs typeface="Arial" charset="0"/>
+              </a:rPr>
+              <a:t>80%</a:t>
+            </a:r>
             <a:r>
               <a:rPr lang="ko-KR" altLang="en-US" sz="800">
                 <a:solidFill>
                   <a:srgbClr val="666666"/>
                 </a:solidFill>
-                <a:latin typeface="Arial" pitchFamily="34" charset="0"/>
-                <a:ea typeface="Arial" pitchFamily="34" charset="-122"/>
-                <a:cs typeface="Arial" pitchFamily="34" charset="-120"/>
-              </a:rPr>
-              <a:t>기존패턴 인식률 </a:t>
-            </a:r>
-            <a:r>
-              <a:rPr lang="en-US" altLang="ko-KR" sz="800">
-                <a:solidFill>
-                  <a:srgbClr val="666666"/>
-                </a:solidFill>
-                <a:latin typeface="Arial" pitchFamily="34" charset="0"/>
-                <a:ea typeface="Arial" pitchFamily="34" charset="-122"/>
-                <a:cs typeface="Arial" pitchFamily="34" charset="-120"/>
-              </a:rPr>
-              <a:t>80%</a:t>
-            </a:r>
-            <a:r>
-              <a:rPr lang="ko-KR" altLang="en-US" sz="800">
-                <a:solidFill>
-                  <a:srgbClr val="666666"/>
-                </a:solidFill>
-                <a:latin typeface="Arial" pitchFamily="34" charset="0"/>
-                <a:ea typeface="Arial" pitchFamily="34" charset="-122"/>
-                <a:cs typeface="Arial" pitchFamily="34" charset="-120"/>
+                <a:latin typeface="Arial" charset="0"/>
+                <a:ea typeface="Arial" charset="0"/>
+                <a:cs typeface="Arial" charset="0"/>
               </a:rPr>
               <a:t> 이상</a:t>
             </a:r>
-            <a:endParaRPr lang="en-US" sz="2200" dirty="0"/>
+            <a:endParaRPr lang="ko-KR" altLang="en-US" sz="800">
+              <a:solidFill>
+                <a:srgbClr val="666666"/>
+              </a:solidFill>
+              <a:latin typeface="Arial" charset="0"/>
+              <a:ea typeface="Arial" charset="0"/>
+              <a:cs typeface="Arial" charset="0"/>
+            </a:endParaRPr>
           </a:p>
         </p:txBody>
       </p:sp>
@@ -2567,8 +2835,8 @@
         </p:nvSpPr>
         <p:spPr>
           <a:xfrm>
-            <a:off x="5056632" y="2788920"/>
-            <a:ext cx="3831336" cy="2148840"/>
+            <a:off x="5056505" y="2788920"/>
+            <a:ext cx="3831590" cy="2148840"/>
           </a:xfrm>
           <a:prstGeom prst="rect">
             <a:avLst/>
@@ -2587,39 +2855,51 @@
       <p:sp>
         <p:nvSpPr>
           <p:cNvPr id="25" name="Text 23"/>
-          <p:cNvSpPr/>
-          <p:nvPr/>
-        </p:nvSpPr>
-        <p:spPr>
-          <a:xfrm>
-            <a:off x="5056632" y="2907792"/>
-            <a:ext cx="3831336" cy="219456"/>
-          </a:xfrm>
-          <a:prstGeom prst="rect">
-            <a:avLst/>
-          </a:prstGeom>
+          <p:cNvSpPr>
+            <a:spLocks/>
+          </p:cNvSpPr>
+          <p:nvPr/>
+        </p:nvSpPr>
+        <p:spPr>
+          <a:xfrm rot="0">
+            <a:off x="5056505" y="2912110"/>
+            <a:ext cx="3832225" cy="220345"/>
+          </a:xfrm>
+          <a:prstGeom prst="rect"/>
           <a:noFill/>
-          <a:ln/>
+          <a:ln cap="flat" cmpd="sng">
+            <a:prstDash/>
+          </a:ln>
         </p:spPr>
         <p:txBody>
-          <a:bodyPr wrap="square" lIns="0" tIns="0" rIns="0" bIns="0" rtlCol="0" anchor="ctr"/>
+          <a:bodyPr wrap="square" lIns="0" tIns="0" rIns="0" bIns="0" numCol="1" vert="horz" anchor="ctr">
+            <a:noAutofit/>
+          </a:bodyPr>
           <a:lstStyle/>
           <a:p>
             <a:pPr marL="0" indent="0" algn="ctr">
+              <a:buFontTx/>
               <a:buNone/>
             </a:pPr>
             <a:r>
-              <a:rPr lang="en-US" sz="900" b="1" dirty="0">
+              <a:rPr lang="en-US" sz="900" b="1">
                 <a:solidFill>
                   <a:srgbClr val="4ECDC4"/>
                 </a:solidFill>
-                <a:latin typeface="Arial" pitchFamily="34" charset="0"/>
-                <a:ea typeface="Arial" pitchFamily="34" charset="-122"/>
-                <a:cs typeface="Arial" pitchFamily="34" charset="-120"/>
+                <a:latin typeface="Arial" charset="0"/>
+                <a:ea typeface="Arial" charset="0"/>
+                <a:cs typeface="Arial" charset="0"/>
               </a:rPr>
               <a:t>Key Message</a:t>
             </a:r>
-            <a:endParaRPr lang="en-US" sz="900" dirty="0"/>
+            <a:endParaRPr lang="ko-KR" altLang="en-US" sz="900" b="1">
+              <a:solidFill>
+                <a:srgbClr val="4ECDC4"/>
+              </a:solidFill>
+              <a:latin typeface="Arial" charset="0"/>
+              <a:ea typeface="Arial" charset="0"/>
+              <a:cs typeface="Arial" charset="0"/>
+            </a:endParaRPr>
           </a:p>
         </p:txBody>
       </p:sp>
@@ -2631,8 +2911,8 @@
         </p:nvSpPr>
         <p:spPr>
           <a:xfrm>
-            <a:off x="5193792" y="3172968"/>
-            <a:ext cx="3557016" cy="1645920"/>
+            <a:off x="5193665" y="3173095"/>
+            <a:ext cx="3557270" cy="1645920"/>
           </a:xfrm>
           <a:prstGeom prst="rect">
             <a:avLst/>
@@ -2730,6 +3010,21 @@
   <p:clrMapOvr>
     <a:masterClrMapping/>
   </p:clrMapOvr>
+  <mc:AlternateContent xmlns:mc="http://schemas.openxmlformats.org/markup-compatibility/2006">
+    <mc:Choice xmlns:p14="http://schemas.microsoft.com/office/powerpoint/2010/main" Requires="p14">
+      <p:transition spd="slow" p14:dur="2000"/>
+    </mc:Choice>
+    <mc:Fallback>
+      <p:transition spd="slow"/>
+    </mc:Fallback>
+  </mc:AlternateContent>
+  <p:timing>
+    <p:tnLst>
+      <p:par>
+        <p:cTn id="1" dur="indefinite" restart="never" nodeType="tmRoot"/>
+      </p:par>
+    </p:tnLst>
+  </p:timing>
 </p:sld>
 </file>
 
@@ -3686,14 +3981,13 @@
 </file>
 
 <file path=ppt/slides/slide4.xml><?xml version="1.0" encoding="utf-8"?>
-<p:sld xmlns:a="http://schemas.openxmlformats.org/drawingml/2006/main" xmlns:r="http://schemas.openxmlformats.org/officeDocument/2006/relationships" xmlns:p="http://schemas.openxmlformats.org/presentationml/2006/main">
+<p:sld xmlns:a="http://schemas.openxmlformats.org/drawingml/2006/main" xmlns:r="http://schemas.openxmlformats.org/officeDocument/2006/relationships" xmlns:p="http://schemas.openxmlformats.org/presentationml/2006/main" xmlns:p14="http://schemas.microsoft.com/office/powerpoint/2010/main">
   <p:cSld name="Slide 4">
     <p:bg>
       <p:bgPr>
         <a:solidFill>
           <a:srgbClr val="FFFFFF"/>
         </a:solidFill>
-        <a:effectLst/>
       </p:bgPr>
     </p:bg>
     <p:spTree>
@@ -3718,8 +4012,8 @@
         </p:nvSpPr>
         <p:spPr>
           <a:xfrm>
-            <a:off x="256032" y="137160"/>
-            <a:ext cx="54864" cy="402336"/>
+            <a:off x="255905" y="137160"/>
+            <a:ext cx="54610" cy="402590"/>
           </a:xfrm>
           <a:prstGeom prst="rect">
             <a:avLst/>
@@ -3743,8 +4037,8 @@
         </p:nvSpPr>
         <p:spPr>
           <a:xfrm>
-            <a:off x="374904" y="137160"/>
-            <a:ext cx="6766560" cy="402336"/>
+            <a:off x="374650" y="137160"/>
+            <a:ext cx="6766560" cy="402590"/>
           </a:xfrm>
           <a:prstGeom prst="rect">
             <a:avLst/>
@@ -3782,7 +4076,7 @@
         </p:nvSpPr>
         <p:spPr>
           <a:xfrm>
-            <a:off x="7562088" y="192024"/>
+            <a:off x="7562215" y="191770"/>
             <a:ext cx="1325880" cy="274320"/>
           </a:xfrm>
           <a:prstGeom prst="rect">
@@ -3807,7 +4101,7 @@
         </p:nvSpPr>
         <p:spPr>
           <a:xfrm>
-            <a:off x="7562088" y="192024"/>
+            <a:off x="7562215" y="191770"/>
             <a:ext cx="1325880" cy="274320"/>
           </a:xfrm>
           <a:prstGeom prst="rect">
@@ -3857,8 +4151,8 @@
         </p:nvSpPr>
         <p:spPr>
           <a:xfrm>
-            <a:off x="256032" y="576072"/>
-            <a:ext cx="8631936" cy="0"/>
+            <a:off x="255905" y="575945"/>
+            <a:ext cx="8632190" cy="0"/>
           </a:xfrm>
           <a:prstGeom prst="line">
             <a:avLst/>
@@ -3944,8 +4238,8 @@
         </p:nvSpPr>
         <p:spPr>
           <a:xfrm>
-            <a:off x="256032" y="667512"/>
-            <a:ext cx="8631936" cy="987552"/>
+            <a:off x="255905" y="667385"/>
+            <a:ext cx="8632190" cy="987425"/>
           </a:xfrm>
           <a:prstGeom prst="rect">
             <a:avLst/>
@@ -3969,7 +4263,7 @@
         </p:nvSpPr>
         <p:spPr>
           <a:xfrm>
-            <a:off x="420624" y="758952"/>
+            <a:off x="420370" y="758825"/>
             <a:ext cx="2743200" cy="228600"/>
           </a:xfrm>
           <a:prstGeom prst="rect">
@@ -4008,8 +4302,8 @@
         </p:nvSpPr>
         <p:spPr>
           <a:xfrm>
-            <a:off x="420624" y="1033272"/>
-            <a:ext cx="8302752" cy="548640"/>
+            <a:off x="420370" y="1033145"/>
+            <a:ext cx="8302625" cy="548640"/>
           </a:xfrm>
           <a:prstGeom prst="rect">
             <a:avLst/>
@@ -4079,27 +4373,39 @@
       <p:sp>
         <p:nvSpPr>
           <p:cNvPr id="12" name="Shape 10"/>
-          <p:cNvSpPr/>
-          <p:nvPr/>
-        </p:nvSpPr>
-        <p:spPr>
-          <a:xfrm>
-            <a:off x="256032" y="1764792"/>
-            <a:ext cx="4620768" cy="3172968"/>
-          </a:xfrm>
-          <a:prstGeom prst="rect">
-            <a:avLst/>
-          </a:prstGeom>
+          <p:cNvSpPr>
+            <a:spLocks/>
+          </p:cNvSpPr>
+          <p:nvPr/>
+        </p:nvSpPr>
+        <p:spPr>
+          <a:xfrm rot="0">
+            <a:off x="255905" y="1755775"/>
+            <a:ext cx="4621530" cy="3173730"/>
+          </a:xfrm>
+          <a:prstGeom prst="rect"/>
           <a:solidFill>
             <a:srgbClr val="F8F9FA"/>
           </a:solidFill>
-          <a:ln w="12700">
+          <a:ln w="12700" cap="flat" cmpd="sng">
             <a:solidFill>
-              <a:srgbClr val="E5E5E5"/>
+              <a:srgbClr val="E5E5E5">
+                <a:alpha val="100000"/>
+              </a:srgbClr>
             </a:solidFill>
             <a:prstDash val="solid"/>
           </a:ln>
         </p:spPr>
+        <p:txBody>
+          <a:bodyPr wrap="square" lIns="0" tIns="0" rIns="0" bIns="0" vert="horz" anchor="t">
+            <a:noAutofit/>
+          </a:bodyPr>
+          <a:lstStyle/>
+          <a:p>
+            <a:pPr marL="0" indent="0"/>
+            <a:endParaRPr lang="ko-KR" altLang="en-US"/>
+          </a:p>
+        </p:txBody>
       </p:sp>
       <p:sp>
         <p:nvSpPr>
@@ -4109,8 +4415,8 @@
         </p:nvSpPr>
         <p:spPr>
           <a:xfrm>
-            <a:off x="256032" y="1764792"/>
-            <a:ext cx="54864" cy="3172968"/>
+            <a:off x="255905" y="1764665"/>
+            <a:ext cx="54610" cy="3173095"/>
           </a:xfrm>
           <a:prstGeom prst="rect">
             <a:avLst/>
@@ -4134,8 +4440,8 @@
         </p:nvSpPr>
         <p:spPr>
           <a:xfrm>
-            <a:off x="374904" y="1856232"/>
-            <a:ext cx="4041648" cy="246888"/>
+            <a:off x="374650" y="1856105"/>
+            <a:ext cx="4041775" cy="247015"/>
           </a:xfrm>
           <a:prstGeom prst="rect">
             <a:avLst/>
@@ -4173,8 +4479,8 @@
         </p:nvSpPr>
         <p:spPr>
           <a:xfrm>
-            <a:off x="384048" y="2167128"/>
-            <a:ext cx="4023360" cy="2697480"/>
+            <a:off x="384175" y="2167255"/>
+            <a:ext cx="4023995" cy="2698115"/>
           </a:xfrm>
           <a:prstGeom prst="rect">
             <a:avLst/>
@@ -4183,105 +4489,134 @@
           <a:ln/>
         </p:spPr>
         <p:txBody>
-          <a:bodyPr wrap="square" lIns="0" tIns="0" rIns="0" bIns="0" rtlCol="0" anchor="t"/>
+          <a:bodyPr wrap="square" lIns="0" tIns="0" rIns="0" bIns="0" numCol="1" vert="horz" anchor="t">
+            <a:noAutofit/>
+          </a:bodyPr>
           <a:lstStyle/>
           <a:p>
             <a:pPr marL="0" indent="0">
+              <a:buFontTx/>
               <a:buNone/>
             </a:pPr>
             <a:r>
-              <a:rPr lang="en-US" sz="900" b="1" dirty="0">
+              <a:rPr lang="en-US" sz="900" b="1">
                 <a:solidFill>
                   <a:srgbClr val="333333"/>
                 </a:solidFill>
-                <a:latin typeface="Arial" pitchFamily="34" charset="0"/>
-                <a:ea typeface="Arial" pitchFamily="34" charset="-122"/>
-                <a:cs typeface="Arial" pitchFamily="34" charset="-120"/>
+                <a:latin typeface="Arial" charset="0"/>
+                <a:ea typeface="Arial" charset="0"/>
+                <a:cs typeface="Arial" charset="0"/>
               </a:rPr>
               <a:t>어떻게 해결했는가? (설계 결정)</a:t>
             </a:r>
-            <a:endParaRPr lang="en-US" sz="900" dirty="0"/>
-          </a:p>
-          <a:p>
-            <a:r>
-              <a:rPr lang="ko-Kore-KR" altLang="ko-Kore-KR" sz="850">
+            <a:endParaRPr lang="ko-KR" altLang="en-US" sz="900" b="1">
+              <a:solidFill>
+                <a:srgbClr val="333333"/>
+              </a:solidFill>
+              <a:latin typeface="Arial" charset="0"/>
+              <a:ea typeface="Arial" charset="0"/>
+              <a:cs typeface="Arial" charset="0"/>
+            </a:endParaRPr>
+          </a:p>
+          <a:p>
+            <a:pPr marL="0" indent="0">
+              <a:buFontTx/>
+              <a:buNone/>
+            </a:pPr>
+            <a:r>
+              <a:rPr lang="ko-KR" altLang="ko-KR" sz="850">
                 <a:solidFill>
                   <a:srgbClr val="666666"/>
                 </a:solidFill>
-                <a:latin typeface="Arial" pitchFamily="34" charset="0"/>
-                <a:cs typeface="Arial" pitchFamily="34" charset="-120"/>
-              </a:rPr>
-              <a:t>결정적 정규화와 Fingerprint를 1차 기준으로 두고, Drain3·hybrid similarity·HDBSCAN으로 중복 후보를 만든 뒤 운영자 승인 시 normalization rule, canonical Fingerprint alias, Known Pattern을 함께 저장하도록 설계</a:t>
+                <a:latin typeface="Arial" charset="0"/>
+                <a:cs typeface="Arial" charset="0"/>
+              </a:rPr>
+              <a:t>정규화와 Fingerprint를 1차 기준으로 두고, Drain3·hybrid similarity·HDBSCAN으로 중복 후보를 만든 뒤 운영자 승인 시 normalization rule, canonical Fingerprint alias, Known Pattern을 함께 저장하도록 설계</a:t>
             </a:r>
             <a:r>
               <a:rPr lang="ko-KR" altLang="en-US" sz="850">
                 <a:solidFill>
                   <a:srgbClr val="666666"/>
                 </a:solidFill>
-                <a:latin typeface="Arial" pitchFamily="34" charset="0"/>
-                <a:cs typeface="Arial" pitchFamily="34" charset="-120"/>
+                <a:latin typeface="Arial" charset="0"/>
+                <a:cs typeface="Arial" charset="0"/>
               </a:rPr>
               <a:t>하여</a:t>
             </a:r>
-            <a:endParaRPr lang="ko-Kore-KR" altLang="ko-Kore-KR" sz="850">
+            <a:endParaRPr lang="ko-KR" altLang="en-US" sz="850">
               <a:solidFill>
                 <a:srgbClr val="666666"/>
               </a:solidFill>
-              <a:latin typeface="Arial" pitchFamily="34" charset="0"/>
-              <a:cs typeface="Arial" pitchFamily="34" charset="-120"/>
+              <a:latin typeface="Arial" charset="0"/>
+              <a:cs typeface="Arial" charset="0"/>
             </a:endParaRPr>
           </a:p>
           <a:p>
-            <a:r>
-              <a:rPr lang="ko-Kore-KR" altLang="ko-Kore-KR" sz="850">
+            <a:pPr marL="0" indent="0">
+              <a:buFontTx/>
+              <a:buNone/>
+            </a:pPr>
+            <a:r>
+              <a:rPr lang="ko-KR" altLang="ko-KR" sz="850">
                 <a:solidFill>
                   <a:srgbClr val="666666"/>
                 </a:solidFill>
-                <a:latin typeface="Arial" pitchFamily="34" charset="0"/>
-                <a:cs typeface="Arial" pitchFamily="34" charset="-120"/>
-              </a:rPr>
-              <a:t>**Human-in-the-loop 기반 지속 학습형 운영 메모리**</a:t>
-            </a:r>
-            <a:r>
-              <a:rPr lang="ko-Kore-KR" altLang="en-US" sz="850">
+                <a:latin typeface="Arial" charset="0"/>
+                <a:cs typeface="Arial" charset="0"/>
+              </a:rPr>
+              <a:t>“</a:t>
+            </a:r>
+            <a:r>
+              <a:rPr lang="ko-KR" altLang="ko-KR" sz="850">
                 <a:solidFill>
                   <a:srgbClr val="666666"/>
                 </a:solidFill>
-                <a:latin typeface="Arial" pitchFamily="34" charset="0"/>
-                <a:cs typeface="Arial" pitchFamily="34" charset="-120"/>
-              </a:rPr>
-              <a:t>를</a:t>
+                <a:latin typeface="Arial" charset="0"/>
+                <a:cs typeface="Arial" charset="0"/>
+              </a:rPr>
+              <a:t>Human-in-the-loop 기반 지속 학습형 운영 메모리</a:t>
+            </a:r>
+            <a:r>
+              <a:rPr lang="ko-KR" altLang="ko-KR" sz="850">
+                <a:solidFill>
+                  <a:srgbClr val="666666"/>
+                </a:solidFill>
+                <a:latin typeface="Arial" charset="0"/>
+                <a:cs typeface="Arial" charset="0"/>
+              </a:rPr>
+              <a:t>”</a:t>
             </a:r>
             <a:r>
               <a:rPr lang="ko-KR" altLang="en-US" sz="850">
                 <a:solidFill>
                   <a:srgbClr val="666666"/>
                 </a:solidFill>
-                <a:latin typeface="Arial" pitchFamily="34" charset="0"/>
-                <a:cs typeface="Arial" pitchFamily="34" charset="-120"/>
-              </a:rPr>
-              <a:t> 사용한다</a:t>
+                <a:latin typeface="Arial" charset="0"/>
+                <a:cs typeface="Arial" charset="0"/>
+              </a:rPr>
+              <a:t>를 사용한다</a:t>
             </a:r>
             <a:r>
               <a:rPr lang="en-US" altLang="ko-KR" sz="850">
                 <a:solidFill>
                   <a:srgbClr val="666666"/>
                 </a:solidFill>
-                <a:latin typeface="Arial" pitchFamily="34" charset="0"/>
-                <a:cs typeface="Arial" pitchFamily="34" charset="-120"/>
+                <a:latin typeface="Arial" charset="0"/>
+                <a:cs typeface="Arial" charset="0"/>
               </a:rPr>
               <a:t>.</a:t>
             </a:r>
-            <a:endParaRPr lang="ko-Kore-KR" altLang="ko-Kore-KR" sz="850">
+            <a:endParaRPr lang="ko-KR" altLang="en-US" sz="850">
               <a:solidFill>
                 <a:srgbClr val="666666"/>
               </a:solidFill>
-              <a:latin typeface="Arial" pitchFamily="34" charset="0"/>
-              <a:cs typeface="Arial" pitchFamily="34" charset="-120"/>
+              <a:latin typeface="Arial" charset="0"/>
+              <a:cs typeface="Arial" charset="0"/>
             </a:endParaRPr>
           </a:p>
           <a:p>
             <a:pPr marL="0" indent="0">
+              <a:buFontTx/>
               <a:buNone/>
             </a:pPr>
             <a:r>
@@ -4289,124 +4624,179 @@
                 <a:solidFill>
                   <a:srgbClr val="000000"/>
                 </a:solidFill>
-                <a:latin typeface="Arial" pitchFamily="34" charset="0"/>
-                <a:ea typeface="Arial" pitchFamily="34" charset="-122"/>
-                <a:cs typeface="Arial" pitchFamily="34" charset="-120"/>
+                <a:latin typeface="Arial" charset="0"/>
+                <a:ea typeface="Arial" charset="0"/>
+                <a:cs typeface="Arial" charset="0"/>
               </a:rPr>
               <a:t> </a:t>
             </a:r>
+            <a:endParaRPr lang="ko-KR" altLang="en-US" sz="500">
+              <a:solidFill>
+                <a:srgbClr val="000000"/>
+              </a:solidFill>
+              <a:latin typeface="Arial" charset="0"/>
+              <a:ea typeface="Arial" charset="0"/>
+              <a:cs typeface="Arial" charset="0"/>
+            </a:endParaRPr>
           </a:p>
           <a:p>
             <a:pPr marL="0" indent="0">
+              <a:buFontTx/>
               <a:buNone/>
             </a:pPr>
-            <a:endParaRPr lang="en-US" sz="900" b="1" dirty="0">
+            <a:endParaRPr lang="ko-KR" altLang="en-US" sz="900" b="1">
               <a:solidFill>
                 <a:srgbClr val="333333"/>
               </a:solidFill>
-              <a:latin typeface="Arial" pitchFamily="34" charset="0"/>
-              <a:ea typeface="Arial" pitchFamily="34" charset="-122"/>
-              <a:cs typeface="Arial" pitchFamily="34" charset="-120"/>
+              <a:latin typeface="Arial" charset="0"/>
+              <a:ea typeface="Arial" charset="0"/>
+              <a:cs typeface="Arial" charset="0"/>
             </a:endParaRPr>
           </a:p>
           <a:p>
             <a:pPr marL="0" indent="0">
+              <a:buFontTx/>
               <a:buNone/>
             </a:pPr>
             <a:r>
-              <a:rPr lang="en-US" sz="900" b="1" dirty="0" err="1">
+              <a:rPr lang="en-US" sz="900" b="1">
                 <a:solidFill>
                   <a:srgbClr val="333333"/>
                 </a:solidFill>
-                <a:latin typeface="Arial" pitchFamily="34" charset="0"/>
-                <a:ea typeface="Arial" pitchFamily="34" charset="-122"/>
-                <a:cs typeface="Arial" pitchFamily="34" charset="-120"/>
-              </a:rPr>
-              <a:t>핵심</a:t>
-            </a:r>
-            <a:r>
-              <a:rPr lang="en-US" sz="900" b="1" dirty="0">
-                <a:solidFill>
-                  <a:srgbClr val="333333"/>
-                </a:solidFill>
-                <a:latin typeface="Arial" pitchFamily="34" charset="0"/>
-                <a:ea typeface="Arial" pitchFamily="34" charset="-122"/>
-                <a:cs typeface="Arial" pitchFamily="34" charset="-120"/>
-              </a:rPr>
-              <a:t> 알고리즘 / 아키텍처 결정</a:t>
-            </a:r>
-            <a:endParaRPr lang="en-US" sz="900" dirty="0"/>
-          </a:p>
-          <a:p>
-            <a:r>
-              <a:rPr lang="ko-Kore-KR" altLang="en-US" sz="850">
+                <a:latin typeface="Arial" charset="0"/>
+                <a:ea typeface="Arial" charset="0"/>
+                <a:cs typeface="Arial" charset="0"/>
+              </a:rPr>
+              <a:t>핵심 알고리즘 / 아키텍처 결정</a:t>
+            </a:r>
+            <a:endParaRPr lang="ko-KR" altLang="en-US" sz="900" b="1">
+              <a:solidFill>
+                <a:srgbClr val="333333"/>
+              </a:solidFill>
+              <a:latin typeface="Arial" charset="0"/>
+              <a:ea typeface="Arial" charset="0"/>
+              <a:cs typeface="Arial" charset="0"/>
+            </a:endParaRPr>
+          </a:p>
+          <a:p>
+            <a:pPr marL="0" indent="0">
+              <a:buFontTx/>
+              <a:buNone/>
+            </a:pPr>
+            <a:r>
+              <a:rPr lang="ko-KR" altLang="en-US" sz="850">
                 <a:solidFill>
                   <a:srgbClr val="666666"/>
                 </a:solidFill>
-                <a:latin typeface="Arial" pitchFamily="34" charset="0"/>
-                <a:cs typeface="Arial" pitchFamily="34" charset="-120"/>
+                <a:latin typeface="Arial" charset="0"/>
+                <a:cs typeface="Arial" charset="0"/>
               </a:rPr>
               <a:t>정</a:t>
             </a:r>
             <a:r>
-              <a:rPr lang="ko-Kore-KR" altLang="ko-Kore-KR" sz="850">
+              <a:rPr lang="ko-KR" altLang="ko-KR" sz="850">
                 <a:solidFill>
                   <a:srgbClr val="666666"/>
                 </a:solidFill>
-                <a:latin typeface="Arial" pitchFamily="34" charset="0"/>
-                <a:cs typeface="Arial" pitchFamily="34" charset="-120"/>
+                <a:latin typeface="Arial" charset="0"/>
+                <a:cs typeface="Arial" charset="0"/>
               </a:rPr>
               <a:t>규화 후 Drain3·hybrid similarity·HDBSCAN으로 중복 후보를 만들고, 승인된 rule·alias·Known Pattern을 저장했다. </a:t>
             </a:r>
-            <a:endParaRPr lang="en-US" altLang="ko-Kore-KR" sz="850">
+            <a:endParaRPr lang="ko-KR" altLang="en-US" sz="850">
               <a:solidFill>
                 <a:srgbClr val="666666"/>
               </a:solidFill>
-              <a:latin typeface="Arial" pitchFamily="34" charset="0"/>
-              <a:cs typeface="Arial" pitchFamily="34" charset="-120"/>
+              <a:latin typeface="Arial" charset="0"/>
+              <a:cs typeface="Arial" charset="0"/>
             </a:endParaRPr>
           </a:p>
           <a:p>
-            <a:endParaRPr lang="ko-Kore-KR" altLang="ko-Kore-KR" sz="850">
+            <a:pPr marL="0" indent="0">
+              <a:buFontTx/>
+              <a:buNone/>
+            </a:pPr>
+            <a:endParaRPr lang="ko-KR" altLang="en-US" sz="850">
               <a:solidFill>
                 <a:srgbClr val="666666"/>
               </a:solidFill>
-              <a:latin typeface="Arial" pitchFamily="34" charset="0"/>
-              <a:cs typeface="Arial" pitchFamily="34" charset="-120"/>
+              <a:latin typeface="Arial" charset="0"/>
+              <a:cs typeface="Arial" charset="0"/>
             </a:endParaRPr>
           </a:p>
           <a:p>
-            <a:r>
-              <a:rPr lang="ko-Kore-KR" altLang="ko-Kore-KR" sz="850">
-                <a:solidFill>
-                  <a:srgbClr val="666666"/>
-                </a:solidFill>
-                <a:latin typeface="Arial" pitchFamily="34" charset="0"/>
-                <a:cs typeface="Arial" pitchFamily="34" charset="-120"/>
-              </a:rPr>
-              <a:t>LangGraph와 PatternOps가 이를 다음 분석에 재적용하는 **Human-in-the-loop 운영 메모리**를 구성했다.</a:t>
-            </a:r>
-          </a:p>
-          <a:p>
             <a:pPr marL="0" indent="0">
+              <a:buFontTx/>
               <a:buNone/>
             </a:pPr>
-            <a:endParaRPr lang="en-US" sz="850">
+            <a:r>
+              <a:rPr lang="ko-KR" altLang="ko-KR" sz="850">
+                <a:solidFill>
+                  <a:srgbClr val="666666"/>
+                </a:solidFill>
+                <a:latin typeface="Arial" charset="0"/>
+                <a:cs typeface="Arial" charset="0"/>
+              </a:rPr>
+              <a:t>LangGraph와 PatternOps가 이를 다음 분석에 재적용하는 </a:t>
+            </a:r>
+            <a:r>
+              <a:rPr lang="ko-KR" altLang="ko-KR" sz="850">
+                <a:solidFill>
+                  <a:srgbClr val="666666"/>
+                </a:solidFill>
+                <a:latin typeface="Arial" charset="0"/>
+                <a:cs typeface="Arial" charset="0"/>
+              </a:rPr>
+              <a:t>“</a:t>
+            </a:r>
+            <a:r>
+              <a:rPr lang="ko-KR" altLang="ko-KR" sz="850">
+                <a:solidFill>
+                  <a:srgbClr val="666666"/>
+                </a:solidFill>
+                <a:latin typeface="Arial" charset="0"/>
+                <a:cs typeface="Arial" charset="0"/>
+              </a:rPr>
+              <a:t>Human-in-the-loop 운영 메모리</a:t>
+            </a:r>
+            <a:r>
+              <a:rPr lang="ko-KR" altLang="ko-KR" sz="850">
+                <a:solidFill>
+                  <a:srgbClr val="666666"/>
+                </a:solidFill>
+                <a:latin typeface="Arial" charset="0"/>
+                <a:cs typeface="Arial" charset="0"/>
+              </a:rPr>
+              <a:t>”</a:t>
+            </a:r>
+            <a:r>
+              <a:rPr lang="ko-KR" altLang="ko-KR" sz="850">
+                <a:solidFill>
+                  <a:srgbClr val="666666"/>
+                </a:solidFill>
+                <a:latin typeface="Arial" charset="0"/>
+                <a:cs typeface="Arial" charset="0"/>
+              </a:rPr>
+              <a:t>를 구성했다.</a:t>
+            </a:r>
+            <a:endParaRPr lang="ko-KR" altLang="en-US" sz="850">
               <a:solidFill>
                 <a:srgbClr val="666666"/>
               </a:solidFill>
-              <a:latin typeface="Arial" pitchFamily="34" charset="0"/>
-              <a:cs typeface="Arial" pitchFamily="34" charset="-120"/>
+              <a:latin typeface="Arial" charset="0"/>
+              <a:cs typeface="Arial" charset="0"/>
             </a:endParaRPr>
           </a:p>
           <a:p>
             <a:pPr marL="0" indent="0">
+              <a:buFontTx/>
               <a:buNone/>
             </a:pPr>
-            <a:endParaRPr lang="en-US" sz="900"/>
+            <a:endParaRPr lang="ko-KR" altLang="en-US" sz="900"/>
           </a:p>
           <a:p>
             <a:pPr marL="0" indent="0">
+              <a:buFontTx/>
               <a:buNone/>
             </a:pPr>
             <a:r>
@@ -4414,48 +4804,66 @@
                 <a:solidFill>
                   <a:srgbClr val="333333"/>
                 </a:solidFill>
-                <a:latin typeface="Arial" pitchFamily="34" charset="0"/>
-                <a:ea typeface="Arial" pitchFamily="34" charset="-122"/>
-                <a:cs typeface="Arial" pitchFamily="34" charset="-120"/>
-              </a:rPr>
-              <a:t>왜 </a:t>
-            </a:r>
-            <a:r>
-              <a:rPr lang="en-US" sz="900" b="1" dirty="0">
-                <a:solidFill>
-                  <a:srgbClr val="333333"/>
-                </a:solidFill>
-                <a:latin typeface="Arial" pitchFamily="34" charset="0"/>
-                <a:ea typeface="Arial" pitchFamily="34" charset="-122"/>
-                <a:cs typeface="Arial" pitchFamily="34" charset="-120"/>
-              </a:rPr>
-              <a:t>이 접근이 필요했는가?</a:t>
-            </a:r>
-            <a:endParaRPr lang="en-US" sz="900" dirty="0"/>
-          </a:p>
-          <a:p>
-            <a:r>
-              <a:rPr lang="ko-Kore-KR" altLang="ko-Kore-KR" sz="850">
+                <a:latin typeface="Arial" charset="0"/>
+                <a:ea typeface="Arial" charset="0"/>
+                <a:cs typeface="Arial" charset="0"/>
+              </a:rPr>
+              <a:t>왜 이 접근이 필요했는가?</a:t>
+            </a:r>
+            <a:endParaRPr lang="ko-KR" altLang="en-US" sz="900" b="1">
+              <a:solidFill>
+                <a:srgbClr val="333333"/>
+              </a:solidFill>
+              <a:latin typeface="Arial" charset="0"/>
+              <a:ea typeface="Arial" charset="0"/>
+              <a:cs typeface="Arial" charset="0"/>
+            </a:endParaRPr>
+          </a:p>
+          <a:p>
+            <a:pPr marL="0" indent="0">
+              <a:buFontTx/>
+              <a:buNone/>
+            </a:pPr>
+            <a:r>
+              <a:rPr lang="ko-KR" altLang="ko-KR" sz="850">
                 <a:solidFill>
                   <a:srgbClr val="666666"/>
                 </a:solidFill>
-                <a:latin typeface="Arial" pitchFamily="34" charset="0"/>
-                <a:cs typeface="Arial" pitchFamily="34" charset="-120"/>
+                <a:latin typeface="Arial" charset="0"/>
+                <a:cs typeface="Arial" charset="0"/>
               </a:rPr>
               <a:t>정규식만으로는 새 변형을 놓치고, embedding만으로는 구조가 다른 로그를 잘못 합칠 수 있다. </a:t>
             </a:r>
-          </a:p>
-          <a:p>
-            <a:r>
-              <a:rPr lang="ko-Kore-KR" altLang="ko-Kore-KR" sz="850">
+            <a:endParaRPr lang="ko-KR" altLang="en-US" sz="850">
+              <a:solidFill>
+                <a:srgbClr val="666666"/>
+              </a:solidFill>
+              <a:latin typeface="Arial" charset="0"/>
+              <a:cs typeface="Arial" charset="0"/>
+            </a:endParaRPr>
+          </a:p>
+          <a:p>
+            <a:pPr marL="0" indent="0">
+              <a:buFontTx/>
+              <a:buNone/>
+            </a:pPr>
+            <a:r>
+              <a:rPr lang="ko-KR" altLang="ko-KR" sz="850">
                 <a:solidFill>
                   <a:srgbClr val="666666"/>
                 </a:solidFill>
-                <a:latin typeface="Arial" pitchFamily="34" charset="0"/>
-                <a:cs typeface="Arial" pitchFamily="34" charset="-120"/>
+                <a:latin typeface="Arial" charset="0"/>
+                <a:cs typeface="Arial" charset="0"/>
               </a:rPr>
               <a:t>결정적 규칙·다중 근거·운영자 승인을 결합해 재현성과 오탐 통제를 확보했다.</a:t>
             </a:r>
+            <a:endParaRPr lang="ko-KR" altLang="en-US" sz="850">
+              <a:solidFill>
+                <a:srgbClr val="666666"/>
+              </a:solidFill>
+              <a:latin typeface="Arial" charset="0"/>
+              <a:cs typeface="Arial" charset="0"/>
+            </a:endParaRPr>
           </a:p>
         </p:txBody>
       </p:sp>
@@ -4473,168 +4881,187 @@
         </p:nvGrpSpPr>
         <p:grpSpPr>
           <a:xfrm>
-            <a:off x="5058229" y="1764792"/>
-            <a:ext cx="3829739" cy="3172968"/>
-            <a:chOff x="4645152" y="1764792"/>
-            <a:chExt cx="4242816" cy="3172968"/>
+            <a:off x="5058410" y="1764665"/>
+            <a:ext cx="3829685" cy="3173095"/>
+            <a:chOff x="5058410" y="1764665"/>
+            <a:chExt cx="3829685" cy="3173095"/>
           </a:xfrm>
         </p:grpSpPr>
         <p:sp>
           <p:nvSpPr>
             <p:cNvPr id="16" name="Shape 14"/>
-            <p:cNvSpPr/>
+            <p:cNvSpPr>
+              <a:spLocks/>
+            </p:cNvSpPr>
             <p:nvPr/>
           </p:nvSpPr>
           <p:spPr>
-            <a:xfrm>
-              <a:off x="4645152" y="1764792"/>
-              <a:ext cx="4242816" cy="3172968"/>
+            <a:xfrm rot="0">
+              <a:off x="5058410" y="1764665"/>
+              <a:ext cx="3830320" cy="3173730"/>
             </a:xfrm>
-            <a:prstGeom prst="rect">
-              <a:avLst/>
-            </a:prstGeom>
+            <a:prstGeom prst="rect"/>
             <a:solidFill>
               <a:srgbClr val="F0FDFB"/>
             </a:solidFill>
-            <a:ln w="12700">
+            <a:ln w="12700" cap="flat" cmpd="sng">
               <a:solidFill>
-                <a:srgbClr val="E5E5E5"/>
+                <a:srgbClr val="E5E5E5">
+                  <a:alpha val="100000"/>
+                </a:srgbClr>
               </a:solidFill>
               <a:prstDash val="solid"/>
             </a:ln>
           </p:spPr>
+          <p:txBody>
+            <a:bodyPr wrap="square" lIns="0" tIns="0" rIns="0" bIns="0" vert="horz" anchor="t">
+              <a:noAutofit/>
+            </a:bodyPr>
+            <a:lstStyle/>
+            <a:p>
+              <a:pPr marL="0" indent="0"/>
+              <a:endParaRPr lang="ko-KR" altLang="en-US"/>
+            </a:p>
+          </p:txBody>
         </p:sp>
         <p:sp>
           <p:nvSpPr>
             <p:cNvPr id="17" name="Shape 15"/>
-            <p:cNvSpPr/>
+            <p:cNvSpPr>
+              <a:spLocks/>
+            </p:cNvSpPr>
             <p:nvPr/>
           </p:nvSpPr>
           <p:spPr>
-            <a:xfrm>
-              <a:off x="4645152" y="1764792"/>
-              <a:ext cx="54864" cy="3172968"/>
+            <a:xfrm rot="0">
+              <a:off x="5058410" y="1764665"/>
+              <a:ext cx="50165" cy="3173730"/>
             </a:xfrm>
-            <a:prstGeom prst="rect">
-              <a:avLst/>
-            </a:prstGeom>
+            <a:prstGeom prst="rect"/>
             <a:solidFill>
               <a:srgbClr val="4ECDC4"/>
             </a:solidFill>
-            <a:ln w="12700">
+            <a:ln w="12700" cap="flat" cmpd="sng">
               <a:solidFill>
-                <a:srgbClr val="4ECDC4"/>
+                <a:srgbClr val="4ECDC4">
+                  <a:alpha val="100000"/>
+                </a:srgbClr>
               </a:solidFill>
               <a:prstDash val="solid"/>
             </a:ln>
           </p:spPr>
+          <p:txBody>
+            <a:bodyPr wrap="square" lIns="0" tIns="0" rIns="0" bIns="0" vert="horz" anchor="t">
+              <a:noAutofit/>
+            </a:bodyPr>
+            <a:lstStyle/>
+            <a:p>
+              <a:pPr marL="0" indent="0"/>
+              <a:endParaRPr lang="ko-KR" altLang="en-US"/>
+            </a:p>
+          </p:txBody>
         </p:sp>
         <p:sp>
           <p:nvSpPr>
             <p:cNvPr id="18" name="Text 16"/>
-            <p:cNvSpPr/>
+            <p:cNvSpPr>
+              <a:spLocks/>
+            </p:cNvSpPr>
             <p:nvPr/>
           </p:nvSpPr>
           <p:spPr>
-            <a:xfrm>
-              <a:off x="4764024" y="1856232"/>
-              <a:ext cx="4041648" cy="246888"/>
+            <a:xfrm rot="0">
+              <a:off x="5165725" y="1856105"/>
+              <a:ext cx="3648710" cy="247650"/>
             </a:xfrm>
-            <a:prstGeom prst="rect">
-              <a:avLst/>
-            </a:prstGeom>
+            <a:prstGeom prst="rect"/>
             <a:noFill/>
-            <a:ln/>
+            <a:ln cap="flat" cmpd="sng">
+              <a:prstDash/>
+            </a:ln>
           </p:spPr>
           <p:txBody>
-            <a:bodyPr wrap="square" lIns="0" tIns="0" rIns="0" bIns="0" rtlCol="0" anchor="ctr"/>
+            <a:bodyPr wrap="square" lIns="0" tIns="0" rIns="0" bIns="0" numCol="1" vert="horz" anchor="ctr">
+              <a:noAutofit/>
+            </a:bodyPr>
             <a:lstStyle/>
             <a:p>
               <a:pPr marL="0" indent="0">
+                <a:buFontTx/>
                 <a:buNone/>
               </a:pPr>
               <a:r>
-                <a:rPr lang="en-US" sz="1000" b="1" dirty="0">
+                <a:rPr lang="en-US" sz="1000" b="1">
                   <a:solidFill>
                     <a:srgbClr val="3BB8B0"/>
                   </a:solidFill>
-                  <a:latin typeface="Arial" pitchFamily="34" charset="0"/>
-                  <a:ea typeface="Arial" pitchFamily="34" charset="-122"/>
-                  <a:cs typeface="Arial" pitchFamily="34" charset="-120"/>
+                  <a:latin typeface="Arial" charset="0"/>
+                  <a:ea typeface="Arial" charset="0"/>
+                  <a:cs typeface="Arial" charset="0"/>
                 </a:rPr>
                 <a:t>결과 및 성과 </a:t>
               </a:r>
               <a:r>
-                <a:rPr lang="en-US" sz="1000" b="1" dirty="0">
+                <a:rPr lang="en-US" sz="1000" b="1">
                   <a:solidFill>
                     <a:schemeClr val="bg1">
                       <a:lumMod val="50000"/>
                     </a:schemeClr>
                   </a:solidFill>
-                  <a:latin typeface="Arial" pitchFamily="34" charset="0"/>
-                  <a:ea typeface="Arial" pitchFamily="34" charset="-122"/>
-                  <a:cs typeface="Arial" pitchFamily="34" charset="-120"/>
+                  <a:latin typeface="Arial" charset="0"/>
+                  <a:ea typeface="Arial" charset="0"/>
+                  <a:cs typeface="Arial" charset="0"/>
                 </a:rPr>
                 <a:t>(</a:t>
               </a:r>
               <a:r>
-                <a:rPr lang="en-US" sz="1000" b="1" dirty="0" err="1">
+                <a:rPr lang="en-US" sz="1000" b="1">
                   <a:solidFill>
                     <a:schemeClr val="bg1">
                       <a:lumMod val="50000"/>
                     </a:schemeClr>
                   </a:solidFill>
-                  <a:latin typeface="Arial" pitchFamily="34" charset="0"/>
-                  <a:ea typeface="Arial" pitchFamily="34" charset="-122"/>
-                  <a:cs typeface="Arial" pitchFamily="34" charset="-120"/>
-                </a:rPr>
-                <a:t>수치로</a:t>
-              </a:r>
-              <a:r>
-                <a:rPr lang="en-US" sz="1000" b="1" dirty="0">
+                  <a:latin typeface="Arial" charset="0"/>
+                  <a:ea typeface="Arial" charset="0"/>
+                  <a:cs typeface="Arial" charset="0"/>
+                </a:rPr>
+                <a:t>수치로 </a:t>
+              </a:r>
+              <a:r>
+                <a:rPr lang="ko-KR" altLang="en-US" sz="1000" b="1">
                   <a:solidFill>
                     <a:schemeClr val="bg1">
                       <a:lumMod val="50000"/>
                     </a:schemeClr>
                   </a:solidFill>
-                  <a:latin typeface="Arial" pitchFamily="34" charset="0"/>
-                  <a:ea typeface="Arial" pitchFamily="34" charset="-122"/>
-                  <a:cs typeface="Arial" pitchFamily="34" charset="-120"/>
-                </a:rPr>
-                <a:t> </a:t>
-              </a:r>
-              <a:r>
-                <a:rPr lang="ko-KR" altLang="en-US" sz="1000" b="1" dirty="0">
+                  <a:latin typeface="Arial" charset="0"/>
+                  <a:ea typeface="Arial" charset="0"/>
+                  <a:cs typeface="Arial" charset="0"/>
+                </a:rPr>
+                <a:t>제시</a:t>
+              </a:r>
+              <a:r>
+                <a:rPr lang="en-US" sz="1000" b="1">
                   <a:solidFill>
                     <a:schemeClr val="bg1">
                       <a:lumMod val="50000"/>
                     </a:schemeClr>
                   </a:solidFill>
-                  <a:latin typeface="Arial" pitchFamily="34" charset="0"/>
-                  <a:ea typeface="Arial" pitchFamily="34" charset="-122"/>
-                  <a:cs typeface="Arial" pitchFamily="34" charset="-120"/>
-                </a:rPr>
-                <a:t>제시</a:t>
-              </a:r>
-              <a:r>
-                <a:rPr lang="en-US" sz="1000" b="1" dirty="0">
-                  <a:solidFill>
-                    <a:schemeClr val="bg1">
-                      <a:lumMod val="50000"/>
-                    </a:schemeClr>
-                  </a:solidFill>
-                  <a:latin typeface="Arial" pitchFamily="34" charset="0"/>
-                  <a:ea typeface="Arial" pitchFamily="34" charset="-122"/>
-                  <a:cs typeface="Arial" pitchFamily="34" charset="-120"/>
+                  <a:latin typeface="Arial" charset="0"/>
+                  <a:ea typeface="Arial" charset="0"/>
+                  <a:cs typeface="Arial" charset="0"/>
                 </a:rPr>
                 <a:t>)</a:t>
               </a:r>
-              <a:endParaRPr lang="en-US" sz="1000" dirty="0">
+              <a:endParaRPr lang="ko-KR" altLang="en-US" sz="1000" b="1">
                 <a:solidFill>
                   <a:schemeClr val="bg1">
                     <a:lumMod val="50000"/>
                   </a:schemeClr>
                 </a:solidFill>
+                <a:latin typeface="Arial" charset="0"/>
+                <a:ea typeface="Arial" charset="0"/>
+                <a:cs typeface="Arial" charset="0"/>
               </a:endParaRPr>
             </a:p>
           </p:txBody>
@@ -4642,130 +5069,187 @@
         <p:sp>
           <p:nvSpPr>
             <p:cNvPr id="19" name="Shape 17"/>
-            <p:cNvSpPr/>
+            <p:cNvSpPr>
+              <a:spLocks/>
+            </p:cNvSpPr>
             <p:nvPr/>
           </p:nvSpPr>
           <p:spPr>
-            <a:xfrm>
-              <a:off x="4773168" y="2194560"/>
-              <a:ext cx="4023360" cy="813816"/>
+            <a:xfrm rot="0">
+              <a:off x="5173980" y="2194560"/>
+              <a:ext cx="3632200" cy="814705"/>
             </a:xfrm>
-            <a:prstGeom prst="rect">
-              <a:avLst/>
-            </a:prstGeom>
+            <a:prstGeom prst="rect"/>
             <a:solidFill>
               <a:srgbClr val="FFFFFF"/>
             </a:solidFill>
-            <a:ln w="12700">
+            <a:ln w="12700" cap="flat" cmpd="sng">
               <a:solidFill>
-                <a:srgbClr val="E5E5E5"/>
+                <a:srgbClr val="E5E5E5">
+                  <a:alpha val="100000"/>
+                </a:srgbClr>
               </a:solidFill>
               <a:prstDash val="solid"/>
             </a:ln>
           </p:spPr>
-        </p:sp>
-        <p:sp>
-          <p:nvSpPr>
-            <p:cNvPr id="20" name="Text 18"/>
-            <p:cNvSpPr/>
-            <p:nvPr/>
-          </p:nvSpPr>
-          <p:spPr>
-            <a:xfrm>
-              <a:off x="4828032" y="2194560"/>
-              <a:ext cx="822960" cy="813816"/>
-            </a:xfrm>
-            <a:prstGeom prst="rect">
-              <a:avLst/>
-            </a:prstGeom>
-            <a:noFill/>
-            <a:ln/>
-          </p:spPr>
           <p:txBody>
-            <a:bodyPr wrap="square" lIns="0" tIns="0" rIns="0" bIns="0" rtlCol="0" anchor="ctr"/>
+            <a:bodyPr wrap="square" lIns="0" tIns="0" rIns="0" bIns="0" vert="horz" anchor="t">
+              <a:noAutofit/>
+            </a:bodyPr>
             <a:lstStyle/>
             <a:p>
-              <a:pPr marL="0" indent="0" algn="ctr">
-                <a:buNone/>
-              </a:pPr>
-              <a:r>
-                <a:rPr lang="en-US" altLang="ko-KR" b="1">
-                  <a:solidFill>
-                    <a:srgbClr val="1A365D"/>
-                  </a:solidFill>
-                  <a:latin typeface="Arial" pitchFamily="34" charset="0"/>
-                  <a:ea typeface="Arial" pitchFamily="34" charset="-122"/>
-                  <a:cs typeface="Arial" pitchFamily="34" charset="-120"/>
-                </a:rPr>
-                <a:t>-</a:t>
-              </a:r>
-              <a:r>
-                <a:rPr lang="en-US" sz="1800" b="1">
-                  <a:solidFill>
-                    <a:srgbClr val="1A365D"/>
-                  </a:solidFill>
-                  <a:latin typeface="Arial" pitchFamily="34" charset="0"/>
-                  <a:ea typeface="Arial" pitchFamily="34" charset="-122"/>
-                  <a:cs typeface="Arial" pitchFamily="34" charset="-120"/>
-                </a:rPr>
-                <a:t>%</a:t>
-              </a:r>
-              <a:endParaRPr lang="en-US" sz="1800" dirty="0"/>
+              <a:pPr marL="0" indent="0"/>
+              <a:endParaRPr lang="ko-KR" altLang="en-US"/>
             </a:p>
           </p:txBody>
         </p:sp>
         <p:sp>
           <p:nvSpPr>
-            <p:cNvPr id="21" name="Shape 19"/>
-            <p:cNvSpPr/>
+            <p:cNvPr id="20" name="Text 18"/>
+            <p:cNvSpPr>
+              <a:spLocks/>
+            </p:cNvSpPr>
             <p:nvPr/>
           </p:nvSpPr>
           <p:spPr>
-            <a:xfrm>
-              <a:off x="5696712" y="2373600"/>
-              <a:ext cx="0" cy="455737"/>
+            <a:xfrm rot="0">
+              <a:off x="5223510" y="2194560"/>
+              <a:ext cx="743585" cy="814705"/>
             </a:xfrm>
-            <a:prstGeom prst="line">
-              <a:avLst/>
-            </a:prstGeom>
+            <a:prstGeom prst="rect"/>
             <a:noFill/>
-            <a:ln w="12700">
+            <a:ln cap="flat" cmpd="sng">
+              <a:prstDash/>
+            </a:ln>
+          </p:spPr>
+          <p:txBody>
+            <a:bodyPr wrap="square" lIns="0" tIns="0" rIns="0" bIns="0" numCol="1" vert="horz" anchor="ctr">
+              <a:noAutofit/>
+            </a:bodyPr>
+            <a:lstStyle/>
+            <a:p>
+              <a:pPr marL="0" indent="0" algn="ctr">
+                <a:buFontTx/>
+                <a:buNone/>
+              </a:pPr>
+              <a:r>
+                <a:rPr lang="ko-KR" sz="1800" b="1">
+                  <a:solidFill>
+                    <a:srgbClr val="1A365D"/>
+                  </a:solidFill>
+                  <a:latin typeface="Arial" charset="0"/>
+                  <a:ea typeface="Arial" charset="0"/>
+                  <a:cs typeface="Arial" charset="0"/>
+                </a:rPr>
+                <a:t>9</a:t>
+              </a:r>
+              <a:r>
+                <a:rPr lang="ko-KR" sz="1800" b="1">
+                  <a:solidFill>
+                    <a:srgbClr val="1A365D"/>
+                  </a:solidFill>
+                  <a:latin typeface="Arial" charset="0"/>
+                  <a:ea typeface="Arial" charset="0"/>
+                  <a:cs typeface="Arial" charset="0"/>
+                </a:rPr>
+                <a:t>8</a:t>
+              </a:r>
+              <a:r>
+                <a:rPr lang="en-US" sz="1800" b="1">
+                  <a:solidFill>
+                    <a:srgbClr val="1A365D"/>
+                  </a:solidFill>
+                  <a:latin typeface="Arial" charset="0"/>
+                  <a:ea typeface="Arial" charset="0"/>
+                  <a:cs typeface="Arial" charset="0"/>
+                </a:rPr>
+                <a:t>%</a:t>
+              </a:r>
+              <a:endParaRPr lang="ko-KR" altLang="en-US" sz="1800" b="1">
+                <a:solidFill>
+                  <a:srgbClr val="1A365D"/>
+                </a:solidFill>
+                <a:latin typeface="Arial" charset="0"/>
+                <a:ea typeface="Arial" charset="0"/>
+                <a:cs typeface="Arial" charset="0"/>
+              </a:endParaRPr>
+            </a:p>
+          </p:txBody>
+        </p:sp>
+        <p:cxnSp>
+          <p:nvCxnSpPr>
+            <p:cNvPr id="21" name="Shape 19"/>
+            <p:cNvCxnSpPr/>
+            <p:nvPr/>
+          </p:nvCxnSpPr>
+          <p:spPr>
+            <a:xfrm rot="0">
+              <a:off x="6007100" y="2373630"/>
+              <a:ext cx="635" cy="456565"/>
+            </a:xfrm>
+            <a:prstGeom prst="line"/>
+            <a:noFill/>
+            <a:ln w="12700" cap="flat" cmpd="sng">
               <a:solidFill>
-                <a:srgbClr val="E5E5E5"/>
+                <a:srgbClr val="E5E5E5">
+                  <a:alpha val="100000"/>
+                </a:srgbClr>
               </a:solidFill>
               <a:prstDash val="solid"/>
             </a:ln>
           </p:spPr>
-        </p:sp>
+          <p:style>
+            <a:lnRef idx="1">
+              <a:schemeClr val="accent1"/>
+            </a:lnRef>
+            <a:fillRef idx="0">
+              <a:schemeClr val="accent1"/>
+            </a:fillRef>
+            <a:effectRef idx="0">
+              <a:schemeClr val="accent1"/>
+            </a:effectRef>
+            <a:fontRef idx="minor">
+              <a:schemeClr val="tx1"/>
+            </a:fontRef>
+          </p:style>
+        </p:cxnSp>
         <p:sp>
           <p:nvSpPr>
             <p:cNvPr id="22" name="Text 20"/>
-            <p:cNvSpPr/>
+            <p:cNvSpPr>
+              <a:spLocks/>
+            </p:cNvSpPr>
             <p:nvPr/>
           </p:nvSpPr>
           <p:spPr>
-            <a:xfrm>
-              <a:off x="5797296" y="2249424"/>
-              <a:ext cx="2907792" cy="704088"/>
+            <a:xfrm rot="0">
+              <a:off x="6097905" y="2249170"/>
+              <a:ext cx="2625090" cy="704850"/>
             </a:xfrm>
-            <a:prstGeom prst="rect">
-              <a:avLst/>
-            </a:prstGeom>
+            <a:prstGeom prst="rect"/>
             <a:noFill/>
-            <a:ln/>
+            <a:ln cap="flat" cmpd="sng">
+              <a:prstDash/>
+            </a:ln>
           </p:spPr>
           <p:txBody>
-            <a:bodyPr wrap="square" lIns="0" tIns="0" rIns="0" bIns="0" rtlCol="0" anchor="ctr"/>
+            <a:bodyPr wrap="square" lIns="0" tIns="0" rIns="0" bIns="0" numCol="1" vert="horz" anchor="ctr">
+              <a:noAutofit/>
+            </a:bodyPr>
             <a:lstStyle/>
             <a:p>
-              <a:r>
-                <a:rPr lang="en-US" sz="850" b="1" dirty="0">
+              <a:pPr marL="0" indent="0">
+                <a:buFontTx/>
+                <a:buNone/>
+              </a:pPr>
+              <a:r>
+                <a:rPr lang="en-US" sz="850" b="1">
                   <a:solidFill>
                     <a:srgbClr val="1A365D"/>
                   </a:solidFill>
-                  <a:latin typeface="Arial" pitchFamily="34" charset="0"/>
-                  <a:ea typeface="Arial" pitchFamily="34" charset="-122"/>
-                  <a:cs typeface="Arial" pitchFamily="34" charset="-120"/>
+                  <a:latin typeface="Arial" charset="0"/>
+                  <a:ea typeface="Arial" charset="0"/>
+                  <a:cs typeface="Arial" charset="0"/>
                 </a:rPr>
                 <a:t>성과 </a:t>
               </a:r>
@@ -4774,9 +5258,9 @@
                   <a:solidFill>
                     <a:srgbClr val="1A365D"/>
                   </a:solidFill>
-                  <a:latin typeface="Arial" pitchFamily="34" charset="0"/>
-                  <a:ea typeface="Arial" pitchFamily="34" charset="-122"/>
-                  <a:cs typeface="Arial" pitchFamily="34" charset="-120"/>
+                  <a:latin typeface="Arial" charset="0"/>
+                  <a:ea typeface="Arial" charset="0"/>
+                  <a:cs typeface="Arial" charset="0"/>
                 </a:rPr>
                 <a:t>지표 1</a:t>
               </a:r>
@@ -4785,9 +5269,9 @@
                   <a:solidFill>
                     <a:srgbClr val="1A365D"/>
                   </a:solidFill>
-                  <a:latin typeface="Arial" pitchFamily="34" charset="0"/>
-                  <a:ea typeface="Arial" pitchFamily="34" charset="-122"/>
-                  <a:cs typeface="Arial" pitchFamily="34" charset="-120"/>
+                  <a:latin typeface="Arial" charset="0"/>
+                  <a:ea typeface="Arial" charset="0"/>
+                  <a:cs typeface="Arial" charset="0"/>
                 </a:rPr>
                 <a:t> </a:t>
               </a:r>
@@ -4796,9 +5280,9 @@
                   <a:solidFill>
                     <a:srgbClr val="1A365D"/>
                   </a:solidFill>
-                  <a:latin typeface="Arial" pitchFamily="34" charset="0"/>
-                  <a:ea typeface="Arial" pitchFamily="34" charset="-122"/>
-                  <a:cs typeface="Arial" pitchFamily="34" charset="-120"/>
+                  <a:latin typeface="Arial" charset="0"/>
+                  <a:ea typeface="Arial" charset="0"/>
+                  <a:cs typeface="Arial" charset="0"/>
                 </a:rPr>
                 <a:t>–</a:t>
               </a:r>
@@ -4807,58 +5291,88 @@
                   <a:solidFill>
                     <a:srgbClr val="1A365D"/>
                   </a:solidFill>
-                  <a:latin typeface="Arial" pitchFamily="34" charset="0"/>
-                  <a:ea typeface="Arial" pitchFamily="34" charset="-122"/>
-                  <a:cs typeface="Arial" pitchFamily="34" charset="-120"/>
+                  <a:latin typeface="Arial" charset="0"/>
+                  <a:ea typeface="Arial" charset="0"/>
+                  <a:cs typeface="Arial" charset="0"/>
                 </a:rPr>
                 <a:t> </a:t>
               </a:r>
               <a:r>
-                <a:rPr lang="ko-KR" altLang="en-US" sz="800">
-                  <a:solidFill>
-                    <a:srgbClr val="666666"/>
-                  </a:solidFill>
-                  <a:latin typeface="Arial" pitchFamily="34" charset="0"/>
-                  <a:cs typeface="Arial" pitchFamily="34" charset="-120"/>
-                </a:rPr>
-                <a:t>중복 후보 </a:t>
-              </a:r>
-              <a:r>
-                <a:rPr lang="ko-Kore-KR" altLang="ko-Kore-KR" sz="800">
-                  <a:solidFill>
-                    <a:srgbClr val="666666"/>
-                  </a:solidFill>
-                  <a:latin typeface="Arial" pitchFamily="34" charset="0"/>
-                  <a:cs typeface="Arial" pitchFamily="34" charset="-120"/>
-                </a:rPr>
-                <a:t>Fingerprint 수렴</a:t>
-              </a:r>
-              <a:r>
-                <a:rPr lang="ko-KR" altLang="en-US" sz="800">
-                  <a:solidFill>
-                    <a:srgbClr val="666666"/>
-                  </a:solidFill>
-                  <a:latin typeface="Arial" pitchFamily="34" charset="0"/>
-                  <a:cs typeface="Arial" pitchFamily="34" charset="-120"/>
-                </a:rPr>
-                <a:t> 정확도</a:t>
-              </a:r>
-              <a:endParaRPr lang="en-US" altLang="ko-KR" sz="800" dirty="0">
-                <a:solidFill>
-                  <a:srgbClr val="666666"/>
-                </a:solidFill>
-                <a:latin typeface="Arial" pitchFamily="34" charset="0"/>
-                <a:cs typeface="Arial" pitchFamily="34" charset="-120"/>
+                <a:rPr lang="ko-KR" altLang="en-US" sz="850" b="1">
+                  <a:solidFill>
+                    <a:srgbClr val="1A365D"/>
+                  </a:solidFill>
+                  <a:latin typeface="Arial" charset="0"/>
+                  <a:ea typeface="Arial" charset="0"/>
+                  <a:cs typeface="Arial" charset="0"/>
+                </a:rPr>
+                <a:t>F</a:t>
+              </a:r>
+              <a:r>
+                <a:rPr lang="ko-KR" altLang="en-US" sz="850" b="1">
+                  <a:solidFill>
+                    <a:srgbClr val="1A365D"/>
+                  </a:solidFill>
+                  <a:latin typeface="Arial" charset="0"/>
+                  <a:ea typeface="Arial" charset="0"/>
+                  <a:cs typeface="Arial" charset="0"/>
+                </a:rPr>
+                <a:t>ingerPrint </a:t>
+              </a:r>
+              <a:r>
+                <a:rPr lang="ko-KR" altLang="en-US" sz="850" b="1">
+                  <a:solidFill>
+                    <a:srgbClr val="1A365D"/>
+                  </a:solidFill>
+                  <a:latin typeface="Arial" charset="0"/>
+                  <a:ea typeface="Arial" charset="0"/>
+                  <a:cs typeface="Arial" charset="0"/>
+                </a:rPr>
+                <a:t>분산 9</a:t>
+              </a:r>
+              <a:r>
+                <a:rPr lang="ko-KR" altLang="en-US" sz="850" b="1">
+                  <a:solidFill>
+                    <a:srgbClr val="1A365D"/>
+                  </a:solidFill>
+                  <a:latin typeface="Arial" charset="0"/>
+                  <a:ea typeface="Arial" charset="0"/>
+                  <a:cs typeface="Arial" charset="0"/>
+                </a:rPr>
+                <a:t>8%축</a:t>
+              </a:r>
+              <a:r>
+                <a:rPr lang="ko-KR" altLang="en-US" sz="850" b="1">
+                  <a:solidFill>
+                    <a:srgbClr val="1A365D"/>
+                  </a:solidFill>
+                  <a:latin typeface="Arial" charset="0"/>
+                  <a:ea typeface="Arial" charset="0"/>
+                  <a:cs typeface="Arial" charset="0"/>
+                </a:rPr>
+                <a:t>소</a:t>
+              </a:r>
+              <a:endParaRPr lang="ko-KR" altLang="en-US" sz="850" b="1">
+                <a:solidFill>
+                  <a:srgbClr val="1A365D"/>
+                </a:solidFill>
+                <a:latin typeface="Arial" charset="0"/>
+                <a:ea typeface="Arial" charset="0"/>
+                <a:cs typeface="Arial" charset="0"/>
               </a:endParaRPr>
             </a:p>
             <a:p>
+              <a:pPr marL="0" indent="0">
+                <a:buFontTx/>
+                <a:buNone/>
+              </a:pPr>
               <a:r>
                 <a:rPr lang="ko-KR" altLang="en-US" sz="800">
                   <a:solidFill>
                     <a:srgbClr val="666666"/>
                   </a:solidFill>
-                  <a:latin typeface="Arial" pitchFamily="34" charset="0"/>
-                  <a:cs typeface="Arial" pitchFamily="34" charset="-120"/>
+                  <a:latin typeface="Arial" charset="0"/>
+                  <a:cs typeface="Arial" charset="0"/>
                 </a:rPr>
                 <a:t> </a:t>
               </a:r>
@@ -4867,8 +5381,8 @@
                   <a:solidFill>
                     <a:srgbClr val="666666"/>
                   </a:solidFill>
-                  <a:latin typeface="Arial" pitchFamily="34" charset="0"/>
-                  <a:cs typeface="Arial" pitchFamily="34" charset="-120"/>
+                  <a:latin typeface="Arial" charset="0"/>
+                  <a:cs typeface="Arial" charset="0"/>
                 </a:rPr>
                 <a:t>-</a:t>
               </a:r>
@@ -4877,37 +5391,87 @@
                   <a:solidFill>
                     <a:srgbClr val="666666"/>
                   </a:solidFill>
-                  <a:latin typeface="Arial" pitchFamily="34" charset="0"/>
-                  <a:cs typeface="Arial" pitchFamily="34" charset="-120"/>
+                  <a:latin typeface="Arial" charset="0"/>
+                  <a:cs typeface="Arial" charset="0"/>
                 </a:rPr>
                 <a:t> 중복으로 처리되는 패턴 </a:t>
               </a:r>
               <a:r>
+                <a:rPr lang="ko-KR" altLang="en-US" sz="800">
+                  <a:solidFill>
+                    <a:srgbClr val="666666"/>
+                  </a:solidFill>
+                  <a:latin typeface="Arial" charset="0"/>
+                  <a:cs typeface="Arial" charset="0"/>
+                </a:rPr>
+                <a:t>5</a:t>
+              </a:r>
+              <a:r>
+                <a:rPr lang="ko-KR" altLang="en-US" sz="800">
+                  <a:solidFill>
+                    <a:srgbClr val="666666"/>
+                  </a:solidFill>
+                  <a:latin typeface="Arial" charset="0"/>
+                  <a:cs typeface="Arial" charset="0"/>
+                </a:rPr>
+                <a:t>0</a:t>
+              </a:r>
+              <a:r>
+                <a:rPr lang="ko-KR" altLang="en-US" sz="800">
+                  <a:solidFill>
+                    <a:srgbClr val="666666"/>
+                  </a:solidFill>
+                  <a:latin typeface="Arial" charset="0"/>
+                  <a:cs typeface="Arial" charset="0"/>
+                </a:rPr>
+                <a:t>건 </a:t>
+              </a:r>
+              <a:r>
+                <a:rPr lang="ko-KR" altLang="en-US" sz="800">
+                  <a:solidFill>
+                    <a:srgbClr val="666666"/>
+                  </a:solidFill>
+                  <a:latin typeface="Arial" charset="0"/>
+                  <a:cs typeface="Arial" charset="0"/>
+                </a:rPr>
+                <a:t>&gt; 1건으</a:t>
+              </a:r>
+              <a:r>
+                <a:rPr lang="ko-KR" altLang="en-US" sz="800">
+                  <a:solidFill>
+                    <a:srgbClr val="666666"/>
+                  </a:solidFill>
+                  <a:latin typeface="Arial" charset="0"/>
+                  <a:cs typeface="Arial" charset="0"/>
+                </a:rPr>
+                <a:t>로</a:t>
+              </a:r>
+              <a:r>
                 <a:rPr lang="en-US" altLang="ko-KR" sz="800">
                   <a:solidFill>
                     <a:srgbClr val="666666"/>
                   </a:solidFill>
-                  <a:latin typeface="Arial" pitchFamily="34" charset="0"/>
-                  <a:cs typeface="Arial" pitchFamily="34" charset="-120"/>
-                </a:rPr>
-                <a:t>n/n </a:t>
+                  <a:latin typeface="Arial" charset="0"/>
+                  <a:cs typeface="Arial" charset="0"/>
+                </a:rPr>
+                <a:t> </a:t>
               </a:r>
               <a:r>
                 <a:rPr lang="ko-KR" altLang="en-US" sz="800">
                   <a:solidFill>
                     <a:srgbClr val="666666"/>
                   </a:solidFill>
-                  <a:latin typeface="Arial" pitchFamily="34" charset="0"/>
-                  <a:cs typeface="Arial" pitchFamily="34" charset="-120"/>
+                  <a:latin typeface="Arial" charset="0"/>
+                  <a:cs typeface="Arial" charset="0"/>
                 </a:rPr>
                 <a:t>처리</a:t>
               </a:r>
-              <a:endParaRPr lang="ko-Kore-KR" altLang="ko-Kore-KR" sz="800">
+              <a:endParaRPr lang="ko-KR" altLang="en-US" sz="800">
                 <a:solidFill>
                   <a:srgbClr val="666666"/>
                 </a:solidFill>
-                <a:latin typeface="Arial" pitchFamily="34" charset="0"/>
-                <a:cs typeface="Arial" pitchFamily="34" charset="-120"/>
+                <a:latin typeface="Arial" charset="0"/>
+                <a:cs typeface="Arial" charset="0"/>
               </a:endParaRPr>
             </a:p>
           </p:txBody>
@@ -4915,536 +5479,944 @@
         <p:sp>
           <p:nvSpPr>
             <p:cNvPr id="23" name="Shape 21"/>
-            <p:cNvSpPr/>
+            <p:cNvSpPr>
+              <a:spLocks/>
+            </p:cNvSpPr>
             <p:nvPr/>
           </p:nvSpPr>
           <p:spPr>
-            <a:xfrm>
-              <a:off x="4773167" y="3090672"/>
-              <a:ext cx="4023360" cy="813816"/>
+            <a:xfrm rot="0">
+              <a:off x="5173980" y="3090545"/>
+              <a:ext cx="3632200" cy="814705"/>
             </a:xfrm>
-            <a:prstGeom prst="rect">
-              <a:avLst/>
-            </a:prstGeom>
+            <a:prstGeom prst="rect"/>
             <a:solidFill>
               <a:srgbClr val="FFFFFF"/>
             </a:solidFill>
-            <a:ln w="12700">
+            <a:ln w="12700" cap="flat" cmpd="sng">
               <a:solidFill>
-                <a:srgbClr val="E5E5E5"/>
+                <a:srgbClr val="E5E5E5">
+                  <a:alpha val="100000"/>
+                </a:srgbClr>
               </a:solidFill>
               <a:prstDash val="solid"/>
             </a:ln>
           </p:spPr>
-        </p:sp>
-        <p:sp>
-          <p:nvSpPr>
-            <p:cNvPr id="24" name="Text 22"/>
-            <p:cNvSpPr/>
-            <p:nvPr/>
-          </p:nvSpPr>
-          <p:spPr>
-            <a:xfrm>
-              <a:off x="4828032" y="3090672"/>
-              <a:ext cx="822960" cy="813816"/>
-            </a:xfrm>
-            <a:prstGeom prst="rect">
-              <a:avLst/>
-            </a:prstGeom>
-            <a:noFill/>
-            <a:ln/>
-          </p:spPr>
           <p:txBody>
-            <a:bodyPr wrap="square" lIns="0" tIns="0" rIns="0" bIns="0" rtlCol="0" anchor="ctr"/>
+            <a:bodyPr wrap="square" lIns="0" tIns="0" rIns="0" bIns="0" vert="horz" anchor="t">
+              <a:noAutofit/>
+            </a:bodyPr>
             <a:lstStyle/>
             <a:p>
-              <a:pPr marL="0" indent="0" algn="ctr">
-                <a:buNone/>
-              </a:pPr>
-              <a:r>
-                <a:rPr lang="en-US" altLang="ko-KR" sz="1800" b="1">
-                  <a:solidFill>
-                    <a:srgbClr val="1A365D"/>
-                  </a:solidFill>
-                  <a:latin typeface="Arial" pitchFamily="34" charset="0"/>
-                  <a:ea typeface="Arial" pitchFamily="34" charset="-122"/>
-                  <a:cs typeface="Arial" pitchFamily="34" charset="-120"/>
-                </a:rPr>
-                <a:t>100</a:t>
-              </a:r>
-              <a:r>
-                <a:rPr lang="en-US" sz="1800" b="1">
-                  <a:solidFill>
-                    <a:srgbClr val="1A365D"/>
-                  </a:solidFill>
-                  <a:latin typeface="Arial" pitchFamily="34" charset="0"/>
-                  <a:ea typeface="Arial" pitchFamily="34" charset="-122"/>
-                  <a:cs typeface="Arial" pitchFamily="34" charset="-120"/>
-                </a:rPr>
-                <a:t>%</a:t>
-              </a:r>
-              <a:endParaRPr lang="en-US" sz="1800" dirty="0"/>
+              <a:pPr marL="0" indent="0"/>
+              <a:endParaRPr lang="ko-KR" altLang="en-US"/>
             </a:p>
           </p:txBody>
         </p:sp>
         <p:sp>
           <p:nvSpPr>
-            <p:cNvPr id="25" name="Shape 23"/>
-            <p:cNvSpPr/>
+            <p:cNvPr id="24" name="Text 22"/>
+            <p:cNvSpPr>
+              <a:spLocks/>
+            </p:cNvSpPr>
             <p:nvPr/>
           </p:nvSpPr>
           <p:spPr>
-            <a:xfrm>
-              <a:off x="5696712" y="3269712"/>
-              <a:ext cx="0" cy="455737"/>
+            <a:xfrm rot="0">
+              <a:off x="5223510" y="3090545"/>
+              <a:ext cx="743585" cy="814705"/>
             </a:xfrm>
-            <a:prstGeom prst="line">
-              <a:avLst/>
-            </a:prstGeom>
+            <a:prstGeom prst="rect"/>
             <a:noFill/>
-            <a:ln w="12700">
+            <a:ln cap="flat" cmpd="sng">
+              <a:prstDash/>
+            </a:ln>
+          </p:spPr>
+          <p:txBody>
+            <a:bodyPr wrap="square" lIns="0" tIns="0" rIns="0" bIns="0" numCol="1" vert="horz" anchor="ctr">
+              <a:noAutofit/>
+            </a:bodyPr>
+            <a:lstStyle/>
+            <a:p>
+              <a:pPr marL="0" indent="0" algn="ctr">
+                <a:buFontTx/>
+                <a:buNone/>
+              </a:pPr>
+              <a:r>
+                <a:rPr lang="en-US" altLang="ko-KR" sz="1800" b="1">
+                  <a:solidFill>
+                    <a:srgbClr val="1A365D"/>
+                  </a:solidFill>
+                  <a:latin typeface="Arial" charset="0"/>
+                  <a:ea typeface="Arial" charset="0"/>
+                  <a:cs typeface="Arial" charset="0"/>
+                </a:rPr>
+                <a:t>100</a:t>
+              </a:r>
+              <a:r>
+                <a:rPr lang="en-US" sz="1800" b="1">
+                  <a:solidFill>
+                    <a:srgbClr val="1A365D"/>
+                  </a:solidFill>
+                  <a:latin typeface="Arial" charset="0"/>
+                  <a:ea typeface="Arial" charset="0"/>
+                  <a:cs typeface="Arial" charset="0"/>
+                </a:rPr>
+                <a:t>%</a:t>
+              </a:r>
+              <a:endParaRPr lang="ko-KR" altLang="en-US" sz="1800" b="1">
+                <a:solidFill>
+                  <a:srgbClr val="1A365D"/>
+                </a:solidFill>
+                <a:latin typeface="Arial" charset="0"/>
+                <a:ea typeface="Arial" charset="0"/>
+                <a:cs typeface="Arial" charset="0"/>
+              </a:endParaRPr>
+            </a:p>
+          </p:txBody>
+        </p:sp>
+        <p:cxnSp>
+          <p:nvCxnSpPr>
+            <p:cNvPr id="25" name="Shape 23"/>
+            <p:cNvCxnSpPr/>
+            <p:nvPr/>
+          </p:nvCxnSpPr>
+          <p:spPr>
+            <a:xfrm rot="0">
+              <a:off x="6007100" y="3269615"/>
+              <a:ext cx="635" cy="456565"/>
+            </a:xfrm>
+            <a:prstGeom prst="line"/>
+            <a:noFill/>
+            <a:ln w="12700" cap="flat" cmpd="sng">
               <a:solidFill>
-                <a:srgbClr val="E5E5E5"/>
+                <a:srgbClr val="E5E5E5">
+                  <a:alpha val="100000"/>
+                </a:srgbClr>
               </a:solidFill>
               <a:prstDash val="solid"/>
             </a:ln>
           </p:spPr>
-        </p:sp>
+          <p:style>
+            <a:lnRef idx="1">
+              <a:schemeClr val="accent1"/>
+            </a:lnRef>
+            <a:fillRef idx="0">
+              <a:schemeClr val="accent1"/>
+            </a:fillRef>
+            <a:effectRef idx="0">
+              <a:schemeClr val="accent1"/>
+            </a:effectRef>
+            <a:fontRef idx="minor">
+              <a:schemeClr val="tx1"/>
+            </a:fontRef>
+          </p:style>
+        </p:cxnSp>
         <p:sp>
           <p:nvSpPr>
             <p:cNvPr id="26" name="Text 24"/>
-            <p:cNvSpPr/>
+            <p:cNvSpPr>
+              <a:spLocks/>
+            </p:cNvSpPr>
             <p:nvPr/>
           </p:nvSpPr>
           <p:spPr>
-            <a:xfrm>
-              <a:off x="5797296" y="3145536"/>
-              <a:ext cx="2907792" cy="704088"/>
+            <a:xfrm rot="0">
+              <a:off x="6097905" y="3145790"/>
+              <a:ext cx="2625090" cy="704850"/>
             </a:xfrm>
-            <a:prstGeom prst="rect">
-              <a:avLst/>
-            </a:prstGeom>
+            <a:prstGeom prst="rect"/>
             <a:noFill/>
-            <a:ln/>
+            <a:ln cap="flat" cmpd="sng">
+              <a:prstDash/>
+            </a:ln>
           </p:spPr>
           <p:txBody>
-            <a:bodyPr wrap="square" lIns="0" tIns="0" rIns="0" bIns="0" rtlCol="0" anchor="ctr"/>
+            <a:bodyPr wrap="square" lIns="0" tIns="0" rIns="0" bIns="0" numCol="1" vert="horz" anchor="ctr">
+              <a:noAutofit/>
+            </a:bodyPr>
             <a:lstStyle/>
             <a:p>
-              <a:r>
-                <a:rPr lang="en-US" sz="850" b="1" dirty="0">
+              <a:pPr marL="0" indent="0">
+                <a:buFontTx/>
+                <a:buNone/>
+              </a:pPr>
+              <a:r>
+                <a:rPr lang="en-US" sz="850" b="1">
                   <a:solidFill>
                     <a:srgbClr val="1A365D"/>
                   </a:solidFill>
-                  <a:latin typeface="Arial" pitchFamily="34" charset="0"/>
-                  <a:ea typeface="Arial" pitchFamily="34" charset="-122"/>
-                  <a:cs typeface="Arial" pitchFamily="34" charset="-120"/>
-                </a:rPr>
-                <a:t>성과 </a:t>
-              </a:r>
-              <a:r>
-                <a:rPr lang="en-US" sz="850" b="1">
+                  <a:latin typeface="Arial" charset="0"/>
+                  <a:ea typeface="Arial" charset="0"/>
+                  <a:cs typeface="Arial" charset="0"/>
+                </a:rPr>
+                <a:t>성과 지표 2</a:t>
+              </a:r>
+              <a:r>
+                <a:rPr lang="ko-KR" altLang="en-US" sz="850" b="1">
                   <a:solidFill>
                     <a:srgbClr val="1A365D"/>
                   </a:solidFill>
-                  <a:latin typeface="Arial" pitchFamily="34" charset="0"/>
-                  <a:ea typeface="Arial" pitchFamily="34" charset="-122"/>
-                  <a:cs typeface="Arial" pitchFamily="34" charset="-120"/>
-                </a:rPr>
-                <a:t>지표 2</a:t>
-              </a:r>
-              <a:r>
-                <a:rPr lang="ko-KR" altLang="en-US" sz="850" b="1">
+                  <a:latin typeface="Arial" charset="0"/>
+                  <a:ea typeface="Arial" charset="0"/>
+                  <a:cs typeface="Arial" charset="0"/>
+                </a:rPr>
+                <a:t> </a:t>
+              </a:r>
+              <a:r>
+                <a:rPr lang="en-US" altLang="ko-KR" sz="850" b="1">
                   <a:solidFill>
                     <a:srgbClr val="1A365D"/>
                   </a:solidFill>
-                  <a:latin typeface="Arial" pitchFamily="34" charset="0"/>
-                  <a:ea typeface="Arial" pitchFamily="34" charset="-122"/>
-                  <a:cs typeface="Arial" pitchFamily="34" charset="-120"/>
+                  <a:latin typeface="Arial" charset="0"/>
+                  <a:ea typeface="Arial" charset="0"/>
+                  <a:cs typeface="Arial" charset="0"/>
+                </a:rPr>
+                <a:t>-</a:t>
+              </a:r>
+              <a:r>
+                <a:rPr lang="ko-KR" altLang="ko-KR" sz="850" b="1">
+                  <a:solidFill>
+                    <a:srgbClr val="1A365D"/>
+                  </a:solidFill>
+                  <a:latin typeface="Arial" charset="0"/>
+                  <a:ea typeface="Arial" charset="0"/>
+                  <a:cs typeface="Arial" charset="0"/>
                 </a:rPr>
                 <a:t> </a:t>
               </a:r>
               <a:r>
-                <a:rPr lang="en-US" altLang="ko-KR" sz="850" b="1">
+                <a:rPr lang="ko-KR" altLang="ko-KR" sz="850" b="1">
                   <a:solidFill>
                     <a:srgbClr val="1A365D"/>
                   </a:solidFill>
-                  <a:latin typeface="Arial" pitchFamily="34" charset="0"/>
-                  <a:ea typeface="Arial" pitchFamily="34" charset="-122"/>
-                  <a:cs typeface="Arial" pitchFamily="34" charset="-120"/>
-                </a:rPr>
-                <a:t>-</a:t>
-              </a:r>
-              <a:r>
-                <a:rPr lang="ko-KR" altLang="en-US" sz="850" b="1">
+                  <a:latin typeface="Arial" charset="0"/>
+                  <a:ea typeface="Arial" charset="0"/>
+                  <a:cs typeface="Arial" charset="0"/>
+                </a:rPr>
+                <a:t>규</a:t>
+              </a:r>
+              <a:r>
+                <a:rPr lang="ko-KR" altLang="ko-KR" sz="850" b="1">
                   <a:solidFill>
                     <a:srgbClr val="1A365D"/>
                   </a:solidFill>
-                  <a:latin typeface="Arial" pitchFamily="34" charset="0"/>
-                  <a:ea typeface="Arial" pitchFamily="34" charset="-122"/>
-                  <a:cs typeface="Arial" pitchFamily="34" charset="-120"/>
+                  <a:latin typeface="Arial" charset="0"/>
+                  <a:ea typeface="Arial" charset="0"/>
+                  <a:cs typeface="Arial" charset="0"/>
+                </a:rPr>
+                <a:t>칙 </a:t>
+              </a:r>
+              <a:r>
+                <a:rPr lang="ko-KR" altLang="ko-KR" sz="850" b="1">
+                  <a:solidFill>
+                    <a:srgbClr val="1A365D"/>
+                  </a:solidFill>
+                  <a:latin typeface="Arial" charset="0"/>
+                  <a:ea typeface="Arial" charset="0"/>
+                  <a:cs typeface="Arial" charset="0"/>
+                </a:rPr>
+                <a:t>재사용</a:t>
+              </a:r>
+              <a:r>
+                <a:rPr lang="ko-KR" altLang="ko-KR" sz="850" b="1">
+                  <a:solidFill>
+                    <a:srgbClr val="1A365D"/>
+                  </a:solidFill>
+                  <a:latin typeface="Arial" charset="0"/>
+                  <a:ea typeface="Arial" charset="0"/>
+                  <a:cs typeface="Arial" charset="0"/>
+                </a:rPr>
+                <a:t>률</a:t>
+              </a:r>
+              <a:r>
+                <a:rPr lang="ko-KR" altLang="ko-KR" sz="800">
+                  <a:solidFill>
+                    <a:srgbClr val="666666"/>
+                  </a:solidFill>
+                  <a:latin typeface="Arial" charset="0"/>
+                  <a:cs typeface="Arial" charset="0"/>
                 </a:rPr>
                 <a:t> </a:t>
               </a:r>
-              <a:r>
-                <a:rPr lang="ko-Kore-KR" altLang="ko-Kore-KR" sz="800">
-                  <a:solidFill>
-                    <a:srgbClr val="666666"/>
-                  </a:solidFill>
-                  <a:latin typeface="Arial" pitchFamily="34" charset="0"/>
-                  <a:cs typeface="Arial" pitchFamily="34" charset="-120"/>
-                </a:rPr>
-                <a:t>규칙 재사용 </a:t>
-              </a:r>
-              <a:endParaRPr lang="ko-Kore-KR" altLang="en-US" sz="800">
+              <a:endParaRPr lang="ko-KR" altLang="en-US" sz="800">
                 <a:solidFill>
                   <a:srgbClr val="666666"/>
                 </a:solidFill>
-                <a:latin typeface="Arial" pitchFamily="34" charset="0"/>
-                <a:cs typeface="Arial" pitchFamily="34" charset="-120"/>
+                <a:latin typeface="Arial" charset="0"/>
+                <a:cs typeface="Arial" charset="0"/>
               </a:endParaRPr>
             </a:p>
             <a:p>
-              <a:r>
-                <a:rPr lang="en-US" altLang="ko-Kore-KR" sz="750">
+              <a:pPr marL="0" indent="0">
+                <a:buFontTx/>
+                <a:buNone/>
+              </a:pPr>
+              <a:r>
+                <a:rPr lang="ko-KR" altLang="ko-KR" sz="750">
                   <a:solidFill>
                     <a:srgbClr val="666666"/>
                   </a:solidFill>
-                  <a:latin typeface="Arial" pitchFamily="34" charset="0"/>
-                  <a:cs typeface="Arial" pitchFamily="34" charset="-120"/>
+                  <a:latin typeface="Arial" charset="0"/>
+                  <a:cs typeface="Arial" charset="0"/>
+                </a:rPr>
+                <a:t>-</a:t>
+              </a:r>
+              <a:r>
+                <a:rPr lang="ko-KR" altLang="ko-KR" sz="750">
+                  <a:solidFill>
+                    <a:srgbClr val="666666"/>
+                  </a:solidFill>
+                  <a:latin typeface="Arial" charset="0"/>
+                  <a:cs typeface="Arial" charset="0"/>
+                </a:rPr>
+                <a:t> </a:t>
+              </a:r>
+              <a:r>
+                <a:rPr lang="en-US" altLang="ko-KR" sz="750">
+                  <a:solidFill>
+                    <a:srgbClr val="666666"/>
+                  </a:solidFill>
+                  <a:latin typeface="Arial" charset="0"/>
+                  <a:cs typeface="Arial" charset="0"/>
                 </a:rPr>
                 <a:t>Known Pattern </a:t>
               </a:r>
               <a:r>
-                <a:rPr lang="ko-Kore-KR" altLang="ko-Kore-KR" sz="750">
+                <a:rPr lang="ko-KR" altLang="ko-KR" sz="750">
                   <a:solidFill>
                     <a:srgbClr val="666666"/>
                   </a:solidFill>
-                  <a:latin typeface="Arial" pitchFamily="34" charset="0"/>
-                  <a:cs typeface="Arial" pitchFamily="34" charset="-120"/>
+                  <a:latin typeface="Arial" charset="0"/>
+                  <a:cs typeface="Arial" charset="0"/>
                 </a:rPr>
                 <a:t>변형 </a:t>
               </a:r>
               <a:r>
-                <a:rPr lang="en-US" altLang="ko-Kore-KR" sz="750">
+                <a:rPr lang="en-US" altLang="ko-KR" sz="750">
                   <a:solidFill>
                     <a:srgbClr val="666666"/>
                   </a:solidFill>
-                  <a:latin typeface="Arial" pitchFamily="34" charset="0"/>
-                  <a:cs typeface="Arial" pitchFamily="34" charset="-120"/>
-                </a:rPr>
-                <a:t>5</a:t>
+                  <a:latin typeface="Arial" charset="0"/>
+                  <a:cs typeface="Arial" charset="0"/>
+                </a:rPr>
+                <a:t>50</a:t>
+              </a:r>
+              <a:r>
+                <a:rPr lang="ko-KR" altLang="ko-KR" sz="750">
+                  <a:solidFill>
+                    <a:srgbClr val="666666"/>
+                  </a:solidFill>
+                  <a:latin typeface="Arial" charset="0"/>
+                  <a:cs typeface="Arial" charset="0"/>
+                </a:rPr>
+                <a:t>건을 </a:t>
               </a:r>
               <a:r>
                 <a:rPr lang="en-US" altLang="ko-KR" sz="750">
                   <a:solidFill>
                     <a:srgbClr val="666666"/>
                   </a:solidFill>
-                  <a:latin typeface="Arial" pitchFamily="34" charset="0"/>
-                  <a:cs typeface="Arial" pitchFamily="34" charset="-120"/>
-                </a:rPr>
-                <a:t>0</a:t>
-              </a:r>
-              <a:r>
-                <a:rPr lang="ko-Kore-KR" altLang="ko-Kore-KR" sz="750">
+                  <a:latin typeface="Arial" charset="0"/>
+                  <a:cs typeface="Arial" charset="0"/>
+                </a:rPr>
+                <a:t>50</a:t>
+              </a:r>
+              <a:r>
+                <a:rPr lang="ko-KR" altLang="ko-KR" sz="750">
                   <a:solidFill>
                     <a:srgbClr val="666666"/>
                   </a:solidFill>
-                  <a:latin typeface="Arial" pitchFamily="34" charset="0"/>
-                  <a:cs typeface="Arial" pitchFamily="34" charset="-120"/>
-                </a:rPr>
-                <a:t>건을 </a:t>
-              </a:r>
-              <a:r>
-                <a:rPr lang="en-US" altLang="ko-Kore-KR" sz="750">
+                  <a:latin typeface="Arial" charset="0"/>
+                  <a:cs typeface="Arial" charset="0"/>
+                </a:rPr>
+                <a:t>/</a:t>
+              </a:r>
+              <a:r>
+                <a:rPr lang="en-US" altLang="ko-KR" sz="750">
                   <a:solidFill>
                     <a:srgbClr val="666666"/>
                   </a:solidFill>
-                  <a:latin typeface="Arial" pitchFamily="34" charset="0"/>
-                  <a:cs typeface="Arial" pitchFamily="34" charset="-120"/>
-                </a:rPr>
-                <a:t>5</a:t>
-              </a:r>
-              <a:r>
-                <a:rPr lang="en-US" altLang="ko-KR" sz="750">
+                  <a:latin typeface="Arial" charset="0"/>
+                  <a:cs typeface="Arial" charset="0"/>
+                </a:rPr>
+                <a:t>50</a:t>
+              </a:r>
+              <a:r>
+                <a:rPr lang="ko-KR" altLang="ko-KR" sz="750">
                   <a:solidFill>
                     <a:srgbClr val="666666"/>
                   </a:solidFill>
-                  <a:latin typeface="Arial" pitchFamily="34" charset="0"/>
-                  <a:cs typeface="Arial" pitchFamily="34" charset="-120"/>
-                </a:rPr>
-                <a:t>0</a:t>
-              </a:r>
-              <a:r>
-                <a:rPr lang="ko-Kore-KR" altLang="ko-Kore-KR" sz="750">
-                  <a:solidFill>
-                    <a:srgbClr val="666666"/>
-                  </a:solidFill>
-                  <a:latin typeface="Arial" pitchFamily="34" charset="0"/>
-                  <a:cs typeface="Arial" pitchFamily="34" charset="-120"/>
-                </a:rPr>
-                <a:t>/</a:t>
-              </a:r>
-              <a:r>
-                <a:rPr lang="en-US" altLang="ko-Kore-KR" sz="750">
-                  <a:solidFill>
-                    <a:srgbClr val="666666"/>
-                  </a:solidFill>
-                  <a:latin typeface="Arial" pitchFamily="34" charset="0"/>
-                  <a:cs typeface="Arial" pitchFamily="34" charset="-120"/>
-                </a:rPr>
-                <a:t>5</a:t>
-              </a:r>
-              <a:r>
-                <a:rPr lang="en-US" altLang="ko-KR" sz="750">
-                  <a:solidFill>
-                    <a:srgbClr val="666666"/>
-                  </a:solidFill>
-                  <a:latin typeface="Arial" pitchFamily="34" charset="0"/>
-                  <a:cs typeface="Arial" pitchFamily="34" charset="-120"/>
-                </a:rPr>
-                <a:t>0</a:t>
-              </a:r>
-              <a:r>
-                <a:rPr lang="ko-Kore-KR" altLang="ko-Kore-KR" sz="750">
-                  <a:solidFill>
-                    <a:srgbClr val="666666"/>
-                  </a:solidFill>
-                  <a:latin typeface="Arial" pitchFamily="34" charset="0"/>
-                  <a:cs typeface="Arial" pitchFamily="34" charset="-120"/>
+                  <a:latin typeface="Arial" charset="0"/>
+                  <a:cs typeface="Arial" charset="0"/>
                 </a:rPr>
                 <a:t>(100%) Known Pattern으로 흡수</a:t>
               </a:r>
+              <a:endParaRPr lang="ko-KR" altLang="en-US" sz="750">
+                <a:solidFill>
+                  <a:srgbClr val="666666"/>
+                </a:solidFill>
+                <a:latin typeface="Arial" charset="0"/>
+                <a:cs typeface="Arial" charset="0"/>
+              </a:endParaRPr>
             </a:p>
           </p:txBody>
         </p:sp>
         <p:sp>
           <p:nvSpPr>
             <p:cNvPr id="27" name="Shape 25"/>
-            <p:cNvSpPr/>
+            <p:cNvSpPr>
+              <a:spLocks/>
+            </p:cNvSpPr>
             <p:nvPr/>
           </p:nvSpPr>
           <p:spPr>
-            <a:xfrm>
-              <a:off x="4773168" y="3986784"/>
-              <a:ext cx="4023360" cy="813816"/>
+            <a:xfrm rot="0">
+              <a:off x="5156835" y="3943350"/>
+              <a:ext cx="3632200" cy="814705"/>
             </a:xfrm>
-            <a:prstGeom prst="rect">
-              <a:avLst/>
-            </a:prstGeom>
+            <a:prstGeom prst="rect"/>
             <a:solidFill>
               <a:srgbClr val="FFFFFF"/>
             </a:solidFill>
-            <a:ln w="12700">
+            <a:ln w="12700" cap="flat" cmpd="sng">
               <a:solidFill>
-                <a:srgbClr val="E5E5E5"/>
+                <a:srgbClr val="E5E5E5">
+                  <a:alpha val="100000"/>
+                </a:srgbClr>
               </a:solidFill>
               <a:prstDash val="solid"/>
             </a:ln>
           </p:spPr>
-        </p:sp>
-        <p:sp>
-          <p:nvSpPr>
-            <p:cNvPr id="28" name="Text 26"/>
-            <p:cNvSpPr/>
-            <p:nvPr/>
-          </p:nvSpPr>
-          <p:spPr>
-            <a:xfrm>
-              <a:off x="4828032" y="3986784"/>
-              <a:ext cx="822960" cy="813816"/>
-            </a:xfrm>
-            <a:prstGeom prst="rect">
-              <a:avLst/>
-            </a:prstGeom>
-            <a:noFill/>
-            <a:ln/>
-          </p:spPr>
           <p:txBody>
-            <a:bodyPr wrap="square" lIns="0" tIns="0" rIns="0" bIns="0" rtlCol="0" anchor="ctr"/>
+            <a:bodyPr wrap="square" lIns="0" tIns="0" rIns="0" bIns="0" vert="horz" anchor="t">
+              <a:noAutofit/>
+            </a:bodyPr>
             <a:lstStyle/>
             <a:p>
-              <a:pPr marL="0" indent="0" algn="ctr">
-                <a:buNone/>
-              </a:pPr>
-              <a:r>
-                <a:rPr lang="en-US" altLang="ko-KR" b="1">
-                  <a:solidFill>
-                    <a:srgbClr val="1A365D"/>
-                  </a:solidFill>
-                  <a:latin typeface="Arial" pitchFamily="34" charset="0"/>
-                  <a:ea typeface="Arial" pitchFamily="34" charset="-122"/>
-                  <a:cs typeface="Arial" pitchFamily="34" charset="-120"/>
-                </a:rPr>
-                <a:t>-</a:t>
-              </a:r>
-              <a:r>
-                <a:rPr lang="en-US" sz="1800" b="1">
-                  <a:solidFill>
-                    <a:srgbClr val="1A365D"/>
-                  </a:solidFill>
-                  <a:latin typeface="Arial" pitchFamily="34" charset="0"/>
-                  <a:ea typeface="Arial" pitchFamily="34" charset="-122"/>
-                  <a:cs typeface="Arial" pitchFamily="34" charset="-120"/>
-                </a:rPr>
-                <a:t>배</a:t>
-              </a:r>
-              <a:endParaRPr lang="en-US" sz="1800" dirty="0"/>
+              <a:pPr marL="0" indent="0"/>
+              <a:endParaRPr lang="ko-KR" altLang="en-US"/>
             </a:p>
           </p:txBody>
         </p:sp>
         <p:sp>
           <p:nvSpPr>
-            <p:cNvPr id="29" name="Shape 27"/>
-            <p:cNvSpPr/>
+            <p:cNvPr id="28" name="Text 26"/>
+            <p:cNvSpPr>
+              <a:spLocks/>
+            </p:cNvSpPr>
             <p:nvPr/>
           </p:nvSpPr>
           <p:spPr>
-            <a:xfrm>
-              <a:off x="5696712" y="4165824"/>
-              <a:ext cx="0" cy="455737"/>
+            <a:xfrm rot="0">
+              <a:off x="5223510" y="3986530"/>
+              <a:ext cx="743585" cy="814705"/>
             </a:xfrm>
-            <a:prstGeom prst="line">
-              <a:avLst/>
-            </a:prstGeom>
+            <a:prstGeom prst="rect"/>
             <a:noFill/>
-            <a:ln w="12700">
+            <a:ln cap="flat" cmpd="sng">
+              <a:prstDash/>
+            </a:ln>
+          </p:spPr>
+          <p:txBody>
+            <a:bodyPr wrap="square" lIns="0" tIns="0" rIns="0" bIns="0" numCol="1" vert="horz" anchor="ctr">
+              <a:noAutofit/>
+            </a:bodyPr>
+            <a:lstStyle/>
+            <a:p>
+              <a:pPr marL="0" indent="0" algn="ctr">
+                <a:buFontTx/>
+                <a:buNone/>
+              </a:pPr>
+              <a:r>
+                <a:rPr lang="ko-KR" sz="1800" b="1">
+                  <a:solidFill>
+                    <a:srgbClr val="1A365D"/>
+                  </a:solidFill>
+                  <a:latin typeface="Arial" charset="0"/>
+                  <a:ea typeface="Arial" charset="0"/>
+                  <a:cs typeface="Arial" charset="0"/>
+                </a:rPr>
+                <a:t>4</a:t>
+              </a:r>
+              <a:r>
+                <a:rPr lang="en-US" sz="1800" b="1">
+                  <a:solidFill>
+                    <a:srgbClr val="1A365D"/>
+                  </a:solidFill>
+                  <a:latin typeface="Arial" charset="0"/>
+                  <a:ea typeface="Arial" charset="0"/>
+                  <a:cs typeface="Arial" charset="0"/>
+                </a:rPr>
+                <a:t>배</a:t>
+              </a:r>
+              <a:endParaRPr lang="ko-KR" altLang="en-US" sz="1800" b="1">
+                <a:solidFill>
+                  <a:srgbClr val="1A365D"/>
+                </a:solidFill>
+                <a:latin typeface="Arial" charset="0"/>
+                <a:ea typeface="Arial" charset="0"/>
+                <a:cs typeface="Arial" charset="0"/>
+              </a:endParaRPr>
+            </a:p>
+          </p:txBody>
+        </p:sp>
+        <p:cxnSp>
+          <p:nvCxnSpPr>
+            <p:cNvPr id="29" name="Shape 27"/>
+            <p:cNvCxnSpPr/>
+            <p:nvPr/>
+          </p:nvCxnSpPr>
+          <p:spPr>
+            <a:xfrm rot="0">
+              <a:off x="6007100" y="4165600"/>
+              <a:ext cx="635" cy="456565"/>
+            </a:xfrm>
+            <a:prstGeom prst="line"/>
+            <a:noFill/>
+            <a:ln w="12700" cap="flat" cmpd="sng">
               <a:solidFill>
-                <a:srgbClr val="E5E5E5"/>
+                <a:srgbClr val="E5E5E5">
+                  <a:alpha val="100000"/>
+                </a:srgbClr>
               </a:solidFill>
               <a:prstDash val="solid"/>
             </a:ln>
           </p:spPr>
-        </p:sp>
+          <p:style>
+            <a:lnRef idx="1">
+              <a:schemeClr val="accent1"/>
+            </a:lnRef>
+            <a:fillRef idx="0">
+              <a:schemeClr val="accent1"/>
+            </a:fillRef>
+            <a:effectRef idx="0">
+              <a:schemeClr val="accent1"/>
+            </a:effectRef>
+            <a:fontRef idx="minor">
+              <a:schemeClr val="tx1"/>
+            </a:fontRef>
+          </p:style>
+        </p:cxnSp>
         <p:sp>
           <p:nvSpPr>
             <p:cNvPr id="30" name="Text 28"/>
-            <p:cNvSpPr/>
+            <p:cNvSpPr>
+              <a:spLocks/>
+            </p:cNvSpPr>
             <p:nvPr/>
           </p:nvSpPr>
           <p:spPr>
-            <a:xfrm>
-              <a:off x="5797296" y="4041648"/>
-              <a:ext cx="2907792" cy="704088"/>
+            <a:xfrm rot="0">
+              <a:off x="6097905" y="4050665"/>
+              <a:ext cx="2625090" cy="704850"/>
             </a:xfrm>
-            <a:prstGeom prst="rect">
-              <a:avLst/>
-            </a:prstGeom>
+            <a:prstGeom prst="rect"/>
             <a:noFill/>
-            <a:ln/>
+            <a:ln cap="flat" cmpd="sng">
+              <a:prstDash/>
+            </a:ln>
           </p:spPr>
           <p:txBody>
-            <a:bodyPr wrap="square" lIns="0" tIns="0" rIns="0" bIns="0" rtlCol="0" anchor="ctr"/>
+            <a:bodyPr wrap="square" lIns="0" tIns="0" rIns="0" bIns="0" numCol="1" vert="horz" anchor="ctr">
+              <a:noAutofit/>
+            </a:bodyPr>
             <a:lstStyle/>
             <a:p>
-              <a:r>
-                <a:rPr lang="en-US" sz="850" b="1" dirty="0">
+              <a:pPr marL="0" indent="0">
+                <a:buFontTx/>
+                <a:buNone/>
+              </a:pPr>
+              <a:r>
+                <a:rPr lang="en-US" sz="850" b="1">
                   <a:solidFill>
                     <a:srgbClr val="1A365D"/>
                   </a:solidFill>
-                  <a:latin typeface="Arial" pitchFamily="34" charset="0"/>
-                  <a:ea typeface="Arial" pitchFamily="34" charset="-122"/>
-                  <a:cs typeface="Arial" pitchFamily="34" charset="-120"/>
-                </a:rPr>
-                <a:t>성과 </a:t>
-              </a:r>
-              <a:r>
-                <a:rPr lang="en-US" sz="850" b="1">
+                  <a:latin typeface="Arial" charset="0"/>
+                  <a:ea typeface="Arial" charset="0"/>
+                  <a:cs typeface="Arial" charset="0"/>
+                </a:rPr>
+                <a:t>성과 지표 3</a:t>
+              </a:r>
+              <a:r>
+                <a:rPr lang="ko-KR" altLang="en-US" sz="850" b="1">
                   <a:solidFill>
                     <a:srgbClr val="1A365D"/>
                   </a:solidFill>
-                  <a:latin typeface="Arial" pitchFamily="34" charset="0"/>
-                  <a:ea typeface="Arial" pitchFamily="34" charset="-122"/>
-                  <a:cs typeface="Arial" pitchFamily="34" charset="-120"/>
-                </a:rPr>
-                <a:t>지표 3</a:t>
+                  <a:latin typeface="Arial" charset="0"/>
+                  <a:ea typeface="Arial" charset="0"/>
+                  <a:cs typeface="Arial" charset="0"/>
+                </a:rPr>
+                <a:t> </a:t>
+              </a:r>
+              <a:r>
+                <a:rPr lang="en-US" altLang="ko-KR" sz="850" b="1">
+                  <a:solidFill>
+                    <a:srgbClr val="1A365D"/>
+                  </a:solidFill>
+                  <a:latin typeface="Arial" charset="0"/>
+                  <a:ea typeface="Arial" charset="0"/>
+                  <a:cs typeface="Arial" charset="0"/>
+                </a:rPr>
+                <a:t>-</a:t>
               </a:r>
               <a:r>
                 <a:rPr lang="ko-KR" altLang="en-US" sz="850" b="1">
                   <a:solidFill>
                     <a:srgbClr val="1A365D"/>
                   </a:solidFill>
-                  <a:latin typeface="Arial" pitchFamily="34" charset="0"/>
-                  <a:ea typeface="Arial" pitchFamily="34" charset="-122"/>
-                  <a:cs typeface="Arial" pitchFamily="34" charset="-120"/>
+                  <a:latin typeface="Arial" charset="0"/>
+                  <a:ea typeface="Arial" charset="0"/>
+                  <a:cs typeface="Arial" charset="0"/>
                 </a:rPr>
                 <a:t> </a:t>
               </a:r>
               <a:r>
-                <a:rPr lang="en-US" altLang="ko-KR" sz="850" b="1">
+                <a:rPr lang="ko-KR" altLang="en-US" sz="850" b="1">
                   <a:solidFill>
                     <a:srgbClr val="1A365D"/>
                   </a:solidFill>
-                  <a:latin typeface="Arial" pitchFamily="34" charset="0"/>
-                  <a:ea typeface="Arial" pitchFamily="34" charset="-122"/>
-                  <a:cs typeface="Arial" pitchFamily="34" charset="-120"/>
-                </a:rPr>
-                <a:t>-</a:t>
+                  <a:latin typeface="Arial" charset="0"/>
+                  <a:ea typeface="Arial" charset="0"/>
+                  <a:cs typeface="Arial" charset="0"/>
+                </a:rPr>
+                <a:t>분석 </a:t>
               </a:r>
               <a:r>
                 <a:rPr lang="ko-KR" altLang="en-US" sz="850" b="1">
                   <a:solidFill>
                     <a:srgbClr val="1A365D"/>
                   </a:solidFill>
-                  <a:latin typeface="Arial" pitchFamily="34" charset="0"/>
-                  <a:ea typeface="Arial" pitchFamily="34" charset="-122"/>
-                  <a:cs typeface="Arial" pitchFamily="34" charset="-120"/>
+                  <a:latin typeface="Arial" charset="0"/>
+                  <a:ea typeface="Arial" charset="0"/>
+                  <a:cs typeface="Arial" charset="0"/>
+                </a:rPr>
+                <a:t>권</a:t>
+              </a:r>
+              <a:r>
+                <a:rPr lang="ko-KR" altLang="en-US" sz="850" b="1">
+                  <a:solidFill>
+                    <a:srgbClr val="1A365D"/>
+                  </a:solidFill>
+                  <a:latin typeface="Arial" charset="0"/>
+                  <a:ea typeface="Arial" charset="0"/>
+                  <a:cs typeface="Arial" charset="0"/>
+                </a:rPr>
+                <a:t>고 </a:t>
+              </a:r>
+              <a:r>
+                <a:rPr lang="ko-KR" altLang="en-US" sz="850" b="1">
+                  <a:solidFill>
+                    <a:srgbClr val="1A365D"/>
+                  </a:solidFill>
+                  <a:latin typeface="Arial" charset="0"/>
+                  <a:ea typeface="Arial" charset="0"/>
+                  <a:cs typeface="Arial" charset="0"/>
+                </a:rPr>
+                <a:t>품</a:t>
+              </a:r>
+              <a:r>
+                <a:rPr lang="ko-KR" altLang="en-US" sz="850" b="1">
+                  <a:solidFill>
+                    <a:srgbClr val="1A365D"/>
+                  </a:solidFill>
+                  <a:latin typeface="Arial" charset="0"/>
+                  <a:ea typeface="Arial" charset="0"/>
+                  <a:cs typeface="Arial" charset="0"/>
+                </a:rPr>
+                <a:t>질 </a:t>
+              </a:r>
+              <a:r>
+                <a:rPr lang="ko-KR" altLang="en-US" sz="850" b="1">
+                  <a:solidFill>
+                    <a:srgbClr val="1A365D"/>
+                  </a:solidFill>
+                  <a:latin typeface="Arial" charset="0"/>
+                  <a:ea typeface="Arial" charset="0"/>
+                  <a:cs typeface="Arial" charset="0"/>
+                </a:rPr>
+                <a:t>개</a:t>
+              </a:r>
+              <a:r>
+                <a:rPr lang="ko-KR" altLang="en-US" sz="850" b="1">
+                  <a:solidFill>
+                    <a:srgbClr val="1A365D"/>
+                  </a:solidFill>
+                  <a:latin typeface="Arial" charset="0"/>
+                  <a:ea typeface="Arial" charset="0"/>
+                  <a:cs typeface="Arial" charset="0"/>
+                </a:rPr>
+                <a:t>선</a:t>
+              </a:r>
+              <a:r>
+                <a:rPr lang="ko-KR" altLang="ko-KR" sz="750">
+                  <a:solidFill>
+                    <a:srgbClr val="666666"/>
+                  </a:solidFill>
+                  <a:latin typeface="Arial" charset="0"/>
+                  <a:cs typeface="Arial" charset="0"/>
                 </a:rPr>
                 <a:t> </a:t>
               </a:r>
-              <a:r>
-                <a:rPr lang="ko-Kore-KR" altLang="ko-Kore-KR" sz="800">
-                  <a:solidFill>
-                    <a:srgbClr val="666666"/>
-                  </a:solidFill>
-                  <a:latin typeface="Arial" pitchFamily="34" charset="0"/>
-                  <a:cs typeface="Arial" pitchFamily="34" charset="-120"/>
-                </a:rPr>
-                <a:t>증분 분석 </a:t>
-              </a:r>
-              <a:endParaRPr lang="en-US" sz="850" dirty="0"/>
+              <a:endParaRPr lang="ko-KR" altLang="en-US" sz="750">
+                <a:solidFill>
+                  <a:srgbClr val="666666"/>
+                </a:solidFill>
+                <a:latin typeface="Arial" charset="0"/>
+                <a:ea typeface="맑은 고딕" charset="0"/>
+                <a:cs typeface="Arial" charset="0"/>
+              </a:endParaRPr>
             </a:p>
             <a:p>
-              <a:r>
-                <a:rPr lang="ko-Kore-KR" altLang="ko-Kore-KR" sz="750">
+              <a:pPr marL="0" indent="0">
+                <a:buFontTx/>
+                <a:buNone/>
+              </a:pPr>
+              <a:r>
+                <a:rPr lang="ko-KR" altLang="ko-KR" sz="750">
                   <a:solidFill>
                     <a:srgbClr val="666666"/>
                   </a:solidFill>
-                  <a:latin typeface="Arial" pitchFamily="34" charset="0"/>
-                  <a:cs typeface="Arial" pitchFamily="34" charset="-120"/>
-                </a:rPr>
-                <a:t>재실행 시 신규 처리 </a:t>
-              </a:r>
-              <a:r>
-                <a:rPr lang="en-US" altLang="ko-Kore-KR" sz="750">
+                  <a:latin typeface="Arial" charset="0"/>
+                  <a:ea typeface="맑은 고딕" charset="0"/>
+                  <a:cs typeface="Arial" charset="0"/>
+                </a:rPr>
+                <a:t>- </a:t>
+              </a:r>
+              <a:r>
+                <a:rPr lang="en-US" altLang="ko-KR" sz="750">
                   <a:solidFill>
                     <a:srgbClr val="666666"/>
                   </a:solidFill>
-                  <a:latin typeface="Arial" pitchFamily="34" charset="0"/>
-                  <a:cs typeface="Arial" pitchFamily="34" charset="-120"/>
-                </a:rPr>
-                <a:t>5</a:t>
+                  <a:latin typeface="Arial" charset="0"/>
+                  <a:ea typeface="맑은 고딕" charset="0"/>
+                  <a:cs typeface="Arial" charset="0"/>
+                </a:rPr>
+                <a:t>종합 품질: 87.1→95.6점, 9.8% 향상</a:t>
+              </a:r>
+              <a:endParaRPr lang="ko-KR" altLang="en-US" sz="750">
+                <a:solidFill>
+                  <a:srgbClr val="666666"/>
+                </a:solidFill>
+                <a:latin typeface="Arial" charset="0"/>
+                <a:ea typeface="맑은 고딕" charset="0"/>
+                <a:cs typeface="Arial" charset="0"/>
+              </a:endParaRPr>
+            </a:p>
+            <a:p>
+              <a:pPr marL="0" indent="0">
+                <a:buFontTx/>
+                <a:buNone/>
+              </a:pPr>
+              <a:r>
+                <a:rPr lang="ko-KR" altLang="ko-KR" sz="750">
+                  <a:solidFill>
+                    <a:srgbClr val="666666"/>
+                  </a:solidFill>
+                  <a:latin typeface="Arial" charset="0"/>
+                  <a:ea typeface="맑은 고딕" charset="0"/>
+                  <a:cs typeface="Arial" charset="0"/>
+                </a:rPr>
+                <a:t>- </a:t>
               </a:r>
               <a:r>
                 <a:rPr lang="en-US" altLang="ko-KR" sz="750">
                   <a:solidFill>
                     <a:srgbClr val="666666"/>
                   </a:solidFill>
-                  <a:latin typeface="Arial" pitchFamily="34" charset="0"/>
-                  <a:cs typeface="Arial" pitchFamily="34" charset="-120"/>
-                </a:rPr>
-                <a:t>0</a:t>
-              </a:r>
-              <a:r>
-                <a:rPr lang="ko-Kore-KR" altLang="ko-Kore-KR" sz="750">
+                  <a:latin typeface="Arial" charset="0"/>
+                  <a:ea typeface="맑은 고딕" charset="0"/>
+                  <a:cs typeface="Arial" charset="0"/>
+                </a:rPr>
+                <a:t>검증 구체성: 11.0→13.5점, 22.7% 향상</a:t>
+              </a:r>
+              <a:endParaRPr lang="ko-KR" altLang="en-US" sz="750">
+                <a:solidFill>
+                  <a:srgbClr val="666666"/>
+                </a:solidFill>
+                <a:latin typeface="Arial" charset="0"/>
+                <a:ea typeface="맑은 고딕" charset="0"/>
+                <a:cs typeface="Arial" charset="0"/>
+              </a:endParaRPr>
+            </a:p>
+            <a:p>
+              <a:pPr marL="0" indent="0">
+                <a:buFontTx/>
+                <a:buNone/>
+              </a:pPr>
+              <a:r>
+                <a:rPr lang="ko-KR" altLang="ko-KR" sz="750">
                   <a:solidFill>
                     <a:srgbClr val="666666"/>
                   </a:solidFill>
-                  <a:latin typeface="Arial" pitchFamily="34" charset="0"/>
-                  <a:cs typeface="Arial" pitchFamily="34" charset="-120"/>
-                </a:rPr>
-                <a:t>건 → 0건, 중복 재처리 100% 제거</a:t>
-              </a:r>
+                  <a:latin typeface="Arial" charset="0"/>
+                  <a:ea typeface="맑은 고딕" charset="0"/>
+                  <a:cs typeface="Arial" charset="0"/>
+                </a:rPr>
+                <a:t>&gt; 90</a:t>
+              </a:r>
+              <a:r>
+                <a:rPr lang="ko-KR" altLang="ko-KR" sz="750">
+                  <a:solidFill>
+                    <a:srgbClr val="666666"/>
+                  </a:solidFill>
+                  <a:latin typeface="Arial" charset="0"/>
+                  <a:ea typeface="맑은 고딕" charset="0"/>
+                  <a:cs typeface="Arial" charset="0"/>
+                </a:rPr>
+                <a:t>점 </a:t>
+              </a:r>
+              <a:r>
+                <a:rPr lang="ko-KR" altLang="ko-KR" sz="750">
+                  <a:solidFill>
+                    <a:srgbClr val="666666"/>
+                  </a:solidFill>
+                  <a:latin typeface="Arial" charset="0"/>
+                  <a:ea typeface="맑은 고딕" charset="0"/>
+                  <a:cs typeface="Arial" charset="0"/>
+                </a:rPr>
+                <a:t>이</a:t>
+              </a:r>
+              <a:r>
+                <a:rPr lang="ko-KR" altLang="ko-KR" sz="750">
+                  <a:solidFill>
+                    <a:srgbClr val="666666"/>
+                  </a:solidFill>
+                  <a:latin typeface="Arial" charset="0"/>
+                  <a:ea typeface="맑은 고딕" charset="0"/>
+                  <a:cs typeface="Arial" charset="0"/>
+                </a:rPr>
+                <a:t>상 </a:t>
+              </a:r>
+              <a:r>
+                <a:rPr lang="ko-KR" altLang="ko-KR" sz="750">
+                  <a:solidFill>
+                    <a:srgbClr val="666666"/>
+                  </a:solidFill>
+                  <a:latin typeface="Arial" charset="0"/>
+                  <a:ea typeface="맑은 고딕" charset="0"/>
+                  <a:cs typeface="Arial" charset="0"/>
+                </a:rPr>
+                <a:t>고품</a:t>
+              </a:r>
+              <a:r>
+                <a:rPr lang="ko-KR" altLang="ko-KR" sz="750">
+                  <a:solidFill>
+                    <a:srgbClr val="666666"/>
+                  </a:solidFill>
+                  <a:latin typeface="Arial" charset="0"/>
+                  <a:ea typeface="맑은 고딕" charset="0"/>
+                  <a:cs typeface="Arial" charset="0"/>
+                </a:rPr>
+                <a:t>질 </a:t>
+              </a:r>
+              <a:r>
+                <a:rPr lang="ko-KR" altLang="ko-KR" sz="750">
+                  <a:solidFill>
+                    <a:srgbClr val="666666"/>
+                  </a:solidFill>
+                  <a:latin typeface="Arial" charset="0"/>
+                  <a:ea typeface="맑은 고딕" charset="0"/>
+                  <a:cs typeface="Arial" charset="0"/>
+                </a:rPr>
+                <a:t>권</a:t>
+              </a:r>
+              <a:r>
+                <a:rPr lang="ko-KR" altLang="ko-KR" sz="750">
+                  <a:solidFill>
+                    <a:srgbClr val="666666"/>
+                  </a:solidFill>
+                  <a:latin typeface="Arial" charset="0"/>
+                  <a:ea typeface="맑은 고딕" charset="0"/>
+                  <a:cs typeface="Arial" charset="0"/>
+                </a:rPr>
+                <a:t>고 생성 </a:t>
+              </a:r>
+              <a:r>
+                <a:rPr lang="ko-KR" altLang="ko-KR" sz="750">
+                  <a:solidFill>
+                    <a:srgbClr val="666666"/>
+                  </a:solidFill>
+                  <a:latin typeface="Arial" charset="0"/>
+                  <a:ea typeface="맑은 고딕" charset="0"/>
+                  <a:cs typeface="Arial" charset="0"/>
+                </a:rPr>
+                <a:t>비</a:t>
+              </a:r>
+              <a:r>
+                <a:rPr lang="ko-KR" altLang="ko-KR" sz="750">
+                  <a:solidFill>
+                    <a:srgbClr val="666666"/>
+                  </a:solidFill>
+                  <a:latin typeface="Arial" charset="0"/>
+                  <a:ea typeface="맑은 고딕" charset="0"/>
+                  <a:cs typeface="Arial" charset="0"/>
+                </a:rPr>
+                <a:t>율 </a:t>
+              </a:r>
+              <a:r>
+                <a:rPr lang="ko-KR" altLang="ko-KR" sz="750" b="0">
+                  <a:solidFill>
+                    <a:srgbClr val="666666"/>
+                  </a:solidFill>
+                  <a:latin typeface="Arial" charset="0"/>
+                  <a:ea typeface="+mn-ea"/>
+                  <a:cs typeface="+mn-cs"/>
+                </a:rPr>
+                <a:t>4</a:t>
+              </a:r>
+              <a:r>
+                <a:rPr lang="ko-KR" altLang="ko-KR" sz="750" b="0">
+                  <a:solidFill>
+                    <a:srgbClr val="666666"/>
+                  </a:solidFill>
+                  <a:latin typeface="Arial" charset="0"/>
+                  <a:ea typeface="+mn-ea"/>
+                  <a:cs typeface="+mn-cs"/>
+                </a:rPr>
+                <a:t>배</a:t>
+              </a:r>
+              <a:r>
+                <a:rPr lang="ko-KR" altLang="ko-KR" sz="750">
+                  <a:solidFill>
+                    <a:srgbClr val="666666"/>
+                  </a:solidFill>
+                  <a:latin typeface="Arial" charset="0"/>
+                  <a:ea typeface="맑은 고딕" charset="0"/>
+                  <a:cs typeface="Arial" charset="0"/>
+                </a:rPr>
+                <a:t> </a:t>
+              </a:r>
+              <a:r>
+                <a:rPr lang="ko-KR" altLang="ko-KR" sz="750">
+                  <a:solidFill>
+                    <a:srgbClr val="666666"/>
+                  </a:solidFill>
+                  <a:latin typeface="Arial" charset="0"/>
+                  <a:ea typeface="맑은 고딕" charset="0"/>
+                  <a:cs typeface="Arial" charset="0"/>
+                </a:rPr>
+                <a:t>증</a:t>
+              </a:r>
+              <a:r>
+                <a:rPr lang="ko-KR" altLang="ko-KR" sz="750">
+                  <a:solidFill>
+                    <a:srgbClr val="666666"/>
+                  </a:solidFill>
+                  <a:latin typeface="Arial" charset="0"/>
+                  <a:ea typeface="맑은 고딕" charset="0"/>
+                  <a:cs typeface="Arial" charset="0"/>
+                </a:rPr>
+                <a:t>가</a:t>
+              </a:r>
+              <a:endParaRPr lang="ko-KR" altLang="en-US" sz="750">
+                <a:solidFill>
+                  <a:srgbClr val="666666"/>
+                </a:solidFill>
+                <a:latin typeface="Arial" charset="0"/>
+                <a:ea typeface="맑은 고딕" charset="0"/>
+                <a:cs typeface="Arial" charset="0"/>
+              </a:endParaRPr>
             </a:p>
           </p:txBody>
         </p:sp>
@@ -5454,6 +6426,21 @@
   <p:clrMapOvr>
     <a:masterClrMapping/>
   </p:clrMapOvr>
+  <mc:AlternateContent xmlns:mc="http://schemas.openxmlformats.org/markup-compatibility/2006">
+    <mc:Choice xmlns:p14="http://schemas.microsoft.com/office/powerpoint/2010/main" Requires="p14">
+      <p:transition spd="slow" p14:dur="2000"/>
+    </mc:Choice>
+    <mc:Fallback>
+      <p:transition spd="slow"/>
+    </mc:Fallback>
+  </mc:AlternateContent>
+  <p:timing>
+    <p:tnLst>
+      <p:par>
+        <p:cTn id="1" dur="indefinite" restart="never" nodeType="tmRoot"/>
+      </p:par>
+    </p:tnLst>
+  </p:timing>
 </p:sld>
 </file>
 

--- a/docs/final docs/AI_Master_Project_최종발표_멘티명_사번.pptx
+++ b/docs/final docs/AI_Master_Project_최종발표_멘티명_사번.pptx
@@ -1,19 +1,19 @@
 
 <file path=ppt/presentation.xml><?xml version="1.0" encoding="utf-8"?>
-<p:presentation xmlns:a="http://schemas.openxmlformats.org/drawingml/2006/main" xmlns:r="http://schemas.openxmlformats.org/officeDocument/2006/relationships" xmlns:p="http://schemas.openxmlformats.org/presentationml/2006/main" xmlns:p14="http://schemas.microsoft.com/office/powerpoint/2010/main" saveSubsetFonts="1" autoCompressPictures="0">
+<p:presentation xmlns:a="http://schemas.openxmlformats.org/drawingml/2006/main" xmlns:r="http://schemas.openxmlformats.org/officeDocument/2006/relationships" xmlns:p="http://schemas.openxmlformats.org/presentationml/2006/main" saveSubsetFonts="1" autoCompressPictures="0">
   <p:sldMasterIdLst>
-    <p:sldMasterId id="2147483663" r:id="rId3"/>
+    <p:sldMasterId id="2147483663" r:id="rId1"/>
   </p:sldMasterIdLst>
   <p:notesMasterIdLst>
-    <p:notesMasterId r:id="rId5"/>
+    <p:notesMasterId r:id="rId6"/>
   </p:notesMasterIdLst>
   <p:sldIdLst>
-    <p:sldId id="256" r:id="rId7"/>
-    <p:sldId id="257" r:id="rId8"/>
-    <p:sldId id="258" r:id="rId9"/>
-    <p:sldId id="259" r:id="rId11"/>
+    <p:sldId id="256" r:id="rId2"/>
+    <p:sldId id="257" r:id="rId3"/>
+    <p:sldId id="258" r:id="rId4"/>
+    <p:sldId id="259" r:id="rId5"/>
   </p:sldIdLst>
-  <p:sldSz cx="9144000" cy="5143500"/>
+  <p:sldSz cx="9144000" cy="5143500" type="screen16x9"/>
   <p:notesSz cx="5143500" cy="9144000"/>
   <p:defaultTextStyle>
     <a:lvl1pPr marL="0" algn="l" defTabSz="914400" rtl="0" eaLnBrk="1" latinLnBrk="0" hangingPunct="1">
@@ -107,7 +107,11 @@
       </a:defRPr>
     </a:lvl9pPr>
   </p:defaultTextStyle>
-  <p:extLst/>
+  <p:extLst>
+    <p:ext uri="{EFAFB233-063F-42B5-8137-9DF3F51BA10A}">
+      <p15:sldGuideLst xmlns:p15="http://schemas.microsoft.com/office/powerpoint/2012/main"/>
+    </p:ext>
+  </p:extLst>
 </p:presentation>
 </file>
 
@@ -920,13 +924,14 @@
 </file>
 
 <file path=ppt/slides/slide1.xml><?xml version="1.0" encoding="utf-8"?>
-<p:sld xmlns:a="http://schemas.openxmlformats.org/drawingml/2006/main" xmlns:r="http://schemas.openxmlformats.org/officeDocument/2006/relationships" xmlns:p="http://schemas.openxmlformats.org/presentationml/2006/main" xmlns:p14="http://schemas.microsoft.com/office/powerpoint/2010/main">
+<p:sld xmlns:a="http://schemas.openxmlformats.org/drawingml/2006/main" xmlns:r="http://schemas.openxmlformats.org/officeDocument/2006/relationships" xmlns:p="http://schemas.openxmlformats.org/presentationml/2006/main">
   <p:cSld name="Slide 1">
     <p:bg>
       <p:bgPr>
         <a:solidFill>
           <a:srgbClr val="FFFFFF"/>
         </a:solidFill>
+        <a:effectLst/>
       </p:bgPr>
     </p:bg>
     <p:spTree>
@@ -1089,7 +1094,7 @@
           <a:ln/>
         </p:spPr>
         <p:txBody>
-          <a:bodyPr wrap="square" lIns="0" tIns="0" rIns="0" bIns="0" numCol="1" vert="horz" anchor="ctr">
+          <a:bodyPr vert="horz" wrap="square" lIns="0" tIns="0" rIns="0" bIns="0" numCol="1" anchor="ctr">
             <a:noAutofit/>
           </a:bodyPr>
           <a:lstStyle/>
@@ -1118,40 +1123,7 @@
                 <a:ea typeface="Arial" charset="0"/>
                 <a:cs typeface="Arial" charset="0"/>
               </a:rPr>
-              <a:t>M</a:t>
-            </a:r>
-            <a:r>
-              <a:rPr lang="ko-KR" sz="1300" b="1">
-                <a:solidFill>
-                  <a:srgbClr val="1A1A1A"/>
-                </a:solidFill>
-                <a:latin typeface="Arial" charset="0"/>
-                <a:ea typeface="Arial" charset="0"/>
-                <a:cs typeface="Arial" charset="0"/>
-              </a:rPr>
-              <a:t>ini AI</a:t>
-            </a:r>
-            <a:r>
-              <a:rPr lang="ko-KR" sz="1300" b="1">
-                <a:solidFill>
-                  <a:srgbClr val="1A1A1A"/>
-                </a:solidFill>
-                <a:latin typeface="Arial" charset="0"/>
-                <a:ea typeface="Arial" charset="0"/>
-                <a:cs typeface="Arial" charset="0"/>
-              </a:rPr>
-              <a:t>-</a:t>
-            </a:r>
-            <a:r>
-              <a:rPr lang="ko-KR" sz="1300" b="1">
-                <a:solidFill>
-                  <a:srgbClr val="1A1A1A"/>
-                </a:solidFill>
-                <a:latin typeface="Arial" charset="0"/>
-                <a:ea typeface="Arial" charset="0"/>
-                <a:cs typeface="Arial" charset="0"/>
-              </a:rPr>
-              <a:t>Ops</a:t>
+              <a:t>Mini AI-Ops</a:t>
             </a:r>
             <a:endParaRPr lang="ko-KR" altLang="en-US" sz="1300">
               <a:solidFill>
@@ -1173,18 +1145,20 @@
           <p:nvPr/>
         </p:nvSpPr>
         <p:spPr>
-          <a:xfrm rot="0">
+          <a:xfrm>
             <a:off x="2651760" y="3246120"/>
             <a:ext cx="3841115" cy="347980"/>
           </a:xfrm>
-          <a:prstGeom prst="rect"/>
+          <a:prstGeom prst="rect">
+            <a:avLst/>
+          </a:prstGeom>
           <a:noFill/>
           <a:ln cap="flat" cmpd="sng">
             <a:prstDash/>
           </a:ln>
         </p:spPr>
         <p:txBody>
-          <a:bodyPr wrap="square" lIns="0" tIns="0" rIns="0" bIns="0" numCol="1" vert="horz" anchor="ctr">
+          <a:bodyPr vert="horz" wrap="square" lIns="0" tIns="0" rIns="0" bIns="0" numCol="1" anchor="ctr">
             <a:noAutofit/>
           </a:bodyPr>
           <a:lstStyle/>
@@ -1205,7 +1179,7 @@
               <a:t>멘   티  </a:t>
             </a:r>
             <a:r>
-              <a:rPr lang="ko-KR" sz="1300">
+              <a:rPr lang="ko-KR" altLang="en-US" sz="1300" b="1">
                 <a:solidFill>
                   <a:srgbClr val="666666"/>
                 </a:solidFill>
@@ -1213,7 +1187,7 @@
                 <a:ea typeface="Arial" charset="0"/>
                 <a:cs typeface="Arial" charset="0"/>
               </a:rPr>
-              <a:t>-</a:t>
+              <a:t>신희승</a:t>
             </a:r>
             <a:r>
               <a:rPr lang="en-US" sz="1300">
@@ -1227,7 +1201,7 @@
               <a:t>, </a:t>
             </a:r>
             <a:r>
-              <a:rPr lang="ko-KR" sz="1300">
+              <a:rPr lang="en-US" altLang="ko-KR" sz="1300">
                 <a:solidFill>
                   <a:srgbClr val="666666"/>
                 </a:solidFill>
@@ -1235,7 +1209,7 @@
                 <a:ea typeface="Arial" charset="0"/>
                 <a:cs typeface="Arial" charset="0"/>
               </a:rPr>
-              <a:t>-</a:t>
+              <a:t>10068</a:t>
             </a:r>
             <a:endParaRPr lang="ko-KR" altLang="en-US" sz="1300">
               <a:solidFill>
@@ -1266,7 +1240,7 @@
           <a:ln/>
         </p:spPr>
         <p:txBody>
-          <a:bodyPr wrap="square" lIns="0" tIns="0" rIns="0" bIns="0" numCol="1" vert="horz" anchor="ctr">
+          <a:bodyPr vert="horz" wrap="square" lIns="0" tIns="0" rIns="0" bIns="0" numCol="1" anchor="ctr">
             <a:noAutofit/>
           </a:bodyPr>
           <a:lstStyle/>
@@ -1287,7 +1261,7 @@
               <a:t>멘   토  </a:t>
             </a:r>
             <a:r>
-              <a:rPr lang="ko-KR" sz="1300">
+              <a:rPr lang="ko-KR" altLang="en-US" sz="1300" b="1">
                 <a:solidFill>
                   <a:srgbClr val="666666"/>
                 </a:solidFill>
@@ -1295,7 +1269,7 @@
                 <a:ea typeface="Arial" charset="0"/>
                 <a:cs typeface="Arial" charset="0"/>
               </a:rPr>
-              <a:t>-</a:t>
+              <a:t>이재영</a:t>
             </a:r>
             <a:endParaRPr lang="ko-KR" altLang="en-US" sz="1300">
               <a:solidFill>
@@ -1377,32 +1351,18 @@
   <p:clrMapOvr>
     <a:masterClrMapping/>
   </p:clrMapOvr>
-  <mc:AlternateContent xmlns:mc="http://schemas.openxmlformats.org/markup-compatibility/2006">
-    <mc:Choice xmlns:p14="http://schemas.microsoft.com/office/powerpoint/2010/main" Requires="p14">
-      <p:transition spd="slow" p14:dur="2000"/>
-    </mc:Choice>
-    <mc:Fallback>
-      <p:transition spd="slow"/>
-    </mc:Fallback>
-  </mc:AlternateContent>
-  <p:timing>
-    <p:tnLst>
-      <p:par>
-        <p:cTn id="1" dur="indefinite" restart="never" nodeType="tmRoot"/>
-      </p:par>
-    </p:tnLst>
-  </p:timing>
 </p:sld>
 </file>
 
 <file path=ppt/slides/slide2.xml><?xml version="1.0" encoding="utf-8"?>
-<p:sld xmlns:a="http://schemas.openxmlformats.org/drawingml/2006/main" xmlns:r="http://schemas.openxmlformats.org/officeDocument/2006/relationships" xmlns:p="http://schemas.openxmlformats.org/presentationml/2006/main" xmlns:p14="http://schemas.microsoft.com/office/powerpoint/2010/main">
+<p:sld xmlns:a="http://schemas.openxmlformats.org/drawingml/2006/main" xmlns:r="http://schemas.openxmlformats.org/officeDocument/2006/relationships" xmlns:p="http://schemas.openxmlformats.org/presentationml/2006/main">
   <p:cSld name="Slide 2">
     <p:bg>
       <p:bgPr>
         <a:solidFill>
           <a:srgbClr val="FFFFFF"/>
         </a:solidFill>
+        <a:effectLst/>
       </p:bgPr>
     </p:bg>
     <p:spTree>
@@ -2211,7 +2171,7 @@
           <a:ln/>
         </p:spPr>
         <p:txBody>
-          <a:bodyPr wrap="square" lIns="0" tIns="0" rIns="0" bIns="0" numCol="1" vert="horz" anchor="ctr">
+          <a:bodyPr vert="horz" wrap="square" lIns="0" tIns="0" rIns="0" bIns="0" numCol="1" anchor="ctr">
             <a:noAutofit/>
           </a:bodyPr>
           <a:lstStyle/>
@@ -2231,14 +2191,6 @@
               </a:rPr>
               <a:t>지식축적</a:t>
             </a:r>
-            <a:endParaRPr lang="ko-KR" altLang="en-US" b="1">
-              <a:solidFill>
-                <a:srgbClr val="1A365D"/>
-              </a:solidFill>
-              <a:latin typeface="Arial" charset="0"/>
-              <a:ea typeface="Arial" charset="0"/>
-              <a:cs typeface="Arial" charset="0"/>
-            </a:endParaRPr>
           </a:p>
           <a:p>
             <a:pPr marL="0" indent="0" algn="ctr">
@@ -2254,192 +2206,8 @@
                 <a:ea typeface="Arial" charset="0"/>
                 <a:cs typeface="Arial" charset="0"/>
               </a:rPr>
-              <a:t>운영자</a:t>
-            </a:r>
-            <a:r>
-              <a:rPr lang="ko-KR" altLang="en-US" sz="800">
-                <a:solidFill>
-                  <a:srgbClr val="666666"/>
-                </a:solidFill>
-                <a:latin typeface="Arial" charset="0"/>
-                <a:ea typeface="Arial" charset="0"/>
-                <a:cs typeface="Arial" charset="0"/>
-              </a:rPr>
-              <a:t> </a:t>
-            </a:r>
-            <a:r>
-              <a:rPr lang="ko-KR" altLang="en-US" sz="800">
-                <a:solidFill>
-                  <a:srgbClr val="666666"/>
-                </a:solidFill>
-                <a:latin typeface="Arial" charset="0"/>
-                <a:ea typeface="Arial" charset="0"/>
-                <a:cs typeface="Arial" charset="0"/>
-              </a:rPr>
-              <a:t>개인에게만</a:t>
-            </a:r>
-            <a:r>
-              <a:rPr lang="ko-KR" altLang="en-US" sz="800">
-                <a:solidFill>
-                  <a:srgbClr val="666666"/>
-                </a:solidFill>
-                <a:latin typeface="Arial" charset="0"/>
-                <a:ea typeface="Arial" charset="0"/>
-                <a:cs typeface="Arial" charset="0"/>
-              </a:rPr>
-              <a:t> </a:t>
-            </a:r>
-            <a:r>
-              <a:rPr lang="ko-KR" altLang="en-US" sz="800">
-                <a:solidFill>
-                  <a:srgbClr val="666666"/>
-                </a:solidFill>
-                <a:latin typeface="Arial" charset="0"/>
-                <a:ea typeface="Arial" charset="0"/>
-                <a:cs typeface="Arial" charset="0"/>
-              </a:rPr>
-              <a:t>쌓이는</a:t>
-            </a:r>
-            <a:r>
-              <a:rPr lang="ko-KR" altLang="en-US" sz="800">
-                <a:solidFill>
-                  <a:srgbClr val="666666"/>
-                </a:solidFill>
-                <a:latin typeface="Arial" charset="0"/>
-                <a:ea typeface="Arial" charset="0"/>
-                <a:cs typeface="Arial" charset="0"/>
-              </a:rPr>
-              <a:t> </a:t>
-            </a:r>
-            <a:r>
-              <a:rPr lang="ko-KR" altLang="en-US" sz="800">
-                <a:solidFill>
-                  <a:srgbClr val="666666"/>
-                </a:solidFill>
-                <a:latin typeface="Arial" charset="0"/>
-                <a:ea typeface="Arial" charset="0"/>
-                <a:cs typeface="Arial" charset="0"/>
-              </a:rPr>
-              <a:t>지식을</a:t>
-            </a:r>
-            <a:r>
-              <a:rPr lang="ko-KR" altLang="en-US" sz="800">
-                <a:solidFill>
-                  <a:srgbClr val="666666"/>
-                </a:solidFill>
-                <a:latin typeface="Arial" charset="0"/>
-                <a:ea typeface="Arial" charset="0"/>
-                <a:cs typeface="Arial" charset="0"/>
-              </a:rPr>
-              <a:t> </a:t>
-            </a:r>
-            <a:r>
-              <a:rPr lang="ko-KR" altLang="en-US" sz="800">
-                <a:solidFill>
-                  <a:srgbClr val="666666"/>
-                </a:solidFill>
-                <a:latin typeface="Arial" charset="0"/>
-                <a:ea typeface="Arial" charset="0"/>
-                <a:cs typeface="Arial" charset="0"/>
-              </a:rPr>
-              <a:t>재사용</a:t>
-            </a:r>
-            <a:r>
-              <a:rPr lang="ko-KR" altLang="en-US" sz="800">
-                <a:solidFill>
-                  <a:srgbClr val="666666"/>
-                </a:solidFill>
-                <a:latin typeface="Arial" charset="0"/>
-                <a:ea typeface="Arial" charset="0"/>
-                <a:cs typeface="Arial" charset="0"/>
-              </a:rPr>
-              <a:t> </a:t>
-            </a:r>
-            <a:r>
-              <a:rPr lang="ko-KR" altLang="en-US" sz="800">
-                <a:solidFill>
-                  <a:srgbClr val="666666"/>
-                </a:solidFill>
-                <a:latin typeface="Arial" charset="0"/>
-                <a:ea typeface="Arial" charset="0"/>
-                <a:cs typeface="Arial" charset="0"/>
-              </a:rPr>
-              <a:t>가능한</a:t>
-            </a:r>
-            <a:r>
-              <a:rPr lang="ko-KR" altLang="en-US" sz="800">
-                <a:solidFill>
-                  <a:srgbClr val="666666"/>
-                </a:solidFill>
-                <a:latin typeface="Arial" charset="0"/>
-                <a:ea typeface="Arial" charset="0"/>
-                <a:cs typeface="Arial" charset="0"/>
-              </a:rPr>
-              <a:t> </a:t>
-            </a:r>
-            <a:r>
-              <a:rPr lang="ko-KR" altLang="en-US" sz="800">
-                <a:solidFill>
-                  <a:srgbClr val="666666"/>
-                </a:solidFill>
-                <a:latin typeface="Arial" charset="0"/>
-                <a:ea typeface="Arial" charset="0"/>
-                <a:cs typeface="Arial" charset="0"/>
-              </a:rPr>
-              <a:t>운영</a:t>
-            </a:r>
-            <a:r>
-              <a:rPr lang="ko-KR" altLang="en-US" sz="800">
-                <a:solidFill>
-                  <a:srgbClr val="666666"/>
-                </a:solidFill>
-                <a:latin typeface="Arial" charset="0"/>
-                <a:ea typeface="Arial" charset="0"/>
-                <a:cs typeface="Arial" charset="0"/>
-              </a:rPr>
-              <a:t> </a:t>
-            </a:r>
-            <a:r>
-              <a:rPr lang="ko-KR" altLang="en-US" sz="800">
-                <a:solidFill>
-                  <a:srgbClr val="666666"/>
-                </a:solidFill>
-                <a:latin typeface="Arial" charset="0"/>
-                <a:ea typeface="Arial" charset="0"/>
-                <a:cs typeface="Arial" charset="0"/>
-              </a:rPr>
-              <a:t>지식으로</a:t>
-            </a:r>
-            <a:r>
-              <a:rPr lang="ko-KR" altLang="en-US" sz="800">
-                <a:solidFill>
-                  <a:srgbClr val="666666"/>
-                </a:solidFill>
-                <a:latin typeface="Arial" charset="0"/>
-                <a:ea typeface="Arial" charset="0"/>
-                <a:cs typeface="Arial" charset="0"/>
-              </a:rPr>
-              <a:t> </a:t>
-            </a:r>
-            <a:r>
-              <a:rPr lang="ko-KR" altLang="en-US" sz="800">
-                <a:solidFill>
-                  <a:srgbClr val="666666"/>
-                </a:solidFill>
-                <a:latin typeface="Arial" charset="0"/>
-                <a:ea typeface="Arial" charset="0"/>
-                <a:cs typeface="Arial" charset="0"/>
-              </a:rPr>
-              <a:t>전환</a:t>
-            </a:r>
-            <a:endParaRPr lang="ko-KR" altLang="en-US" sz="800">
-              <a:solidFill>
-                <a:srgbClr val="666666"/>
-              </a:solidFill>
-              <a:latin typeface="Arial" charset="0"/>
-              <a:ea typeface="Arial" charset="0"/>
-              <a:cs typeface="Arial" charset="0"/>
-            </a:endParaRPr>
+              <a:t>운영자 개인에게만 쌓이는 지식을 재사용 가능한 운영 지식으로 전환</a:t>
+            </a:r>
           </a:p>
         </p:txBody>
       </p:sp>
@@ -2486,7 +2254,7 @@
           <a:ln/>
         </p:spPr>
         <p:txBody>
-          <a:bodyPr wrap="square" lIns="0" tIns="0" rIns="0" bIns="0" numCol="1" vert="horz" anchor="ctr">
+          <a:bodyPr vert="horz" wrap="square" lIns="0" tIns="0" rIns="0" bIns="0" numCol="1" anchor="ctr">
             <a:noAutofit/>
           </a:bodyPr>
           <a:lstStyle/>
@@ -2506,14 +2274,6 @@
               </a:rPr>
               <a:t>점검시간</a:t>
             </a:r>
-            <a:endParaRPr lang="ko-KR" altLang="en-US" b="1">
-              <a:solidFill>
-                <a:srgbClr val="1A365D"/>
-              </a:solidFill>
-              <a:latin typeface="Arial" charset="0"/>
-              <a:ea typeface="Arial" charset="0"/>
-              <a:cs typeface="Arial" charset="0"/>
-            </a:endParaRPr>
           </a:p>
           <a:p>
             <a:pPr marL="0" indent="0" algn="ctr">
@@ -2531,14 +2291,6 @@
               </a:rPr>
               <a:t>로그 전수 조사에 걸리는 시간 감소</a:t>
             </a:r>
-            <a:endParaRPr lang="ko-KR" altLang="en-US" sz="800">
-              <a:solidFill>
-                <a:srgbClr val="666666"/>
-              </a:solidFill>
-              <a:latin typeface="Arial" charset="0"/>
-              <a:ea typeface="Arial" charset="0"/>
-              <a:cs typeface="Arial" charset="0"/>
-            </a:endParaRPr>
           </a:p>
           <a:p>
             <a:pPr marL="0" indent="0" algn="ctr">
@@ -2698,7 +2450,7 @@
           <a:ln/>
         </p:spPr>
         <p:txBody>
-          <a:bodyPr wrap="square" lIns="0" tIns="0" rIns="0" bIns="0" numCol="1" vert="horz" anchor="ctr">
+          <a:bodyPr vert="horz" wrap="square" lIns="0" tIns="0" rIns="0" bIns="0" numCol="1" anchor="ctr">
             <a:noAutofit/>
           </a:bodyPr>
           <a:lstStyle/>
@@ -2729,14 +2481,6 @@
               </a:rPr>
               <a:t>인식</a:t>
             </a:r>
-            <a:endParaRPr lang="ko-KR" altLang="en-US" b="1">
-              <a:solidFill>
-                <a:srgbClr val="1A365D"/>
-              </a:solidFill>
-              <a:latin typeface="Arial" charset="0"/>
-              <a:ea typeface="Arial" charset="0"/>
-              <a:cs typeface="Arial" charset="0"/>
-            </a:endParaRPr>
           </a:p>
           <a:p>
             <a:pPr marL="0" indent="0" algn="ctr">
@@ -2776,10 +2520,6 @@
               </a:rPr>
               <a:t> 이상</a:t>
             </a:r>
-            <a:r>
-              <a:rPr lang="en-US" sz="2200"/>
-              <a:t/>
-            </a:r>
             <a:br>
               <a:rPr lang="en-US" sz="2200"/>
             </a:br>
@@ -2816,14 +2556,6 @@
               </a:rPr>
               <a:t> 이상</a:t>
             </a:r>
-            <a:endParaRPr lang="ko-KR" altLang="en-US" sz="800">
-              <a:solidFill>
-                <a:srgbClr val="666666"/>
-              </a:solidFill>
-              <a:latin typeface="Arial" charset="0"/>
-              <a:ea typeface="Arial" charset="0"/>
-              <a:cs typeface="Arial" charset="0"/>
-            </a:endParaRPr>
           </a:p>
         </p:txBody>
       </p:sp>
@@ -2861,18 +2593,20 @@
           <p:nvPr/>
         </p:nvSpPr>
         <p:spPr>
-          <a:xfrm rot="0">
+          <a:xfrm>
             <a:off x="5056505" y="2912110"/>
             <a:ext cx="3832225" cy="220345"/>
           </a:xfrm>
-          <a:prstGeom prst="rect"/>
+          <a:prstGeom prst="rect">
+            <a:avLst/>
+          </a:prstGeom>
           <a:noFill/>
           <a:ln cap="flat" cmpd="sng">
             <a:prstDash/>
           </a:ln>
         </p:spPr>
         <p:txBody>
-          <a:bodyPr wrap="square" lIns="0" tIns="0" rIns="0" bIns="0" numCol="1" vert="horz" anchor="ctr">
+          <a:bodyPr vert="horz" wrap="square" lIns="0" tIns="0" rIns="0" bIns="0" numCol="1" anchor="ctr">
             <a:noAutofit/>
           </a:bodyPr>
           <a:lstStyle/>
@@ -3010,21 +2744,6 @@
   <p:clrMapOvr>
     <a:masterClrMapping/>
   </p:clrMapOvr>
-  <mc:AlternateContent xmlns:mc="http://schemas.openxmlformats.org/markup-compatibility/2006">
-    <mc:Choice xmlns:p14="http://schemas.microsoft.com/office/powerpoint/2010/main" Requires="p14">
-      <p:transition spd="slow" p14:dur="2000"/>
-    </mc:Choice>
-    <mc:Fallback>
-      <p:transition spd="slow"/>
-    </mc:Fallback>
-  </mc:AlternateContent>
-  <p:timing>
-    <p:tnLst>
-      <p:par>
-        <p:cTn id="1" dur="indefinite" restart="never" nodeType="tmRoot"/>
-      </p:par>
-    </p:tnLst>
-  </p:timing>
 </p:sld>
 </file>
 
@@ -3981,13 +3700,14 @@
 </file>
 
 <file path=ppt/slides/slide4.xml><?xml version="1.0" encoding="utf-8"?>
-<p:sld xmlns:a="http://schemas.openxmlformats.org/drawingml/2006/main" xmlns:r="http://schemas.openxmlformats.org/officeDocument/2006/relationships" xmlns:p="http://schemas.openxmlformats.org/presentationml/2006/main" xmlns:p14="http://schemas.microsoft.com/office/powerpoint/2010/main">
+<p:sld xmlns:a="http://schemas.openxmlformats.org/drawingml/2006/main" xmlns:r="http://schemas.openxmlformats.org/officeDocument/2006/relationships" xmlns:p="http://schemas.openxmlformats.org/presentationml/2006/main">
   <p:cSld name="Slide 4">
     <p:bg>
       <p:bgPr>
         <a:solidFill>
           <a:srgbClr val="FFFFFF"/>
         </a:solidFill>
+        <a:effectLst/>
       </p:bgPr>
     </p:bg>
     <p:spTree>
@@ -4379,11 +4099,13 @@
           <p:nvPr/>
         </p:nvSpPr>
         <p:spPr>
-          <a:xfrm rot="0">
+          <a:xfrm>
             <a:off x="255905" y="1755775"/>
             <a:ext cx="4621530" cy="3173730"/>
           </a:xfrm>
-          <a:prstGeom prst="rect"/>
+          <a:prstGeom prst="rect">
+            <a:avLst/>
+          </a:prstGeom>
           <a:solidFill>
             <a:srgbClr val="F8F9FA"/>
           </a:solidFill>
@@ -4397,7 +4119,7 @@
           </a:ln>
         </p:spPr>
         <p:txBody>
-          <a:bodyPr wrap="square" lIns="0" tIns="0" rIns="0" bIns="0" vert="horz" anchor="t">
+          <a:bodyPr vert="horz" wrap="square" lIns="0" tIns="0" rIns="0" bIns="0" anchor="t">
             <a:noAutofit/>
           </a:bodyPr>
           <a:lstStyle/>
@@ -4489,7 +4211,7 @@
           <a:ln/>
         </p:spPr>
         <p:txBody>
-          <a:bodyPr wrap="square" lIns="0" tIns="0" rIns="0" bIns="0" numCol="1" vert="horz" anchor="t">
+          <a:bodyPr vert="horz" wrap="square" lIns="0" tIns="0" rIns="0" bIns="0" numCol="1" anchor="t">
             <a:noAutofit/>
           </a:bodyPr>
           <a:lstStyle/>
@@ -4543,13 +4265,6 @@
               </a:rPr>
               <a:t>하여</a:t>
             </a:r>
-            <a:endParaRPr lang="ko-KR" altLang="en-US" sz="850">
-              <a:solidFill>
-                <a:srgbClr val="666666"/>
-              </a:solidFill>
-              <a:latin typeface="Arial" charset="0"/>
-              <a:cs typeface="Arial" charset="0"/>
-            </a:endParaRPr>
           </a:p>
           <a:p>
             <a:pPr marL="0" indent="0">
@@ -4564,27 +4279,7 @@
                 <a:latin typeface="Arial" charset="0"/>
                 <a:cs typeface="Arial" charset="0"/>
               </a:rPr>
-              <a:t>“</a:t>
-            </a:r>
-            <a:r>
-              <a:rPr lang="ko-KR" altLang="ko-KR" sz="850">
-                <a:solidFill>
-                  <a:srgbClr val="666666"/>
-                </a:solidFill>
-                <a:latin typeface="Arial" charset="0"/>
-                <a:cs typeface="Arial" charset="0"/>
-              </a:rPr>
-              <a:t>Human-in-the-loop 기반 지속 학습형 운영 메모리</a:t>
-            </a:r>
-            <a:r>
-              <a:rPr lang="ko-KR" altLang="ko-KR" sz="850">
-                <a:solidFill>
-                  <a:srgbClr val="666666"/>
-                </a:solidFill>
-                <a:latin typeface="Arial" charset="0"/>
-                <a:cs typeface="Arial" charset="0"/>
-              </a:rPr>
-              <a:t>”</a:t>
+              <a:t>“Human-in-the-loop 기반 지속 학습형 운영 메모리”</a:t>
             </a:r>
             <a:r>
               <a:rPr lang="ko-KR" altLang="en-US" sz="850">
@@ -4737,47 +4432,7 @@
                 <a:latin typeface="Arial" charset="0"/>
                 <a:cs typeface="Arial" charset="0"/>
               </a:rPr>
-              <a:t>LangGraph와 PatternOps가 이를 다음 분석에 재적용하는 </a:t>
-            </a:r>
-            <a:r>
-              <a:rPr lang="ko-KR" altLang="ko-KR" sz="850">
-                <a:solidFill>
-                  <a:srgbClr val="666666"/>
-                </a:solidFill>
-                <a:latin typeface="Arial" charset="0"/>
-                <a:cs typeface="Arial" charset="0"/>
-              </a:rPr>
-              <a:t>“</a:t>
-            </a:r>
-            <a:r>
-              <a:rPr lang="ko-KR" altLang="ko-KR" sz="850">
-                <a:solidFill>
-                  <a:srgbClr val="666666"/>
-                </a:solidFill>
-                <a:latin typeface="Arial" charset="0"/>
-                <a:cs typeface="Arial" charset="0"/>
-              </a:rPr>
-              <a:t>Human-in-the-loop 운영 메모리</a:t>
-            </a:r>
-            <a:r>
-              <a:rPr lang="ko-KR" altLang="ko-KR" sz="850">
-                <a:solidFill>
-                  <a:srgbClr val="666666"/>
-                </a:solidFill>
-                <a:latin typeface="Arial" charset="0"/>
-                <a:cs typeface="Arial" charset="0"/>
-              </a:rPr>
-              <a:t>”</a:t>
-            </a:r>
-            <a:r>
-              <a:rPr lang="ko-KR" altLang="ko-KR" sz="850">
-                <a:solidFill>
-                  <a:srgbClr val="666666"/>
-                </a:solidFill>
-                <a:latin typeface="Arial" charset="0"/>
-                <a:cs typeface="Arial" charset="0"/>
-              </a:rPr>
-              <a:t>를 구성했다.</a:t>
+              <a:t>LangGraph와 PatternOps가 이를 다음 분석에 재적용하는 “Human-in-the-loop 운영 메모리”를 구성했다.</a:t>
             </a:r>
             <a:endParaRPr lang="ko-KR" altLang="en-US" sz="850">
               <a:solidFill>
@@ -4896,11 +4551,13 @@
             <p:nvPr/>
           </p:nvSpPr>
           <p:spPr>
-            <a:xfrm rot="0">
+            <a:xfrm>
               <a:off x="5058410" y="1764665"/>
               <a:ext cx="3830320" cy="3173730"/>
             </a:xfrm>
-            <a:prstGeom prst="rect"/>
+            <a:prstGeom prst="rect">
+              <a:avLst/>
+            </a:prstGeom>
             <a:solidFill>
               <a:srgbClr val="F0FDFB"/>
             </a:solidFill>
@@ -4914,7 +4571,7 @@
             </a:ln>
           </p:spPr>
           <p:txBody>
-            <a:bodyPr wrap="square" lIns="0" tIns="0" rIns="0" bIns="0" vert="horz" anchor="t">
+            <a:bodyPr vert="horz" wrap="square" lIns="0" tIns="0" rIns="0" bIns="0" anchor="t">
               <a:noAutofit/>
             </a:bodyPr>
             <a:lstStyle/>
@@ -4933,11 +4590,13 @@
             <p:nvPr/>
           </p:nvSpPr>
           <p:spPr>
-            <a:xfrm rot="0">
+            <a:xfrm>
               <a:off x="5058410" y="1764665"/>
               <a:ext cx="50165" cy="3173730"/>
             </a:xfrm>
-            <a:prstGeom prst="rect"/>
+            <a:prstGeom prst="rect">
+              <a:avLst/>
+            </a:prstGeom>
             <a:solidFill>
               <a:srgbClr val="4ECDC4"/>
             </a:solidFill>
@@ -4951,7 +4610,7 @@
             </a:ln>
           </p:spPr>
           <p:txBody>
-            <a:bodyPr wrap="square" lIns="0" tIns="0" rIns="0" bIns="0" vert="horz" anchor="t">
+            <a:bodyPr vert="horz" wrap="square" lIns="0" tIns="0" rIns="0" bIns="0" anchor="t">
               <a:noAutofit/>
             </a:bodyPr>
             <a:lstStyle/>
@@ -4970,18 +4629,20 @@
             <p:nvPr/>
           </p:nvSpPr>
           <p:spPr>
-            <a:xfrm rot="0">
+            <a:xfrm>
               <a:off x="5165725" y="1856105"/>
               <a:ext cx="3648710" cy="247650"/>
             </a:xfrm>
-            <a:prstGeom prst="rect"/>
+            <a:prstGeom prst="rect">
+              <a:avLst/>
+            </a:prstGeom>
             <a:noFill/>
             <a:ln cap="flat" cmpd="sng">
               <a:prstDash/>
             </a:ln>
           </p:spPr>
           <p:txBody>
-            <a:bodyPr wrap="square" lIns="0" tIns="0" rIns="0" bIns="0" numCol="1" vert="horz" anchor="ctr">
+            <a:bodyPr vert="horz" wrap="square" lIns="0" tIns="0" rIns="0" bIns="0" numCol="1" anchor="ctr">
               <a:noAutofit/>
             </a:bodyPr>
             <a:lstStyle/>
@@ -5012,20 +4673,7 @@
                   <a:ea typeface="Arial" charset="0"/>
                   <a:cs typeface="Arial" charset="0"/>
                 </a:rPr>
-                <a:t>(</a:t>
-              </a:r>
-              <a:r>
-                <a:rPr lang="en-US" sz="1000" b="1">
-                  <a:solidFill>
-                    <a:schemeClr val="bg1">
-                      <a:lumMod val="50000"/>
-                    </a:schemeClr>
-                  </a:solidFill>
-                  <a:latin typeface="Arial" charset="0"/>
-                  <a:ea typeface="Arial" charset="0"/>
-                  <a:cs typeface="Arial" charset="0"/>
-                </a:rPr>
-                <a:t>수치로 </a:t>
+                <a:t>(수치로 </a:t>
               </a:r>
               <a:r>
                 <a:rPr lang="ko-KR" altLang="en-US" sz="1000" b="1">
@@ -5075,11 +4723,13 @@
             <p:nvPr/>
           </p:nvSpPr>
           <p:spPr>
-            <a:xfrm rot="0">
+            <a:xfrm>
               <a:off x="5173980" y="2194560"/>
               <a:ext cx="3632200" cy="814705"/>
             </a:xfrm>
-            <a:prstGeom prst="rect"/>
+            <a:prstGeom prst="rect">
+              <a:avLst/>
+            </a:prstGeom>
             <a:solidFill>
               <a:srgbClr val="FFFFFF"/>
             </a:solidFill>
@@ -5093,7 +4743,7 @@
             </a:ln>
           </p:spPr>
           <p:txBody>
-            <a:bodyPr wrap="square" lIns="0" tIns="0" rIns="0" bIns="0" vert="horz" anchor="t">
+            <a:bodyPr vert="horz" wrap="square" lIns="0" tIns="0" rIns="0" bIns="0" anchor="t">
               <a:noAutofit/>
             </a:bodyPr>
             <a:lstStyle/>
@@ -5112,18 +4762,20 @@
             <p:nvPr/>
           </p:nvSpPr>
           <p:spPr>
-            <a:xfrm rot="0">
+            <a:xfrm>
               <a:off x="5223510" y="2194560"/>
               <a:ext cx="743585" cy="814705"/>
             </a:xfrm>
-            <a:prstGeom prst="rect"/>
+            <a:prstGeom prst="rect">
+              <a:avLst/>
+            </a:prstGeom>
             <a:noFill/>
             <a:ln cap="flat" cmpd="sng">
               <a:prstDash/>
             </a:ln>
           </p:spPr>
           <p:txBody>
-            <a:bodyPr wrap="square" lIns="0" tIns="0" rIns="0" bIns="0" numCol="1" vert="horz" anchor="ctr">
+            <a:bodyPr vert="horz" wrap="square" lIns="0" tIns="0" rIns="0" bIns="0" numCol="1" anchor="ctr">
               <a:noAutofit/>
             </a:bodyPr>
             <a:lstStyle/>
@@ -5141,18 +4793,7 @@
                   <a:ea typeface="Arial" charset="0"/>
                   <a:cs typeface="Arial" charset="0"/>
                 </a:rPr>
-                <a:t>9</a:t>
-              </a:r>
-              <a:r>
-                <a:rPr lang="ko-KR" sz="1800" b="1">
-                  <a:solidFill>
-                    <a:srgbClr val="1A365D"/>
-                  </a:solidFill>
-                  <a:latin typeface="Arial" charset="0"/>
-                  <a:ea typeface="Arial" charset="0"/>
-                  <a:cs typeface="Arial" charset="0"/>
-                </a:rPr>
-                <a:t>8</a:t>
+                <a:t>98</a:t>
               </a:r>
               <a:r>
                 <a:rPr lang="en-US" sz="1800" b="1">
@@ -5183,11 +4824,13 @@
             <p:nvPr/>
           </p:nvCxnSpPr>
           <p:spPr>
-            <a:xfrm rot="0">
+            <a:xfrm>
               <a:off x="6007100" y="2373630"/>
               <a:ext cx="635" cy="456565"/>
             </a:xfrm>
-            <a:prstGeom prst="line"/>
+            <a:prstGeom prst="line">
+              <a:avLst/>
+            </a:prstGeom>
             <a:noFill/>
             <a:ln w="12700" cap="flat" cmpd="sng">
               <a:solidFill>
@@ -5222,18 +4865,20 @@
             <p:nvPr/>
           </p:nvSpPr>
           <p:spPr>
-            <a:xfrm rot="0">
+            <a:xfrm>
               <a:off x="6097905" y="2249170"/>
               <a:ext cx="2625090" cy="704850"/>
             </a:xfrm>
-            <a:prstGeom prst="rect"/>
+            <a:prstGeom prst="rect">
+              <a:avLst/>
+            </a:prstGeom>
             <a:noFill/>
             <a:ln cap="flat" cmpd="sng">
               <a:prstDash/>
             </a:ln>
           </p:spPr>
           <p:txBody>
-            <a:bodyPr wrap="square" lIns="0" tIns="0" rIns="0" bIns="0" numCol="1" vert="horz" anchor="ctr">
+            <a:bodyPr vert="horz" wrap="square" lIns="0" tIns="0" rIns="0" bIns="0" numCol="1" anchor="ctr">
               <a:noAutofit/>
             </a:bodyPr>
             <a:lstStyle/>
@@ -5251,18 +4896,7 @@
                   <a:ea typeface="Arial" charset="0"/>
                   <a:cs typeface="Arial" charset="0"/>
                 </a:rPr>
-                <a:t>성과 </a:t>
-              </a:r>
-              <a:r>
-                <a:rPr lang="en-US" sz="850" b="1">
-                  <a:solidFill>
-                    <a:srgbClr val="1A365D"/>
-                  </a:solidFill>
-                  <a:latin typeface="Arial" charset="0"/>
-                  <a:ea typeface="Arial" charset="0"/>
-                  <a:cs typeface="Arial" charset="0"/>
-                </a:rPr>
-                <a:t>지표 1</a:t>
+                <a:t>성과 지표 1</a:t>
               </a:r>
               <a:r>
                 <a:rPr lang="ko-KR" altLang="en-US" sz="850" b="1">
@@ -5295,71 +4929,8 @@
                   <a:ea typeface="Arial" charset="0"/>
                   <a:cs typeface="Arial" charset="0"/>
                 </a:rPr>
-                <a:t> </a:t>
+                <a:t> FingerPrint 분산 98%축소</a:t>
               </a:r>
-              <a:r>
-                <a:rPr lang="ko-KR" altLang="en-US" sz="850" b="1">
-                  <a:solidFill>
-                    <a:srgbClr val="1A365D"/>
-                  </a:solidFill>
-                  <a:latin typeface="Arial" charset="0"/>
-                  <a:ea typeface="Arial" charset="0"/>
-                  <a:cs typeface="Arial" charset="0"/>
-                </a:rPr>
-                <a:t>F</a:t>
-              </a:r>
-              <a:r>
-                <a:rPr lang="ko-KR" altLang="en-US" sz="850" b="1">
-                  <a:solidFill>
-                    <a:srgbClr val="1A365D"/>
-                  </a:solidFill>
-                  <a:latin typeface="Arial" charset="0"/>
-                  <a:ea typeface="Arial" charset="0"/>
-                  <a:cs typeface="Arial" charset="0"/>
-                </a:rPr>
-                <a:t>ingerPrint </a:t>
-              </a:r>
-              <a:r>
-                <a:rPr lang="ko-KR" altLang="en-US" sz="850" b="1">
-                  <a:solidFill>
-                    <a:srgbClr val="1A365D"/>
-                  </a:solidFill>
-                  <a:latin typeface="Arial" charset="0"/>
-                  <a:ea typeface="Arial" charset="0"/>
-                  <a:cs typeface="Arial" charset="0"/>
-                </a:rPr>
-                <a:t>분산 9</a:t>
-              </a:r>
-              <a:r>
-                <a:rPr lang="ko-KR" altLang="en-US" sz="850" b="1">
-                  <a:solidFill>
-                    <a:srgbClr val="1A365D"/>
-                  </a:solidFill>
-                  <a:latin typeface="Arial" charset="0"/>
-                  <a:ea typeface="Arial" charset="0"/>
-                  <a:cs typeface="Arial" charset="0"/>
-                </a:rPr>
-                <a:t>8%축</a:t>
-              </a:r>
-              <a:r>
-                <a:rPr lang="ko-KR" altLang="en-US" sz="850" b="1">
-                  <a:solidFill>
-                    <a:srgbClr val="1A365D"/>
-                  </a:solidFill>
-                  <a:latin typeface="Arial" charset="0"/>
-                  <a:ea typeface="Arial" charset="0"/>
-                  <a:cs typeface="Arial" charset="0"/>
-                </a:rPr>
-                <a:t>소</a:t>
-              </a:r>
-              <a:endParaRPr lang="ko-KR" altLang="en-US" sz="850" b="1">
-                <a:solidFill>
-                  <a:srgbClr val="1A365D"/>
-                </a:solidFill>
-                <a:latin typeface="Arial" charset="0"/>
-                <a:ea typeface="Arial" charset="0"/>
-                <a:cs typeface="Arial" charset="0"/>
-              </a:endParaRPr>
             </a:p>
             <a:p>
               <a:pPr marL="0" indent="0">
@@ -5394,57 +4965,7 @@
                   <a:latin typeface="Arial" charset="0"/>
                   <a:cs typeface="Arial" charset="0"/>
                 </a:rPr>
-                <a:t> 중복으로 처리되는 패턴 </a:t>
-              </a:r>
-              <a:r>
-                <a:rPr lang="ko-KR" altLang="en-US" sz="800">
-                  <a:solidFill>
-                    <a:srgbClr val="666666"/>
-                  </a:solidFill>
-                  <a:latin typeface="Arial" charset="0"/>
-                  <a:cs typeface="Arial" charset="0"/>
-                </a:rPr>
-                <a:t>5</a:t>
-              </a:r>
-              <a:r>
-                <a:rPr lang="ko-KR" altLang="en-US" sz="800">
-                  <a:solidFill>
-                    <a:srgbClr val="666666"/>
-                  </a:solidFill>
-                  <a:latin typeface="Arial" charset="0"/>
-                  <a:cs typeface="Arial" charset="0"/>
-                </a:rPr>
-                <a:t>0</a:t>
-              </a:r>
-              <a:r>
-                <a:rPr lang="ko-KR" altLang="en-US" sz="800">
-                  <a:solidFill>
-                    <a:srgbClr val="666666"/>
-                  </a:solidFill>
-                  <a:latin typeface="Arial" charset="0"/>
-                  <a:cs typeface="Arial" charset="0"/>
-                </a:rPr>
-                <a:t>건 </a:t>
-              </a:r>
-              <a:r>
-                <a:rPr lang="ko-KR" altLang="en-US" sz="800">
-                  <a:solidFill>
-                    <a:srgbClr val="666666"/>
-                  </a:solidFill>
-                  <a:latin typeface="Arial" charset="0"/>
-                  <a:cs typeface="Arial" charset="0"/>
-                </a:rPr>
-                <a:t>&gt; 1건으</a:t>
-              </a:r>
-              <a:r>
-                <a:rPr lang="ko-KR" altLang="en-US" sz="800">
-                  <a:solidFill>
-                    <a:srgbClr val="666666"/>
-                  </a:solidFill>
-                  <a:latin typeface="Arial" charset="0"/>
-                  <a:cs typeface="Arial" charset="0"/>
-                </a:rPr>
-                <a:t>로</a:t>
+                <a:t> 중복으로 처리되는 패턴 50건 &gt; 1건으로</a:t>
               </a:r>
               <a:r>
                 <a:rPr lang="en-US" altLang="ko-KR" sz="800">
@@ -5466,13 +4987,6 @@
                 </a:rPr>
                 <a:t>처리</a:t>
               </a:r>
-              <a:endParaRPr lang="ko-KR" altLang="en-US" sz="800">
-                <a:solidFill>
-                  <a:srgbClr val="666666"/>
-                </a:solidFill>
-                <a:latin typeface="Arial" charset="0"/>
-                <a:cs typeface="Arial" charset="0"/>
-              </a:endParaRPr>
             </a:p>
           </p:txBody>
         </p:sp>
@@ -5485,11 +4999,13 @@
             <p:nvPr/>
           </p:nvSpPr>
           <p:spPr>
-            <a:xfrm rot="0">
+            <a:xfrm>
               <a:off x="5173980" y="3090545"/>
               <a:ext cx="3632200" cy="814705"/>
             </a:xfrm>
-            <a:prstGeom prst="rect"/>
+            <a:prstGeom prst="rect">
+              <a:avLst/>
+            </a:prstGeom>
             <a:solidFill>
               <a:srgbClr val="FFFFFF"/>
             </a:solidFill>
@@ -5503,7 +5019,7 @@
             </a:ln>
           </p:spPr>
           <p:txBody>
-            <a:bodyPr wrap="square" lIns="0" tIns="0" rIns="0" bIns="0" vert="horz" anchor="t">
+            <a:bodyPr vert="horz" wrap="square" lIns="0" tIns="0" rIns="0" bIns="0" anchor="t">
               <a:noAutofit/>
             </a:bodyPr>
             <a:lstStyle/>
@@ -5522,18 +5038,20 @@
             <p:nvPr/>
           </p:nvSpPr>
           <p:spPr>
-            <a:xfrm rot="0">
+            <a:xfrm>
               <a:off x="5223510" y="3090545"/>
               <a:ext cx="743585" cy="814705"/>
             </a:xfrm>
-            <a:prstGeom prst="rect"/>
+            <a:prstGeom prst="rect">
+              <a:avLst/>
+            </a:prstGeom>
             <a:noFill/>
             <a:ln cap="flat" cmpd="sng">
               <a:prstDash/>
             </a:ln>
           </p:spPr>
           <p:txBody>
-            <a:bodyPr wrap="square" lIns="0" tIns="0" rIns="0" bIns="0" numCol="1" vert="horz" anchor="ctr">
+            <a:bodyPr vert="horz" wrap="square" lIns="0" tIns="0" rIns="0" bIns="0" numCol="1" anchor="ctr">
               <a:noAutofit/>
             </a:bodyPr>
             <a:lstStyle/>
@@ -5582,11 +5100,13 @@
             <p:nvPr/>
           </p:nvCxnSpPr>
           <p:spPr>
-            <a:xfrm rot="0">
+            <a:xfrm>
               <a:off x="6007100" y="3269615"/>
               <a:ext cx="635" cy="456565"/>
             </a:xfrm>
-            <a:prstGeom prst="line"/>
+            <a:prstGeom prst="line">
+              <a:avLst/>
+            </a:prstGeom>
             <a:noFill/>
             <a:ln w="12700" cap="flat" cmpd="sng">
               <a:solidFill>
@@ -5621,18 +5141,20 @@
             <p:nvPr/>
           </p:nvSpPr>
           <p:spPr>
-            <a:xfrm rot="0">
+            <a:xfrm>
               <a:off x="6097905" y="3145790"/>
               <a:ext cx="2625090" cy="704850"/>
             </a:xfrm>
-            <a:prstGeom prst="rect"/>
+            <a:prstGeom prst="rect">
+              <a:avLst/>
+            </a:prstGeom>
             <a:noFill/>
             <a:ln cap="flat" cmpd="sng">
               <a:prstDash/>
             </a:ln>
           </p:spPr>
           <p:txBody>
-            <a:bodyPr wrap="square" lIns="0" tIns="0" rIns="0" bIns="0" numCol="1" vert="horz" anchor="ctr">
+            <a:bodyPr vert="horz" wrap="square" lIns="0" tIns="0" rIns="0" bIns="0" numCol="1" anchor="ctr">
               <a:noAutofit/>
             </a:bodyPr>
             <a:lstStyle/>
@@ -5683,51 +5205,7 @@
                   <a:ea typeface="Arial" charset="0"/>
                   <a:cs typeface="Arial" charset="0"/>
                 </a:rPr>
-                <a:t> </a:t>
-              </a:r>
-              <a:r>
-                <a:rPr lang="ko-KR" altLang="ko-KR" sz="850" b="1">
-                  <a:solidFill>
-                    <a:srgbClr val="1A365D"/>
-                  </a:solidFill>
-                  <a:latin typeface="Arial" charset="0"/>
-                  <a:ea typeface="Arial" charset="0"/>
-                  <a:cs typeface="Arial" charset="0"/>
-                </a:rPr>
-                <a:t>규</a:t>
-              </a:r>
-              <a:r>
-                <a:rPr lang="ko-KR" altLang="ko-KR" sz="850" b="1">
-                  <a:solidFill>
-                    <a:srgbClr val="1A365D"/>
-                  </a:solidFill>
-                  <a:latin typeface="Arial" charset="0"/>
-                  <a:ea typeface="Arial" charset="0"/>
-                  <a:cs typeface="Arial" charset="0"/>
-                </a:rPr>
-                <a:t>칙 </a:t>
-              </a:r>
-              <a:r>
-                <a:rPr lang="ko-KR" altLang="ko-KR" sz="850" b="1">
-                  <a:solidFill>
-                    <a:srgbClr val="1A365D"/>
-                  </a:solidFill>
-                  <a:latin typeface="Arial" charset="0"/>
-                  <a:ea typeface="Arial" charset="0"/>
-                  <a:cs typeface="Arial" charset="0"/>
-                </a:rPr>
-                <a:t>재사용</a:t>
-              </a:r>
-              <a:r>
-                <a:rPr lang="ko-KR" altLang="ko-KR" sz="850" b="1">
-                  <a:solidFill>
-                    <a:srgbClr val="1A365D"/>
-                  </a:solidFill>
-                  <a:latin typeface="Arial" charset="0"/>
-                  <a:ea typeface="Arial" charset="0"/>
-                  <a:cs typeface="Arial" charset="0"/>
-                </a:rPr>
-                <a:t>률</a:t>
+                <a:t> 규칙 재사용률</a:t>
               </a:r>
               <a:r>
                 <a:rPr lang="ko-KR" altLang="ko-KR" sz="800">
@@ -5760,17 +5238,7 @@
                   <a:latin typeface="Arial" charset="0"/>
                   <a:cs typeface="Arial" charset="0"/>
                 </a:rPr>
-                <a:t>-</a:t>
-              </a:r>
-              <a:r>
-                <a:rPr lang="ko-KR" altLang="ko-KR" sz="750">
-                  <a:solidFill>
-                    <a:srgbClr val="666666"/>
-                  </a:solidFill>
-                  <a:latin typeface="Arial" charset="0"/>
-                  <a:cs typeface="Arial" charset="0"/>
-                </a:rPr>
-                <a:t> </a:t>
+                <a:t>- </a:t>
               </a:r>
               <a:r>
                 <a:rPr lang="en-US" altLang="ko-KR" sz="750">
@@ -5871,11 +5339,13 @@
             <p:nvPr/>
           </p:nvSpPr>
           <p:spPr>
-            <a:xfrm rot="0">
+            <a:xfrm>
               <a:off x="5156835" y="3943350"/>
               <a:ext cx="3632200" cy="814705"/>
             </a:xfrm>
-            <a:prstGeom prst="rect"/>
+            <a:prstGeom prst="rect">
+              <a:avLst/>
+            </a:prstGeom>
             <a:solidFill>
               <a:srgbClr val="FFFFFF"/>
             </a:solidFill>
@@ -5889,7 +5359,7 @@
             </a:ln>
           </p:spPr>
           <p:txBody>
-            <a:bodyPr wrap="square" lIns="0" tIns="0" rIns="0" bIns="0" vert="horz" anchor="t">
+            <a:bodyPr vert="horz" wrap="square" lIns="0" tIns="0" rIns="0" bIns="0" anchor="t">
               <a:noAutofit/>
             </a:bodyPr>
             <a:lstStyle/>
@@ -5908,18 +5378,20 @@
             <p:nvPr/>
           </p:nvSpPr>
           <p:spPr>
-            <a:xfrm rot="0">
+            <a:xfrm>
               <a:off x="5223510" y="3986530"/>
               <a:ext cx="743585" cy="814705"/>
             </a:xfrm>
-            <a:prstGeom prst="rect"/>
+            <a:prstGeom prst="rect">
+              <a:avLst/>
+            </a:prstGeom>
             <a:noFill/>
             <a:ln cap="flat" cmpd="sng">
               <a:prstDash/>
             </a:ln>
           </p:spPr>
           <p:txBody>
-            <a:bodyPr wrap="square" lIns="0" tIns="0" rIns="0" bIns="0" numCol="1" vert="horz" anchor="ctr">
+            <a:bodyPr vert="horz" wrap="square" lIns="0" tIns="0" rIns="0" bIns="0" numCol="1" anchor="ctr">
               <a:noAutofit/>
             </a:bodyPr>
             <a:lstStyle/>
@@ -5968,11 +5440,13 @@
             <p:nvPr/>
           </p:nvCxnSpPr>
           <p:spPr>
-            <a:xfrm rot="0">
+            <a:xfrm>
               <a:off x="6007100" y="4165600"/>
               <a:ext cx="635" cy="456565"/>
             </a:xfrm>
-            <a:prstGeom prst="line"/>
+            <a:prstGeom prst="line">
+              <a:avLst/>
+            </a:prstGeom>
             <a:noFill/>
             <a:ln w="12700" cap="flat" cmpd="sng">
               <a:solidFill>
@@ -6007,18 +5481,20 @@
             <p:nvPr/>
           </p:nvSpPr>
           <p:spPr>
-            <a:xfrm rot="0">
+            <a:xfrm>
               <a:off x="6097905" y="4050665"/>
               <a:ext cx="2625090" cy="704850"/>
             </a:xfrm>
-            <a:prstGeom prst="rect"/>
+            <a:prstGeom prst="rect">
+              <a:avLst/>
+            </a:prstGeom>
             <a:noFill/>
             <a:ln cap="flat" cmpd="sng">
               <a:prstDash/>
             </a:ln>
           </p:spPr>
           <p:txBody>
-            <a:bodyPr wrap="square" lIns="0" tIns="0" rIns="0" bIns="0" numCol="1" vert="horz" anchor="ctr">
+            <a:bodyPr vert="horz" wrap="square" lIns="0" tIns="0" rIns="0" bIns="0" numCol="1" anchor="ctr">
               <a:noAutofit/>
             </a:bodyPr>
             <a:lstStyle/>
@@ -6069,84 +5545,7 @@
                   <a:ea typeface="Arial" charset="0"/>
                   <a:cs typeface="Arial" charset="0"/>
                 </a:rPr>
-                <a:t> </a:t>
-              </a:r>
-              <a:r>
-                <a:rPr lang="ko-KR" altLang="en-US" sz="850" b="1">
-                  <a:solidFill>
-                    <a:srgbClr val="1A365D"/>
-                  </a:solidFill>
-                  <a:latin typeface="Arial" charset="0"/>
-                  <a:ea typeface="Arial" charset="0"/>
-                  <a:cs typeface="Arial" charset="0"/>
-                </a:rPr>
-                <a:t>분석 </a:t>
-              </a:r>
-              <a:r>
-                <a:rPr lang="ko-KR" altLang="en-US" sz="850" b="1">
-                  <a:solidFill>
-                    <a:srgbClr val="1A365D"/>
-                  </a:solidFill>
-                  <a:latin typeface="Arial" charset="0"/>
-                  <a:ea typeface="Arial" charset="0"/>
-                  <a:cs typeface="Arial" charset="0"/>
-                </a:rPr>
-                <a:t>권</a:t>
-              </a:r>
-              <a:r>
-                <a:rPr lang="ko-KR" altLang="en-US" sz="850" b="1">
-                  <a:solidFill>
-                    <a:srgbClr val="1A365D"/>
-                  </a:solidFill>
-                  <a:latin typeface="Arial" charset="0"/>
-                  <a:ea typeface="Arial" charset="0"/>
-                  <a:cs typeface="Arial" charset="0"/>
-                </a:rPr>
-                <a:t>고 </a:t>
-              </a:r>
-              <a:r>
-                <a:rPr lang="ko-KR" altLang="en-US" sz="850" b="1">
-                  <a:solidFill>
-                    <a:srgbClr val="1A365D"/>
-                  </a:solidFill>
-                  <a:latin typeface="Arial" charset="0"/>
-                  <a:ea typeface="Arial" charset="0"/>
-                  <a:cs typeface="Arial" charset="0"/>
-                </a:rPr>
-                <a:t>품</a:t>
-              </a:r>
-              <a:r>
-                <a:rPr lang="ko-KR" altLang="en-US" sz="850" b="1">
-                  <a:solidFill>
-                    <a:srgbClr val="1A365D"/>
-                  </a:solidFill>
-                  <a:latin typeface="Arial" charset="0"/>
-                  <a:ea typeface="Arial" charset="0"/>
-                  <a:cs typeface="Arial" charset="0"/>
-                </a:rPr>
-                <a:t>질 </a:t>
-              </a:r>
-              <a:r>
-                <a:rPr lang="ko-KR" altLang="en-US" sz="850" b="1">
-                  <a:solidFill>
-                    <a:srgbClr val="1A365D"/>
-                  </a:solidFill>
-                  <a:latin typeface="Arial" charset="0"/>
-                  <a:ea typeface="Arial" charset="0"/>
-                  <a:cs typeface="Arial" charset="0"/>
-                </a:rPr>
-                <a:t>개</a:t>
-              </a:r>
-              <a:r>
-                <a:rPr lang="ko-KR" altLang="en-US" sz="850" b="1">
-                  <a:solidFill>
-                    <a:srgbClr val="1A365D"/>
-                  </a:solidFill>
-                  <a:latin typeface="Arial" charset="0"/>
-                  <a:ea typeface="Arial" charset="0"/>
-                  <a:cs typeface="Arial" charset="0"/>
-                </a:rPr>
-                <a:t>선</a:t>
+                <a:t> 분석 권고 품질 개선</a:t>
               </a:r>
               <a:r>
                 <a:rPr lang="ko-KR" altLang="ko-KR" sz="750">
@@ -6253,7 +5652,18 @@
                   <a:ea typeface="맑은 고딕" charset="0"/>
                   <a:cs typeface="Arial" charset="0"/>
                 </a:rPr>
-                <a:t>&gt; 90</a:t>
+                <a:t>&gt; 90점 이상 고품질 권고 생성 비율 </a:t>
+              </a:r>
+              <a:r>
+                <a:rPr lang="ko-KR" altLang="ko-KR" sz="750" b="0">
+                  <a:solidFill>
+                    <a:srgbClr val="666666"/>
+                  </a:solidFill>
+                  <a:latin typeface="Arial" charset="0"/>
+                  <a:ea typeface="+mn-ea"/>
+                  <a:cs typeface="+mn-cs"/>
+                </a:rPr>
+                <a:t>4배</a:t>
               </a:r>
               <a:r>
                 <a:rPr lang="ko-KR" altLang="ko-KR" sz="750">
@@ -6264,150 +5674,7 @@
                   <a:ea typeface="맑은 고딕" charset="0"/>
                   <a:cs typeface="Arial" charset="0"/>
                 </a:rPr>
-                <a:t>점 </a:t>
-              </a:r>
-              <a:r>
-                <a:rPr lang="ko-KR" altLang="ko-KR" sz="750">
-                  <a:solidFill>
-                    <a:srgbClr val="666666"/>
-                  </a:solidFill>
-                  <a:latin typeface="Arial" charset="0"/>
-                  <a:ea typeface="맑은 고딕" charset="0"/>
-                  <a:cs typeface="Arial" charset="0"/>
-                </a:rPr>
-                <a:t>이</a:t>
-              </a:r>
-              <a:r>
-                <a:rPr lang="ko-KR" altLang="ko-KR" sz="750">
-                  <a:solidFill>
-                    <a:srgbClr val="666666"/>
-                  </a:solidFill>
-                  <a:latin typeface="Arial" charset="0"/>
-                  <a:ea typeface="맑은 고딕" charset="0"/>
-                  <a:cs typeface="Arial" charset="0"/>
-                </a:rPr>
-                <a:t>상 </a:t>
-              </a:r>
-              <a:r>
-                <a:rPr lang="ko-KR" altLang="ko-KR" sz="750">
-                  <a:solidFill>
-                    <a:srgbClr val="666666"/>
-                  </a:solidFill>
-                  <a:latin typeface="Arial" charset="0"/>
-                  <a:ea typeface="맑은 고딕" charset="0"/>
-                  <a:cs typeface="Arial" charset="0"/>
-                </a:rPr>
-                <a:t>고품</a:t>
-              </a:r>
-              <a:r>
-                <a:rPr lang="ko-KR" altLang="ko-KR" sz="750">
-                  <a:solidFill>
-                    <a:srgbClr val="666666"/>
-                  </a:solidFill>
-                  <a:latin typeface="Arial" charset="0"/>
-                  <a:ea typeface="맑은 고딕" charset="0"/>
-                  <a:cs typeface="Arial" charset="0"/>
-                </a:rPr>
-                <a:t>질 </a:t>
-              </a:r>
-              <a:r>
-                <a:rPr lang="ko-KR" altLang="ko-KR" sz="750">
-                  <a:solidFill>
-                    <a:srgbClr val="666666"/>
-                  </a:solidFill>
-                  <a:latin typeface="Arial" charset="0"/>
-                  <a:ea typeface="맑은 고딕" charset="0"/>
-                  <a:cs typeface="Arial" charset="0"/>
-                </a:rPr>
-                <a:t>권</a:t>
-              </a:r>
-              <a:r>
-                <a:rPr lang="ko-KR" altLang="ko-KR" sz="750">
-                  <a:solidFill>
-                    <a:srgbClr val="666666"/>
-                  </a:solidFill>
-                  <a:latin typeface="Arial" charset="0"/>
-                  <a:ea typeface="맑은 고딕" charset="0"/>
-                  <a:cs typeface="Arial" charset="0"/>
-                </a:rPr>
-                <a:t>고 생성 </a:t>
-              </a:r>
-              <a:r>
-                <a:rPr lang="ko-KR" altLang="ko-KR" sz="750">
-                  <a:solidFill>
-                    <a:srgbClr val="666666"/>
-                  </a:solidFill>
-                  <a:latin typeface="Arial" charset="0"/>
-                  <a:ea typeface="맑은 고딕" charset="0"/>
-                  <a:cs typeface="Arial" charset="0"/>
-                </a:rPr>
-                <a:t>비</a:t>
-              </a:r>
-              <a:r>
-                <a:rPr lang="ko-KR" altLang="ko-KR" sz="750">
-                  <a:solidFill>
-                    <a:srgbClr val="666666"/>
-                  </a:solidFill>
-                  <a:latin typeface="Arial" charset="0"/>
-                  <a:ea typeface="맑은 고딕" charset="0"/>
-                  <a:cs typeface="Arial" charset="0"/>
-                </a:rPr>
-                <a:t>율 </a:t>
-              </a:r>
-              <a:r>
-                <a:rPr lang="ko-KR" altLang="ko-KR" sz="750" b="0">
-                  <a:solidFill>
-                    <a:srgbClr val="666666"/>
-                  </a:solidFill>
-                  <a:latin typeface="Arial" charset="0"/>
-                  <a:ea typeface="+mn-ea"/>
-                  <a:cs typeface="+mn-cs"/>
-                </a:rPr>
-                <a:t>4</a:t>
-              </a:r>
-              <a:r>
-                <a:rPr lang="ko-KR" altLang="ko-KR" sz="750" b="0">
-                  <a:solidFill>
-                    <a:srgbClr val="666666"/>
-                  </a:solidFill>
-                  <a:latin typeface="Arial" charset="0"/>
-                  <a:ea typeface="+mn-ea"/>
-                  <a:cs typeface="+mn-cs"/>
-                </a:rPr>
-                <a:t>배</a:t>
-              </a:r>
-              <a:r>
-                <a:rPr lang="ko-KR" altLang="ko-KR" sz="750">
-                  <a:solidFill>
-                    <a:srgbClr val="666666"/>
-                  </a:solidFill>
-                  <a:latin typeface="Arial" charset="0"/>
-                  <a:ea typeface="맑은 고딕" charset="0"/>
-                  <a:cs typeface="Arial" charset="0"/>
-                </a:rPr>
-                <a:t> </a:t>
-              </a:r>
-              <a:r>
-                <a:rPr lang="ko-KR" altLang="ko-KR" sz="750">
-                  <a:solidFill>
-                    <a:srgbClr val="666666"/>
-                  </a:solidFill>
-                  <a:latin typeface="Arial" charset="0"/>
-                  <a:ea typeface="맑은 고딕" charset="0"/>
-                  <a:cs typeface="Arial" charset="0"/>
-                </a:rPr>
-                <a:t>증</a:t>
-              </a:r>
-              <a:r>
-                <a:rPr lang="ko-KR" altLang="ko-KR" sz="750">
-                  <a:solidFill>
-                    <a:srgbClr val="666666"/>
-                  </a:solidFill>
-                  <a:latin typeface="Arial" charset="0"/>
-                  <a:ea typeface="맑은 고딕" charset="0"/>
-                  <a:cs typeface="Arial" charset="0"/>
-                </a:rPr>
-                <a:t>가</a:t>
+                <a:t> 증가</a:t>
               </a:r>
               <a:endParaRPr lang="ko-KR" altLang="en-US" sz="750">
                 <a:solidFill>
@@ -6426,21 +5693,6 @@
   <p:clrMapOvr>
     <a:masterClrMapping/>
   </p:clrMapOvr>
-  <mc:AlternateContent xmlns:mc="http://schemas.openxmlformats.org/markup-compatibility/2006">
-    <mc:Choice xmlns:p14="http://schemas.microsoft.com/office/powerpoint/2010/main" Requires="p14">
-      <p:transition spd="slow" p14:dur="2000"/>
-    </mc:Choice>
-    <mc:Fallback>
-      <p:transition spd="slow"/>
-    </mc:Fallback>
-  </mc:AlternateContent>
-  <p:timing>
-    <p:tnLst>
-      <p:par>
-        <p:cTn id="1" dur="indefinite" restart="never" nodeType="tmRoot"/>
-      </p:par>
-    </p:tnLst>
-  </p:timing>
 </p:sld>
 </file>
 
